--- a/docs/content/05-teaching-resources/slides/specialism/03-emerging-technologies-and-skills.pptx
+++ b/docs/content/05-teaching-resources/slides/specialism/03-emerging-technologies-and-skills.pptx
@@ -13,6 +13,10 @@
     <p:sldId id="261" r:id="rId13"/>
     <p:sldId id="262" r:id="rId14"/>
     <p:sldId id="263" r:id="rId15"/>
+    <p:sldId id="264" r:id="rId16"/>
+    <p:sldId id="265" r:id="rId17"/>
+    <p:sldId id="266" r:id="rId18"/>
+    <p:sldId id="267" r:id="rId19"/>
   </p:sldIdLst>
   <p:sldSz cx="12191695" cy="6858000" type="screen4x3"/>
   <p:notesSz cx="6858000" cy="9144000"/>
@@ -509,7 +513,22 @@
           <a:lstStyle/>
           <a:p>
             <a:r>
-              <a:t>Give students a few minutes to answer on mini whiteboards or paper, then reveal the answers on the next slide.</a:t>
+              <a:t>Answers:</a:t>
+            </a:r>
+          </a:p>
+          <a:p>
+            <a:r>
+              <a:t>1. AI that interprets images and video.</a:t>
+            </a:r>
+          </a:p>
+          <a:p>
+            <a:r>
+              <a:t>2. Systems that monitor and control physical equipment.</a:t>
+            </a:r>
+          </a:p>
+          <a:p>
+            <a:r>
+              <a:t>3. Faster mobile connections allow richer real-time features.</a:t>
             </a:r>
           </a:p>
         </p:txBody>
@@ -579,7 +598,22 @@
           <a:lstStyle/>
           <a:p>
             <a:r>
-              <a:t>Talk through any answers the class found difficult.</a:t>
+              <a:t>Answers:</a:t>
+            </a:r>
+          </a:p>
+          <a:p>
+            <a:r>
+              <a:t>1. Identify the skills needed and check you have them.</a:t>
+            </a:r>
+          </a:p>
+          <a:p>
+            <a:r>
+              <a:t>2. Any three: coaching, on-the-job learning, self-study, forums, workshops.</a:t>
+            </a:r>
+          </a:p>
+          <a:p>
+            <a:r>
+              <a:t>3. Technologies change constantly.</a:t>
             </a:r>
           </a:p>
         </p:txBody>
@@ -605,6 +639,146 @@
 </file>
 
 <file path=ppt/notesSlides/notesSlide3.xml><?xml version="1.0" encoding="utf-8"?>
+<p:notes xmlns:a="http://schemas.openxmlformats.org/drawingml/2006/main" xmlns:p="http://schemas.openxmlformats.org/presentationml/2006/main" xmlns:r="http://schemas.openxmlformats.org/officeDocument/2006/relationships">
+  <p:cSld>
+    <p:spTree>
+      <p:nvGrpSpPr>
+        <p:cNvPr id="1" name=""/>
+        <p:cNvGrpSpPr/>
+        <p:nvPr/>
+      </p:nvGrpSpPr>
+      <p:grpSpPr>
+        <a:xfrm>
+          <a:off x="0" y="0"/>
+          <a:ext cx="0" cy="0"/>
+          <a:chOff x="0" y="0"/>
+          <a:chExt cx="0" cy="0"/>
+        </a:xfrm>
+      </p:grpSpPr>
+      <p:sp>
+        <p:nvSpPr>
+          <p:cNvPr id="2" name="Slide Image Placeholder 1"/>
+          <p:cNvSpPr>
+            <a:spLocks noGrp="1"/>
+          </p:cNvSpPr>
+          <p:nvPr>
+            <p:ph type="sldImg" idx="2"/>
+          </p:nvPr>
+        </p:nvSpPr>
+        <p:spPr/>
+      </p:sp>
+      <p:sp>
+        <p:nvSpPr>
+          <p:cNvPr id="3" name="Notes Placeholder 2"/>
+          <p:cNvSpPr>
+            <a:spLocks noGrp="1"/>
+          </p:cNvSpPr>
+          <p:nvPr>
+            <p:ph type="body" idx="3" sz="quarter"/>
+          </p:nvPr>
+        </p:nvSpPr>
+        <p:spPr/>
+        <p:txBody>
+          <a:bodyPr/>
+          <a:lstStyle/>
+          <a:p>
+            <a:r>
+              <a:t>Give students a few minutes to answer on mini whiteboards or paper, then reveal the answers on the next slide.</a:t>
+            </a:r>
+          </a:p>
+        </p:txBody>
+      </p:sp>
+      <p:sp>
+        <p:nvSpPr>
+          <p:cNvPr id="4" name="Slide Number Placeholder 3"/>
+          <p:cNvSpPr>
+            <a:spLocks noGrp="1"/>
+          </p:cNvSpPr>
+          <p:nvPr>
+            <p:ph type="sldNum" idx="5" sz="quarter"/>
+          </p:nvPr>
+        </p:nvSpPr>
+        <p:spPr/>
+      </p:sp>
+    </p:spTree>
+  </p:cSld>
+  <p:clrMapOvr>
+    <a:masterClrMapping/>
+  </p:clrMapOvr>
+</p:notes>
+</file>
+
+<file path=ppt/notesSlides/notesSlide4.xml><?xml version="1.0" encoding="utf-8"?>
+<p:notes xmlns:a="http://schemas.openxmlformats.org/drawingml/2006/main" xmlns:p="http://schemas.openxmlformats.org/presentationml/2006/main" xmlns:r="http://schemas.openxmlformats.org/officeDocument/2006/relationships">
+  <p:cSld>
+    <p:spTree>
+      <p:nvGrpSpPr>
+        <p:cNvPr id="1" name=""/>
+        <p:cNvGrpSpPr/>
+        <p:nvPr/>
+      </p:nvGrpSpPr>
+      <p:grpSpPr>
+        <a:xfrm>
+          <a:off x="0" y="0"/>
+          <a:ext cx="0" cy="0"/>
+          <a:chOff x="0" y="0"/>
+          <a:chExt cx="0" cy="0"/>
+        </a:xfrm>
+      </p:grpSpPr>
+      <p:sp>
+        <p:nvSpPr>
+          <p:cNvPr id="2" name="Slide Image Placeholder 1"/>
+          <p:cNvSpPr>
+            <a:spLocks noGrp="1"/>
+          </p:cNvSpPr>
+          <p:nvPr>
+            <p:ph type="sldImg" idx="2"/>
+          </p:nvPr>
+        </p:nvSpPr>
+        <p:spPr/>
+      </p:sp>
+      <p:sp>
+        <p:nvSpPr>
+          <p:cNvPr id="3" name="Notes Placeholder 2"/>
+          <p:cNvSpPr>
+            <a:spLocks noGrp="1"/>
+          </p:cNvSpPr>
+          <p:nvPr>
+            <p:ph type="body" idx="3" sz="quarter"/>
+          </p:nvPr>
+        </p:nvSpPr>
+        <p:spPr/>
+        <p:txBody>
+          <a:bodyPr/>
+          <a:lstStyle/>
+          <a:p>
+            <a:r>
+              <a:t>Talk through any answers the class found difficult.</a:t>
+            </a:r>
+          </a:p>
+        </p:txBody>
+      </p:sp>
+      <p:sp>
+        <p:nvSpPr>
+          <p:cNvPr id="4" name="Slide Number Placeholder 3"/>
+          <p:cNvSpPr>
+            <a:spLocks noGrp="1"/>
+          </p:cNvSpPr>
+          <p:nvPr>
+            <p:ph type="sldNum" idx="5" sz="quarter"/>
+          </p:nvPr>
+        </p:nvSpPr>
+        <p:spPr/>
+      </p:sp>
+    </p:spTree>
+  </p:cSld>
+  <p:clrMapOvr>
+    <a:masterClrMapping/>
+  </p:clrMapOvr>
+</p:notes>
+</file>
+
+<file path=ppt/notesSlides/notesSlide5.xml><?xml version="1.0" encoding="utf-8"?>
 <p:notes xmlns:a="http://schemas.openxmlformats.org/drawingml/2006/main" xmlns:p="http://schemas.openxmlformats.org/presentationml/2006/main" xmlns:r="http://schemas.openxmlformats.org/officeDocument/2006/relationships">
   <p:cSld>
     <p:spTree>
@@ -3974,6 +4148,1756 @@
 </p:sld>
 </file>
 
+<file path=ppt/slides/slide10.xml><?xml version="1.0" encoding="utf-8"?>
+<p:sld xmlns:a="http://schemas.openxmlformats.org/drawingml/2006/main" xmlns:p="http://schemas.openxmlformats.org/presentationml/2006/main" xmlns:r="http://schemas.openxmlformats.org/officeDocument/2006/relationships">
+  <p:cSld>
+    <p:bg>
+      <p:bgPr>
+        <a:solidFill>
+          <a:srgbClr val="FFFFFF"/>
+        </a:solidFill>
+        <a:effectLst/>
+      </p:bgPr>
+    </p:bg>
+    <p:spTree>
+      <p:nvGrpSpPr>
+        <p:cNvPr id="1" name=""/>
+        <p:cNvGrpSpPr/>
+        <p:nvPr/>
+      </p:nvGrpSpPr>
+      <p:grpSpPr/>
+      <p:sp>
+        <p:nvSpPr>
+          <p:cNvPr id="2" name="TextBox 1"/>
+          <p:cNvSpPr txBox="1"/>
+          <p:nvPr/>
+        </p:nvSpPr>
+        <p:spPr>
+          <a:xfrm>
+            <a:off x="548640" y="320040"/>
+            <a:ext cx="11094415" cy="274320"/>
+          </a:xfrm>
+          <a:prstGeom prst="rect">
+            <a:avLst/>
+          </a:prstGeom>
+          <a:noFill/>
+        </p:spPr>
+        <p:txBody>
+          <a:bodyPr wrap="square" anchor="t" lIns="0" rIns="0" tIns="0" bIns="0"/>
+          <a:lstStyle/>
+          <a:p>
+            <a:pPr algn="l"/>
+            <a:r>
+              <a:rPr sz="1100" b="1" i="0">
+                <a:solidFill>
+                  <a:srgbClr val="54595D"/>
+                </a:solidFill>
+                <a:latin typeface="Calibri"/>
+              </a:rPr>
+              <a:t>OCCUPATIONAL SPECIALISM  ·  Specialism Content Area 1</a:t>
+            </a:r>
+          </a:p>
+        </p:txBody>
+      </p:sp>
+      <p:sp>
+        <p:nvSpPr>
+          <p:cNvPr id="3" name="TextBox 2"/>
+          <p:cNvSpPr txBox="1"/>
+          <p:nvPr/>
+        </p:nvSpPr>
+        <p:spPr>
+          <a:xfrm>
+            <a:off x="548640" y="566928"/>
+            <a:ext cx="11094415" cy="822960"/>
+          </a:xfrm>
+          <a:prstGeom prst="rect">
+            <a:avLst/>
+          </a:prstGeom>
+          <a:noFill/>
+        </p:spPr>
+        <p:txBody>
+          <a:bodyPr wrap="square" anchor="ctr" lIns="0" rIns="0" tIns="0" bIns="0"/>
+          <a:lstStyle/>
+          <a:p>
+            <a:pPr algn="l"/>
+            <a:r>
+              <a:rPr sz="3200" b="1" i="0">
+                <a:solidFill>
+                  <a:srgbClr val="03306E"/>
+                </a:solidFill>
+                <a:latin typeface="Cambria"/>
+              </a:rPr>
+              <a:t>Answers</a:t>
+            </a:r>
+          </a:p>
+        </p:txBody>
+      </p:sp>
+      <p:sp>
+        <p:nvSpPr>
+          <p:cNvPr id="4" name="TextBox 3"/>
+          <p:cNvSpPr txBox="1"/>
+          <p:nvPr/>
+        </p:nvSpPr>
+        <p:spPr>
+          <a:xfrm>
+            <a:off x="548640" y="6446520"/>
+            <a:ext cx="8229600" cy="274320"/>
+          </a:xfrm>
+          <a:prstGeom prst="rect">
+            <a:avLst/>
+          </a:prstGeom>
+          <a:noFill/>
+        </p:spPr>
+        <p:txBody>
+          <a:bodyPr wrap="square" anchor="t" lIns="0" rIns="0" tIns="0" bIns="0"/>
+          <a:lstStyle/>
+          <a:p>
+            <a:pPr algn="l"/>
+            <a:r>
+              <a:rPr sz="1000" b="0" i="0">
+                <a:solidFill>
+                  <a:srgbClr val="54595D"/>
+                </a:solidFill>
+                <a:latin typeface="Calibri"/>
+              </a:rPr>
+              <a:t>Digital Software Development T Level  ·  Emerging Technologies and Developing Your Skills</a:t>
+            </a:r>
+          </a:p>
+        </p:txBody>
+      </p:sp>
+      <p:sp>
+        <p:nvSpPr>
+          <p:cNvPr id="5" name="TextBox 4"/>
+          <p:cNvSpPr txBox="1"/>
+          <p:nvPr/>
+        </p:nvSpPr>
+        <p:spPr>
+          <a:xfrm>
+            <a:off x="10728655" y="6446520"/>
+            <a:ext cx="914400" cy="274320"/>
+          </a:xfrm>
+          <a:prstGeom prst="rect">
+            <a:avLst/>
+          </a:prstGeom>
+          <a:noFill/>
+        </p:spPr>
+        <p:txBody>
+          <a:bodyPr wrap="square" anchor="t" lIns="0" rIns="0" tIns="0" bIns="0"/>
+          <a:lstStyle/>
+          <a:p>
+            <a:pPr algn="r"/>
+            <a:r>
+              <a:rPr sz="1000" b="0" i="0">
+                <a:solidFill>
+                  <a:srgbClr val="54595D"/>
+                </a:solidFill>
+                <a:latin typeface="Calibri"/>
+              </a:rPr>
+              <a:t>10</a:t>
+            </a:r>
+          </a:p>
+        </p:txBody>
+      </p:sp>
+      <p:sp>
+        <p:nvSpPr>
+          <p:cNvPr id="6" name="Oval 5"/>
+          <p:cNvSpPr/>
+          <p:nvPr/>
+        </p:nvSpPr>
+        <p:spPr>
+          <a:xfrm>
+            <a:off x="548640" y="1618488"/>
+            <a:ext cx="411480" cy="411480"/>
+          </a:xfrm>
+          <a:prstGeom prst="ellipse">
+            <a:avLst/>
+          </a:prstGeom>
+          <a:solidFill>
+            <a:srgbClr val="33C17A"/>
+          </a:solidFill>
+          <a:ln>
+            <a:noFill/>
+          </a:ln>
+          <a:effectLst/>
+        </p:spPr>
+        <p:style>
+          <a:lnRef idx="1">
+            <a:schemeClr val="accent1"/>
+          </a:lnRef>
+          <a:fillRef idx="3">
+            <a:schemeClr val="accent1"/>
+          </a:fillRef>
+          <a:effectRef idx="2">
+            <a:schemeClr val="accent1"/>
+          </a:effectRef>
+          <a:fontRef idx="minor">
+            <a:schemeClr val="lt1"/>
+          </a:fontRef>
+        </p:style>
+        <p:txBody>
+          <a:bodyPr rtlCol="0" anchor="ctr" lIns="0" rIns="0" tIns="0" bIns="0"/>
+          <a:lstStyle/>
+          <a:p>
+            <a:pPr algn="ctr"/>
+            <a:r>
+              <a:rPr sz="1400" b="1">
+                <a:solidFill>
+                  <a:srgbClr val="202122"/>
+                </a:solidFill>
+                <a:latin typeface="Calibri"/>
+              </a:rPr>
+              <a:t>1</a:t>
+            </a:r>
+          </a:p>
+        </p:txBody>
+      </p:sp>
+      <p:sp>
+        <p:nvSpPr>
+          <p:cNvPr id="7" name="TextBox 6"/>
+          <p:cNvSpPr txBox="1"/>
+          <p:nvPr/>
+        </p:nvSpPr>
+        <p:spPr>
+          <a:xfrm>
+            <a:off x="1234440" y="1600200"/>
+            <a:ext cx="10408615" cy="1429512"/>
+          </a:xfrm>
+          <a:prstGeom prst="rect">
+            <a:avLst/>
+          </a:prstGeom>
+          <a:noFill/>
+        </p:spPr>
+        <p:txBody>
+          <a:bodyPr wrap="square" anchor="t" lIns="0" rIns="0" tIns="0" bIns="0"/>
+          <a:lstStyle/>
+          <a:p>
+            <a:pPr algn="l"/>
+            <a:r>
+              <a:rPr sz="1800" b="0" i="0">
+                <a:solidFill>
+                  <a:srgbClr val="54595D"/>
+                </a:solidFill>
+                <a:latin typeface="Calibri"/>
+              </a:rPr>
+              <a:t>What is computer vision?</a:t>
+            </a:r>
+          </a:p>
+          <a:p>
+            <a:r>
+              <a:rPr sz="1800" b="1">
+                <a:solidFill>
+                  <a:srgbClr val="03306E"/>
+                </a:solidFill>
+                <a:latin typeface="Calibri"/>
+              </a:rPr>
+              <a:t>AI that interprets images or video.</a:t>
+            </a:r>
+          </a:p>
+        </p:txBody>
+      </p:sp>
+      <p:sp>
+        <p:nvSpPr>
+          <p:cNvPr id="8" name="Oval 7"/>
+          <p:cNvSpPr/>
+          <p:nvPr/>
+        </p:nvSpPr>
+        <p:spPr>
+          <a:xfrm>
+            <a:off x="548640" y="3212592"/>
+            <a:ext cx="411480" cy="411480"/>
+          </a:xfrm>
+          <a:prstGeom prst="ellipse">
+            <a:avLst/>
+          </a:prstGeom>
+          <a:solidFill>
+            <a:srgbClr val="33C17A"/>
+          </a:solidFill>
+          <a:ln>
+            <a:noFill/>
+          </a:ln>
+          <a:effectLst/>
+        </p:spPr>
+        <p:style>
+          <a:lnRef idx="1">
+            <a:schemeClr val="accent1"/>
+          </a:lnRef>
+          <a:fillRef idx="3">
+            <a:schemeClr val="accent1"/>
+          </a:fillRef>
+          <a:effectRef idx="2">
+            <a:schemeClr val="accent1"/>
+          </a:effectRef>
+          <a:fontRef idx="minor">
+            <a:schemeClr val="lt1"/>
+          </a:fontRef>
+        </p:style>
+        <p:txBody>
+          <a:bodyPr rtlCol="0" anchor="ctr" lIns="0" rIns="0" tIns="0" bIns="0"/>
+          <a:lstStyle/>
+          <a:p>
+            <a:pPr algn="ctr"/>
+            <a:r>
+              <a:rPr sz="1400" b="1">
+                <a:solidFill>
+                  <a:srgbClr val="202122"/>
+                </a:solidFill>
+                <a:latin typeface="Calibri"/>
+              </a:rPr>
+              <a:t>2</a:t>
+            </a:r>
+          </a:p>
+        </p:txBody>
+      </p:sp>
+      <p:sp>
+        <p:nvSpPr>
+          <p:cNvPr id="9" name="TextBox 8"/>
+          <p:cNvSpPr txBox="1"/>
+          <p:nvPr/>
+        </p:nvSpPr>
+        <p:spPr>
+          <a:xfrm>
+            <a:off x="1234440" y="3194304"/>
+            <a:ext cx="10408615" cy="1429512"/>
+          </a:xfrm>
+          <a:prstGeom prst="rect">
+            <a:avLst/>
+          </a:prstGeom>
+          <a:noFill/>
+        </p:spPr>
+        <p:txBody>
+          <a:bodyPr wrap="square" anchor="t" lIns="0" rIns="0" tIns="0" bIns="0"/>
+          <a:lstStyle/>
+          <a:p>
+            <a:pPr algn="l"/>
+            <a:r>
+              <a:rPr sz="1800" b="0" i="0">
+                <a:solidFill>
+                  <a:srgbClr val="54595D"/>
+                </a:solidFill>
+                <a:latin typeface="Calibri"/>
+              </a:rPr>
+              <a:t>Give two ways to close a skills gap.</a:t>
+            </a:r>
+          </a:p>
+          <a:p>
+            <a:r>
+              <a:rPr sz="1800" b="1">
+                <a:solidFill>
+                  <a:srgbClr val="03306E"/>
+                </a:solidFill>
+                <a:latin typeface="Calibri"/>
+              </a:rPr>
+              <a:t>Any two of: coaching, on-the-job learning, self-study, online forums, online workshops.</a:t>
+            </a:r>
+          </a:p>
+        </p:txBody>
+      </p:sp>
+      <p:sp>
+        <p:nvSpPr>
+          <p:cNvPr id="10" name="Oval 9"/>
+          <p:cNvSpPr/>
+          <p:nvPr/>
+        </p:nvSpPr>
+        <p:spPr>
+          <a:xfrm>
+            <a:off x="548640" y="4806695"/>
+            <a:ext cx="411480" cy="411480"/>
+          </a:xfrm>
+          <a:prstGeom prst="ellipse">
+            <a:avLst/>
+          </a:prstGeom>
+          <a:solidFill>
+            <a:srgbClr val="33C17A"/>
+          </a:solidFill>
+          <a:ln>
+            <a:noFill/>
+          </a:ln>
+          <a:effectLst/>
+        </p:spPr>
+        <p:style>
+          <a:lnRef idx="1">
+            <a:schemeClr val="accent1"/>
+          </a:lnRef>
+          <a:fillRef idx="3">
+            <a:schemeClr val="accent1"/>
+          </a:fillRef>
+          <a:effectRef idx="2">
+            <a:schemeClr val="accent1"/>
+          </a:effectRef>
+          <a:fontRef idx="minor">
+            <a:schemeClr val="lt1"/>
+          </a:fontRef>
+        </p:style>
+        <p:txBody>
+          <a:bodyPr rtlCol="0" anchor="ctr" lIns="0" rIns="0" tIns="0" bIns="0"/>
+          <a:lstStyle/>
+          <a:p>
+            <a:pPr algn="ctr"/>
+            <a:r>
+              <a:rPr sz="1400" b="1">
+                <a:solidFill>
+                  <a:srgbClr val="202122"/>
+                </a:solidFill>
+                <a:latin typeface="Calibri"/>
+              </a:rPr>
+              <a:t>3</a:t>
+            </a:r>
+          </a:p>
+        </p:txBody>
+      </p:sp>
+      <p:sp>
+        <p:nvSpPr>
+          <p:cNvPr id="11" name="TextBox 10"/>
+          <p:cNvSpPr txBox="1"/>
+          <p:nvPr/>
+        </p:nvSpPr>
+        <p:spPr>
+          <a:xfrm>
+            <a:off x="1234440" y="4788408"/>
+            <a:ext cx="10408615" cy="1429512"/>
+          </a:xfrm>
+          <a:prstGeom prst="rect">
+            <a:avLst/>
+          </a:prstGeom>
+          <a:noFill/>
+        </p:spPr>
+        <p:txBody>
+          <a:bodyPr wrap="square" anchor="t" lIns="0" rIns="0" tIns="0" bIns="0"/>
+          <a:lstStyle/>
+          <a:p>
+            <a:pPr algn="l"/>
+            <a:r>
+              <a:rPr sz="1800" b="0" i="0">
+                <a:solidFill>
+                  <a:srgbClr val="54595D"/>
+                </a:solidFill>
+                <a:latin typeface="Calibri"/>
+              </a:rPr>
+              <a:t>What is operational technology?</a:t>
+            </a:r>
+          </a:p>
+          <a:p>
+            <a:r>
+              <a:rPr sz="1800" b="1">
+                <a:solidFill>
+                  <a:srgbClr val="03306E"/>
+                </a:solidFill>
+                <a:latin typeface="Calibri"/>
+              </a:rPr>
+              <a:t>Hardware and software that monitors and controls physical equipment.</a:t>
+            </a:r>
+          </a:p>
+        </p:txBody>
+      </p:sp>
+    </p:spTree>
+  </p:cSld>
+  <p:clrMapOvr>
+    <a:masterClrMapping/>
+  </p:clrMapOvr>
+</p:sld>
+</file>
+
+<file path=ppt/slides/slide11.xml><?xml version="1.0" encoding="utf-8"?>
+<p:sld xmlns:a="http://schemas.openxmlformats.org/drawingml/2006/main" xmlns:p="http://schemas.openxmlformats.org/presentationml/2006/main" xmlns:r="http://schemas.openxmlformats.org/officeDocument/2006/relationships">
+  <p:cSld>
+    <p:bg>
+      <p:bgPr>
+        <a:solidFill>
+          <a:srgbClr val="FFFFFF"/>
+        </a:solidFill>
+        <a:effectLst/>
+      </p:bgPr>
+    </p:bg>
+    <p:spTree>
+      <p:nvGrpSpPr>
+        <p:cNvPr id="1" name=""/>
+        <p:cNvGrpSpPr/>
+        <p:nvPr/>
+      </p:nvGrpSpPr>
+      <p:grpSpPr/>
+      <p:sp>
+        <p:nvSpPr>
+          <p:cNvPr id="2" name="TextBox 1"/>
+          <p:cNvSpPr txBox="1"/>
+          <p:nvPr/>
+        </p:nvSpPr>
+        <p:spPr>
+          <a:xfrm>
+            <a:off x="548640" y="320040"/>
+            <a:ext cx="11094415" cy="274320"/>
+          </a:xfrm>
+          <a:prstGeom prst="rect">
+            <a:avLst/>
+          </a:prstGeom>
+          <a:noFill/>
+        </p:spPr>
+        <p:txBody>
+          <a:bodyPr wrap="square" anchor="t" lIns="0" rIns="0" tIns="0" bIns="0"/>
+          <a:lstStyle/>
+          <a:p>
+            <a:pPr algn="l"/>
+            <a:r>
+              <a:rPr sz="1100" b="1" i="0">
+                <a:solidFill>
+                  <a:srgbClr val="54595D"/>
+                </a:solidFill>
+                <a:latin typeface="Calibri"/>
+              </a:rPr>
+              <a:t>OCCUPATIONAL SPECIALISM  ·  Specialism Content Area 1</a:t>
+            </a:r>
+          </a:p>
+        </p:txBody>
+      </p:sp>
+      <p:sp>
+        <p:nvSpPr>
+          <p:cNvPr id="3" name="TextBox 2"/>
+          <p:cNvSpPr txBox="1"/>
+          <p:nvPr/>
+        </p:nvSpPr>
+        <p:spPr>
+          <a:xfrm>
+            <a:off x="548640" y="566928"/>
+            <a:ext cx="11094415" cy="822960"/>
+          </a:xfrm>
+          <a:prstGeom prst="rect">
+            <a:avLst/>
+          </a:prstGeom>
+          <a:noFill/>
+        </p:spPr>
+        <p:txBody>
+          <a:bodyPr wrap="square" anchor="ctr" lIns="0" rIns="0" tIns="0" bIns="0"/>
+          <a:lstStyle/>
+          <a:p>
+            <a:pPr algn="l"/>
+            <a:r>
+              <a:rPr sz="3200" b="1" i="0">
+                <a:solidFill>
+                  <a:srgbClr val="03306E"/>
+                </a:solidFill>
+                <a:latin typeface="Cambria"/>
+              </a:rPr>
+              <a:t>Activity: Skills audit</a:t>
+            </a:r>
+          </a:p>
+        </p:txBody>
+      </p:sp>
+      <p:sp>
+        <p:nvSpPr>
+          <p:cNvPr id="4" name="TextBox 3"/>
+          <p:cNvSpPr txBox="1"/>
+          <p:nvPr/>
+        </p:nvSpPr>
+        <p:spPr>
+          <a:xfrm>
+            <a:off x="548640" y="6446520"/>
+            <a:ext cx="8229600" cy="274320"/>
+          </a:xfrm>
+          <a:prstGeom prst="rect">
+            <a:avLst/>
+          </a:prstGeom>
+          <a:noFill/>
+        </p:spPr>
+        <p:txBody>
+          <a:bodyPr wrap="square" anchor="t" lIns="0" rIns="0" tIns="0" bIns="0"/>
+          <a:lstStyle/>
+          <a:p>
+            <a:pPr algn="l"/>
+            <a:r>
+              <a:rPr sz="1000" b="0" i="0">
+                <a:solidFill>
+                  <a:srgbClr val="54595D"/>
+                </a:solidFill>
+                <a:latin typeface="Calibri"/>
+              </a:rPr>
+              <a:t>Digital Software Development T Level  ·  Emerging Technologies and Developing Your Skills</a:t>
+            </a:r>
+          </a:p>
+        </p:txBody>
+      </p:sp>
+      <p:sp>
+        <p:nvSpPr>
+          <p:cNvPr id="5" name="TextBox 4"/>
+          <p:cNvSpPr txBox="1"/>
+          <p:nvPr/>
+        </p:nvSpPr>
+        <p:spPr>
+          <a:xfrm>
+            <a:off x="10728655" y="6446520"/>
+            <a:ext cx="914400" cy="274320"/>
+          </a:xfrm>
+          <a:prstGeom prst="rect">
+            <a:avLst/>
+          </a:prstGeom>
+          <a:noFill/>
+        </p:spPr>
+        <p:txBody>
+          <a:bodyPr wrap="square" anchor="t" lIns="0" rIns="0" tIns="0" bIns="0"/>
+          <a:lstStyle/>
+          <a:p>
+            <a:pPr algn="r"/>
+            <a:r>
+              <a:rPr sz="1000" b="0" i="0">
+                <a:solidFill>
+                  <a:srgbClr val="54595D"/>
+                </a:solidFill>
+                <a:latin typeface="Calibri"/>
+              </a:rPr>
+              <a:t>11</a:t>
+            </a:r>
+          </a:p>
+        </p:txBody>
+      </p:sp>
+      <p:sp>
+        <p:nvSpPr>
+          <p:cNvPr id="6" name="Rounded Rectangle 5"/>
+          <p:cNvSpPr/>
+          <p:nvPr/>
+        </p:nvSpPr>
+        <p:spPr>
+          <a:xfrm>
+            <a:off x="548640" y="1508760"/>
+            <a:ext cx="2011680" cy="457200"/>
+          </a:xfrm>
+          <a:prstGeom prst="roundRect">
+            <a:avLst>
+              <a:gd name="adj" fmla="val 50000"/>
+            </a:avLst>
+          </a:prstGeom>
+          <a:solidFill>
+            <a:srgbClr val="33C17A"/>
+          </a:solidFill>
+          <a:ln>
+            <a:noFill/>
+          </a:ln>
+          <a:effectLst/>
+        </p:spPr>
+        <p:style>
+          <a:lnRef idx="1">
+            <a:schemeClr val="accent1"/>
+          </a:lnRef>
+          <a:fillRef idx="3">
+            <a:schemeClr val="accent1"/>
+          </a:fillRef>
+          <a:effectRef idx="2">
+            <a:schemeClr val="accent1"/>
+          </a:effectRef>
+          <a:fontRef idx="minor">
+            <a:schemeClr val="lt1"/>
+          </a:fontRef>
+        </p:style>
+        <p:txBody>
+          <a:bodyPr rtlCol="0" anchor="ctr"/>
+          <a:lstStyle/>
+          <a:p/>
+        </p:txBody>
+      </p:sp>
+      <p:sp>
+        <p:nvSpPr>
+          <p:cNvPr id="7" name="TextBox 6"/>
+          <p:cNvSpPr txBox="1"/>
+          <p:nvPr/>
+        </p:nvSpPr>
+        <p:spPr>
+          <a:xfrm>
+            <a:off x="548640" y="1508760"/>
+            <a:ext cx="2011680" cy="457200"/>
+          </a:xfrm>
+          <a:prstGeom prst="rect">
+            <a:avLst/>
+          </a:prstGeom>
+          <a:noFill/>
+        </p:spPr>
+        <p:txBody>
+          <a:bodyPr wrap="square" anchor="ctr" lIns="0" rIns="0" tIns="0" bIns="0"/>
+          <a:lstStyle/>
+          <a:p>
+            <a:pPr algn="ctr"/>
+            <a:r>
+              <a:rPr sz="1400" b="1" i="0">
+                <a:solidFill>
+                  <a:srgbClr val="202122"/>
+                </a:solidFill>
+                <a:latin typeface="Calibri"/>
+              </a:rPr>
+              <a:t>20 minutes</a:t>
+            </a:r>
+          </a:p>
+        </p:txBody>
+      </p:sp>
+      <p:sp>
+        <p:nvSpPr>
+          <p:cNvPr id="8" name="TextBox 7"/>
+          <p:cNvSpPr txBox="1"/>
+          <p:nvPr/>
+        </p:nvSpPr>
+        <p:spPr>
+          <a:xfrm>
+            <a:off x="2743200" y="1508760"/>
+            <a:ext cx="4754880" cy="457200"/>
+          </a:xfrm>
+          <a:prstGeom prst="rect">
+            <a:avLst/>
+          </a:prstGeom>
+          <a:noFill/>
+        </p:spPr>
+        <p:txBody>
+          <a:bodyPr wrap="square" anchor="ctr" lIns="0" rIns="0" tIns="0" bIns="0"/>
+          <a:lstStyle/>
+          <a:p>
+            <a:pPr algn="l"/>
+            <a:r>
+              <a:rPr sz="1400" b="0" i="1">
+                <a:solidFill>
+                  <a:srgbClr val="54595D"/>
+                </a:solidFill>
+                <a:latin typeface="Calibri"/>
+              </a:rPr>
+              <a:t>Individual</a:t>
+            </a:r>
+          </a:p>
+        </p:txBody>
+      </p:sp>
+      <p:sp>
+        <p:nvSpPr>
+          <p:cNvPr id="9" name="Oval 8"/>
+          <p:cNvSpPr/>
+          <p:nvPr/>
+        </p:nvSpPr>
+        <p:spPr>
+          <a:xfrm>
+            <a:off x="548640" y="2482596"/>
+            <a:ext cx="384048" cy="384048"/>
+          </a:xfrm>
+          <a:prstGeom prst="ellipse">
+            <a:avLst/>
+          </a:prstGeom>
+          <a:solidFill>
+            <a:srgbClr val="0645AD"/>
+          </a:solidFill>
+          <a:ln>
+            <a:noFill/>
+          </a:ln>
+          <a:effectLst/>
+        </p:spPr>
+        <p:style>
+          <a:lnRef idx="1">
+            <a:schemeClr val="accent1"/>
+          </a:lnRef>
+          <a:fillRef idx="3">
+            <a:schemeClr val="accent1"/>
+          </a:fillRef>
+          <a:effectRef idx="2">
+            <a:schemeClr val="accent1"/>
+          </a:effectRef>
+          <a:fontRef idx="minor">
+            <a:schemeClr val="lt1"/>
+          </a:fontRef>
+        </p:style>
+        <p:txBody>
+          <a:bodyPr rtlCol="0" anchor="ctr" lIns="0" rIns="0" tIns="0" bIns="0"/>
+          <a:lstStyle/>
+          <a:p>
+            <a:pPr algn="ctr"/>
+            <a:r>
+              <a:rPr sz="1300" b="1">
+                <a:solidFill>
+                  <a:srgbClr val="FFFFFF"/>
+                </a:solidFill>
+                <a:latin typeface="Calibri"/>
+              </a:rPr>
+              <a:t>1</a:t>
+            </a:r>
+          </a:p>
+        </p:txBody>
+      </p:sp>
+      <p:sp>
+        <p:nvSpPr>
+          <p:cNvPr id="10" name="TextBox 9"/>
+          <p:cNvSpPr txBox="1"/>
+          <p:nvPr/>
+        </p:nvSpPr>
+        <p:spPr>
+          <a:xfrm>
+            <a:off x="1143000" y="2240280"/>
+            <a:ext cx="5943600" cy="868680"/>
+          </a:xfrm>
+          <a:prstGeom prst="rect">
+            <a:avLst/>
+          </a:prstGeom>
+          <a:noFill/>
+        </p:spPr>
+        <p:txBody>
+          <a:bodyPr wrap="square" anchor="ctr" lIns="0" rIns="0" tIns="0" bIns="0"/>
+          <a:lstStyle/>
+          <a:p>
+            <a:pPr algn="l"/>
+            <a:r>
+              <a:rPr sz="1700" b="0" i="0">
+                <a:solidFill>
+                  <a:srgbClr val="202122"/>
+                </a:solidFill>
+                <a:latin typeface="Calibri"/>
+              </a:rPr>
+              <a:t>Pick a project: an IoT plant-watering app.</a:t>
+            </a:r>
+          </a:p>
+        </p:txBody>
+      </p:sp>
+      <p:sp>
+        <p:nvSpPr>
+          <p:cNvPr id="11" name="Oval 10"/>
+          <p:cNvSpPr/>
+          <p:nvPr/>
+        </p:nvSpPr>
+        <p:spPr>
+          <a:xfrm>
+            <a:off x="548640" y="3461004"/>
+            <a:ext cx="384048" cy="384048"/>
+          </a:xfrm>
+          <a:prstGeom prst="ellipse">
+            <a:avLst/>
+          </a:prstGeom>
+          <a:solidFill>
+            <a:srgbClr val="0645AD"/>
+          </a:solidFill>
+          <a:ln>
+            <a:noFill/>
+          </a:ln>
+          <a:effectLst/>
+        </p:spPr>
+        <p:style>
+          <a:lnRef idx="1">
+            <a:schemeClr val="accent1"/>
+          </a:lnRef>
+          <a:fillRef idx="3">
+            <a:schemeClr val="accent1"/>
+          </a:fillRef>
+          <a:effectRef idx="2">
+            <a:schemeClr val="accent1"/>
+          </a:effectRef>
+          <a:fontRef idx="minor">
+            <a:schemeClr val="lt1"/>
+          </a:fontRef>
+        </p:style>
+        <p:txBody>
+          <a:bodyPr rtlCol="0" anchor="ctr" lIns="0" rIns="0" tIns="0" bIns="0"/>
+          <a:lstStyle/>
+          <a:p>
+            <a:pPr algn="ctr"/>
+            <a:r>
+              <a:rPr sz="1300" b="1">
+                <a:solidFill>
+                  <a:srgbClr val="FFFFFF"/>
+                </a:solidFill>
+                <a:latin typeface="Calibri"/>
+              </a:rPr>
+              <a:t>2</a:t>
+            </a:r>
+          </a:p>
+        </p:txBody>
+      </p:sp>
+      <p:sp>
+        <p:nvSpPr>
+          <p:cNvPr id="12" name="TextBox 11"/>
+          <p:cNvSpPr txBox="1"/>
+          <p:nvPr/>
+        </p:nvSpPr>
+        <p:spPr>
+          <a:xfrm>
+            <a:off x="1143000" y="3218688"/>
+            <a:ext cx="5943600" cy="868680"/>
+          </a:xfrm>
+          <a:prstGeom prst="rect">
+            <a:avLst/>
+          </a:prstGeom>
+          <a:noFill/>
+        </p:spPr>
+        <p:txBody>
+          <a:bodyPr wrap="square" anchor="ctr" lIns="0" rIns="0" tIns="0" bIns="0"/>
+          <a:lstStyle/>
+          <a:p>
+            <a:pPr algn="l"/>
+            <a:r>
+              <a:rPr sz="1700" b="0" i="0">
+                <a:solidFill>
+                  <a:srgbClr val="202122"/>
+                </a:solidFill>
+                <a:latin typeface="Calibri"/>
+              </a:rPr>
+              <a:t>List the skills it needs.</a:t>
+            </a:r>
+          </a:p>
+        </p:txBody>
+      </p:sp>
+      <p:sp>
+        <p:nvSpPr>
+          <p:cNvPr id="13" name="Oval 12"/>
+          <p:cNvSpPr/>
+          <p:nvPr/>
+        </p:nvSpPr>
+        <p:spPr>
+          <a:xfrm>
+            <a:off x="548640" y="4439412"/>
+            <a:ext cx="384048" cy="384048"/>
+          </a:xfrm>
+          <a:prstGeom prst="ellipse">
+            <a:avLst/>
+          </a:prstGeom>
+          <a:solidFill>
+            <a:srgbClr val="0645AD"/>
+          </a:solidFill>
+          <a:ln>
+            <a:noFill/>
+          </a:ln>
+          <a:effectLst/>
+        </p:spPr>
+        <p:style>
+          <a:lnRef idx="1">
+            <a:schemeClr val="accent1"/>
+          </a:lnRef>
+          <a:fillRef idx="3">
+            <a:schemeClr val="accent1"/>
+          </a:fillRef>
+          <a:effectRef idx="2">
+            <a:schemeClr val="accent1"/>
+          </a:effectRef>
+          <a:fontRef idx="minor">
+            <a:schemeClr val="lt1"/>
+          </a:fontRef>
+        </p:style>
+        <p:txBody>
+          <a:bodyPr rtlCol="0" anchor="ctr" lIns="0" rIns="0" tIns="0" bIns="0"/>
+          <a:lstStyle/>
+          <a:p>
+            <a:pPr algn="ctr"/>
+            <a:r>
+              <a:rPr sz="1300" b="1">
+                <a:solidFill>
+                  <a:srgbClr val="FFFFFF"/>
+                </a:solidFill>
+                <a:latin typeface="Calibri"/>
+              </a:rPr>
+              <a:t>3</a:t>
+            </a:r>
+          </a:p>
+        </p:txBody>
+      </p:sp>
+      <p:sp>
+        <p:nvSpPr>
+          <p:cNvPr id="14" name="TextBox 13"/>
+          <p:cNvSpPr txBox="1"/>
+          <p:nvPr/>
+        </p:nvSpPr>
+        <p:spPr>
+          <a:xfrm>
+            <a:off x="1143000" y="4197096"/>
+            <a:ext cx="5943600" cy="868680"/>
+          </a:xfrm>
+          <a:prstGeom prst="rect">
+            <a:avLst/>
+          </a:prstGeom>
+          <a:noFill/>
+        </p:spPr>
+        <p:txBody>
+          <a:bodyPr wrap="square" anchor="ctr" lIns="0" rIns="0" tIns="0" bIns="0"/>
+          <a:lstStyle/>
+          <a:p>
+            <a:pPr algn="l"/>
+            <a:r>
+              <a:rPr sz="1700" b="0" i="0">
+                <a:solidFill>
+                  <a:srgbClr val="202122"/>
+                </a:solidFill>
+                <a:latin typeface="Calibri"/>
+              </a:rPr>
+              <a:t>Rate yourself on each from 1 to 5.</a:t>
+            </a:r>
+          </a:p>
+        </p:txBody>
+      </p:sp>
+      <p:sp>
+        <p:nvSpPr>
+          <p:cNvPr id="15" name="Oval 14"/>
+          <p:cNvSpPr/>
+          <p:nvPr/>
+        </p:nvSpPr>
+        <p:spPr>
+          <a:xfrm>
+            <a:off x="548640" y="5417820"/>
+            <a:ext cx="384048" cy="384048"/>
+          </a:xfrm>
+          <a:prstGeom prst="ellipse">
+            <a:avLst/>
+          </a:prstGeom>
+          <a:solidFill>
+            <a:srgbClr val="0645AD"/>
+          </a:solidFill>
+          <a:ln>
+            <a:noFill/>
+          </a:ln>
+          <a:effectLst/>
+        </p:spPr>
+        <p:style>
+          <a:lnRef idx="1">
+            <a:schemeClr val="accent1"/>
+          </a:lnRef>
+          <a:fillRef idx="3">
+            <a:schemeClr val="accent1"/>
+          </a:fillRef>
+          <a:effectRef idx="2">
+            <a:schemeClr val="accent1"/>
+          </a:effectRef>
+          <a:fontRef idx="minor">
+            <a:schemeClr val="lt1"/>
+          </a:fontRef>
+        </p:style>
+        <p:txBody>
+          <a:bodyPr rtlCol="0" anchor="ctr" lIns="0" rIns="0" tIns="0" bIns="0"/>
+          <a:lstStyle/>
+          <a:p>
+            <a:pPr algn="ctr"/>
+            <a:r>
+              <a:rPr sz="1300" b="1">
+                <a:solidFill>
+                  <a:srgbClr val="FFFFFF"/>
+                </a:solidFill>
+                <a:latin typeface="Calibri"/>
+              </a:rPr>
+              <a:t>4</a:t>
+            </a:r>
+          </a:p>
+        </p:txBody>
+      </p:sp>
+      <p:sp>
+        <p:nvSpPr>
+          <p:cNvPr id="16" name="TextBox 15"/>
+          <p:cNvSpPr txBox="1"/>
+          <p:nvPr/>
+        </p:nvSpPr>
+        <p:spPr>
+          <a:xfrm>
+            <a:off x="1143000" y="5175504"/>
+            <a:ext cx="5943600" cy="868680"/>
+          </a:xfrm>
+          <a:prstGeom prst="rect">
+            <a:avLst/>
+          </a:prstGeom>
+          <a:noFill/>
+        </p:spPr>
+        <p:txBody>
+          <a:bodyPr wrap="square" anchor="ctr" lIns="0" rIns="0" tIns="0" bIns="0"/>
+          <a:lstStyle/>
+          <a:p>
+            <a:pPr algn="l"/>
+            <a:r>
+              <a:rPr sz="1700" b="0" i="0">
+                <a:solidFill>
+                  <a:srgbClr val="202122"/>
+                </a:solidFill>
+                <a:latin typeface="Calibri"/>
+              </a:rPr>
+              <a:t>Write a learning plan for your two weakest skills.</a:t>
+            </a:r>
+          </a:p>
+        </p:txBody>
+      </p:sp>
+      <p:sp>
+        <p:nvSpPr>
+          <p:cNvPr id="17" name="Rounded Rectangle 16"/>
+          <p:cNvSpPr/>
+          <p:nvPr/>
+        </p:nvSpPr>
+        <p:spPr>
+          <a:xfrm>
+            <a:off x="7772400" y="1508760"/>
+            <a:ext cx="3867912" cy="4572000"/>
+          </a:xfrm>
+          <a:prstGeom prst="roundRect">
+            <a:avLst>
+              <a:gd name="adj" fmla="val 8000"/>
+            </a:avLst>
+          </a:prstGeom>
+          <a:solidFill>
+            <a:srgbClr val="EAF3FF"/>
+          </a:solidFill>
+          <a:ln>
+            <a:noFill/>
+          </a:ln>
+          <a:effectLst/>
+        </p:spPr>
+        <p:style>
+          <a:lnRef idx="1">
+            <a:schemeClr val="accent1"/>
+          </a:lnRef>
+          <a:fillRef idx="3">
+            <a:schemeClr val="accent1"/>
+          </a:fillRef>
+          <a:effectRef idx="2">
+            <a:schemeClr val="accent1"/>
+          </a:effectRef>
+          <a:fontRef idx="minor">
+            <a:schemeClr val="lt1"/>
+          </a:fontRef>
+        </p:style>
+        <p:txBody>
+          <a:bodyPr rtlCol="0" anchor="ctr"/>
+          <a:lstStyle/>
+          <a:p/>
+        </p:txBody>
+      </p:sp>
+      <p:sp>
+        <p:nvSpPr>
+          <p:cNvPr id="18" name="TextBox 17"/>
+          <p:cNvSpPr txBox="1"/>
+          <p:nvPr/>
+        </p:nvSpPr>
+        <p:spPr>
+          <a:xfrm>
+            <a:off x="8046720" y="1737360"/>
+            <a:ext cx="3291840" cy="365760"/>
+          </a:xfrm>
+          <a:prstGeom prst="rect">
+            <a:avLst/>
+          </a:prstGeom>
+          <a:noFill/>
+        </p:spPr>
+        <p:txBody>
+          <a:bodyPr wrap="square" anchor="t" lIns="0" rIns="0" tIns="0" bIns="0"/>
+          <a:lstStyle/>
+          <a:p>
+            <a:pPr algn="l"/>
+            <a:r>
+              <a:rPr sz="1300" b="1" i="0">
+                <a:solidFill>
+                  <a:srgbClr val="0645AD"/>
+                </a:solidFill>
+                <a:latin typeface="Calibri"/>
+              </a:rPr>
+              <a:t>SUCCESS CRITERIA</a:t>
+            </a:r>
+          </a:p>
+        </p:txBody>
+      </p:sp>
+      <p:sp>
+        <p:nvSpPr>
+          <p:cNvPr id="19" name="TextBox 18"/>
+          <p:cNvSpPr txBox="1"/>
+          <p:nvPr/>
+        </p:nvSpPr>
+        <p:spPr>
+          <a:xfrm>
+            <a:off x="8046720" y="2240280"/>
+            <a:ext cx="3337560" cy="3657600"/>
+          </a:xfrm>
+          <a:prstGeom prst="rect">
+            <a:avLst/>
+          </a:prstGeom>
+          <a:noFill/>
+        </p:spPr>
+        <p:txBody>
+          <a:bodyPr wrap="square" lIns="0" rIns="0" tIns="0" bIns="0">
+            <a:spAutoFit/>
+          </a:bodyPr>
+          <a:lstStyle/>
+          <a:p>
+            <a:pPr marL="274320" indent="-274320">
+              <a:spcAft>
+                <a:spcPts val="810"/>
+              </a:spcAft>
+              <a:buClr>
+                <a:srgbClr val="0645AD"/>
+              </a:buClr>
+              <a:buFont typeface="Arial"/>
+              <a:buChar char="•"/>
+            </a:pPr>
+            <a:r>
+              <a:rPr sz="1800" b="0">
+                <a:solidFill>
+                  <a:srgbClr val="202122"/>
+                </a:solidFill>
+                <a:latin typeface="Calibri"/>
+              </a:rPr>
+              <a:t>Skills are specific</a:t>
+            </a:r>
+          </a:p>
+          <a:p>
+            <a:pPr marL="274320" indent="-274320">
+              <a:spcAft>
+                <a:spcPts val="810"/>
+              </a:spcAft>
+              <a:buClr>
+                <a:srgbClr val="0645AD"/>
+              </a:buClr>
+              <a:buFont typeface="Arial"/>
+              <a:buChar char="•"/>
+            </a:pPr>
+            <a:r>
+              <a:rPr sz="1800" b="0">
+                <a:solidFill>
+                  <a:srgbClr val="202122"/>
+                </a:solidFill>
+                <a:latin typeface="Calibri"/>
+              </a:rPr>
+              <a:t>Honest self-assessment</a:t>
+            </a:r>
+          </a:p>
+          <a:p>
+            <a:pPr marL="274320" indent="-274320">
+              <a:spcAft>
+                <a:spcPts val="810"/>
+              </a:spcAft>
+              <a:buClr>
+                <a:srgbClr val="0645AD"/>
+              </a:buClr>
+              <a:buFont typeface="Arial"/>
+              <a:buChar char="•"/>
+            </a:pPr>
+            <a:r>
+              <a:rPr sz="1800" b="0">
+                <a:solidFill>
+                  <a:srgbClr val="202122"/>
+                </a:solidFill>
+                <a:latin typeface="Calibri"/>
+              </a:rPr>
+              <a:t>Learning methods are realistic</a:t>
+            </a:r>
+          </a:p>
+        </p:txBody>
+      </p:sp>
+    </p:spTree>
+  </p:cSld>
+  <p:clrMapOvr>
+    <a:masterClrMapping/>
+  </p:clrMapOvr>
+</p:sld>
+</file>
+
+<file path=ppt/slides/slide12.xml><?xml version="1.0" encoding="utf-8"?>
+<p:sld xmlns:a="http://schemas.openxmlformats.org/drawingml/2006/main" xmlns:p="http://schemas.openxmlformats.org/presentationml/2006/main" xmlns:r="http://schemas.openxmlformats.org/officeDocument/2006/relationships">
+  <p:cSld>
+    <p:bg>
+      <p:bgPr>
+        <a:solidFill>
+          <a:srgbClr val="03306E"/>
+        </a:solidFill>
+        <a:effectLst/>
+      </p:bgPr>
+    </p:bg>
+    <p:spTree>
+      <p:nvGrpSpPr>
+        <p:cNvPr id="1" name=""/>
+        <p:cNvGrpSpPr/>
+        <p:nvPr/>
+      </p:nvGrpSpPr>
+      <p:grpSpPr/>
+      <p:sp>
+        <p:nvSpPr>
+          <p:cNvPr id="2" name="TextBox 1"/>
+          <p:cNvSpPr txBox="1"/>
+          <p:nvPr/>
+        </p:nvSpPr>
+        <p:spPr>
+          <a:xfrm>
+            <a:off x="548640" y="320040"/>
+            <a:ext cx="11094415" cy="274320"/>
+          </a:xfrm>
+          <a:prstGeom prst="rect">
+            <a:avLst/>
+          </a:prstGeom>
+          <a:noFill/>
+        </p:spPr>
+        <p:txBody>
+          <a:bodyPr wrap="square" anchor="t" lIns="0" rIns="0" tIns="0" bIns="0"/>
+          <a:lstStyle/>
+          <a:p>
+            <a:pPr algn="l"/>
+            <a:r>
+              <a:rPr sz="1100" b="1" i="0">
+                <a:solidFill>
+                  <a:srgbClr val="A9C8F0"/>
+                </a:solidFill>
+                <a:latin typeface="Calibri"/>
+              </a:rPr>
+              <a:t>OCCUPATIONAL SPECIALISM  ·  Specialism Content Area 1</a:t>
+            </a:r>
+          </a:p>
+        </p:txBody>
+      </p:sp>
+      <p:sp>
+        <p:nvSpPr>
+          <p:cNvPr id="3" name="TextBox 2"/>
+          <p:cNvSpPr txBox="1"/>
+          <p:nvPr/>
+        </p:nvSpPr>
+        <p:spPr>
+          <a:xfrm>
+            <a:off x="548640" y="566928"/>
+            <a:ext cx="11094415" cy="822960"/>
+          </a:xfrm>
+          <a:prstGeom prst="rect">
+            <a:avLst/>
+          </a:prstGeom>
+          <a:noFill/>
+        </p:spPr>
+        <p:txBody>
+          <a:bodyPr wrap="square" anchor="ctr" lIns="0" rIns="0" tIns="0" bIns="0"/>
+          <a:lstStyle/>
+          <a:p>
+            <a:pPr algn="l"/>
+            <a:r>
+              <a:rPr sz="3200" b="1" i="0">
+                <a:solidFill>
+                  <a:srgbClr val="FFFFFF"/>
+                </a:solidFill>
+                <a:latin typeface="Cambria"/>
+              </a:rPr>
+              <a:t>Exit ticket</a:t>
+            </a:r>
+          </a:p>
+        </p:txBody>
+      </p:sp>
+      <p:sp>
+        <p:nvSpPr>
+          <p:cNvPr id="4" name="Oval 3"/>
+          <p:cNvSpPr/>
+          <p:nvPr/>
+        </p:nvSpPr>
+        <p:spPr>
+          <a:xfrm>
+            <a:off x="548640" y="1737360"/>
+            <a:ext cx="502920" cy="502920"/>
+          </a:xfrm>
+          <a:prstGeom prst="ellipse">
+            <a:avLst/>
+          </a:prstGeom>
+          <a:solidFill>
+            <a:srgbClr val="33C17A"/>
+          </a:solidFill>
+          <a:ln>
+            <a:noFill/>
+          </a:ln>
+          <a:effectLst/>
+        </p:spPr>
+        <p:style>
+          <a:lnRef idx="1">
+            <a:schemeClr val="accent1"/>
+          </a:lnRef>
+          <a:fillRef idx="3">
+            <a:schemeClr val="accent1"/>
+          </a:fillRef>
+          <a:effectRef idx="2">
+            <a:schemeClr val="accent1"/>
+          </a:effectRef>
+          <a:fontRef idx="minor">
+            <a:schemeClr val="lt1"/>
+          </a:fontRef>
+        </p:style>
+        <p:txBody>
+          <a:bodyPr rtlCol="0" anchor="ctr" lIns="0" rIns="0" tIns="0" bIns="0"/>
+          <a:lstStyle/>
+          <a:p>
+            <a:pPr algn="ctr"/>
+            <a:r>
+              <a:rPr sz="1700" b="1">
+                <a:solidFill>
+                  <a:srgbClr val="202122"/>
+                </a:solidFill>
+                <a:latin typeface="Calibri"/>
+              </a:rPr>
+              <a:t>1</a:t>
+            </a:r>
+          </a:p>
+        </p:txBody>
+      </p:sp>
+      <p:sp>
+        <p:nvSpPr>
+          <p:cNvPr id="5" name="TextBox 4"/>
+          <p:cNvSpPr txBox="1"/>
+          <p:nvPr/>
+        </p:nvSpPr>
+        <p:spPr>
+          <a:xfrm>
+            <a:off x="1325880" y="1645920"/>
+            <a:ext cx="6583680" cy="822960"/>
+          </a:xfrm>
+          <a:prstGeom prst="rect">
+            <a:avLst/>
+          </a:prstGeom>
+          <a:noFill/>
+        </p:spPr>
+        <p:txBody>
+          <a:bodyPr wrap="square" anchor="ctr" lIns="0" rIns="0" tIns="0" bIns="0"/>
+          <a:lstStyle/>
+          <a:p>
+            <a:pPr algn="l"/>
+            <a:r>
+              <a:rPr sz="2000" b="0" i="0">
+                <a:solidFill>
+                  <a:srgbClr val="FFFFFF"/>
+                </a:solidFill>
+                <a:latin typeface="Calibri"/>
+              </a:rPr>
+              <a:t>Which emerging technology excites you most?</a:t>
+            </a:r>
+          </a:p>
+        </p:txBody>
+      </p:sp>
+      <p:sp>
+        <p:nvSpPr>
+          <p:cNvPr id="6" name="Oval 5"/>
+          <p:cNvSpPr/>
+          <p:nvPr/>
+        </p:nvSpPr>
+        <p:spPr>
+          <a:xfrm>
+            <a:off x="548640" y="2697480"/>
+            <a:ext cx="502920" cy="502920"/>
+          </a:xfrm>
+          <a:prstGeom prst="ellipse">
+            <a:avLst/>
+          </a:prstGeom>
+          <a:solidFill>
+            <a:srgbClr val="33C17A"/>
+          </a:solidFill>
+          <a:ln>
+            <a:noFill/>
+          </a:ln>
+          <a:effectLst/>
+        </p:spPr>
+        <p:style>
+          <a:lnRef idx="1">
+            <a:schemeClr val="accent1"/>
+          </a:lnRef>
+          <a:fillRef idx="3">
+            <a:schemeClr val="accent1"/>
+          </a:fillRef>
+          <a:effectRef idx="2">
+            <a:schemeClr val="accent1"/>
+          </a:effectRef>
+          <a:fontRef idx="minor">
+            <a:schemeClr val="lt1"/>
+          </a:fontRef>
+        </p:style>
+        <p:txBody>
+          <a:bodyPr rtlCol="0" anchor="ctr" lIns="0" rIns="0" tIns="0" bIns="0"/>
+          <a:lstStyle/>
+          <a:p>
+            <a:pPr algn="ctr"/>
+            <a:r>
+              <a:rPr sz="1700" b="1">
+                <a:solidFill>
+                  <a:srgbClr val="202122"/>
+                </a:solidFill>
+                <a:latin typeface="Calibri"/>
+              </a:rPr>
+              <a:t>2</a:t>
+            </a:r>
+          </a:p>
+        </p:txBody>
+      </p:sp>
+      <p:sp>
+        <p:nvSpPr>
+          <p:cNvPr id="7" name="TextBox 6"/>
+          <p:cNvSpPr txBox="1"/>
+          <p:nvPr/>
+        </p:nvSpPr>
+        <p:spPr>
+          <a:xfrm>
+            <a:off x="1325880" y="2606040"/>
+            <a:ext cx="6583680" cy="822960"/>
+          </a:xfrm>
+          <a:prstGeom prst="rect">
+            <a:avLst/>
+          </a:prstGeom>
+          <a:noFill/>
+        </p:spPr>
+        <p:txBody>
+          <a:bodyPr wrap="square" anchor="ctr" lIns="0" rIns="0" tIns="0" bIns="0"/>
+          <a:lstStyle/>
+          <a:p>
+            <a:pPr algn="l"/>
+            <a:r>
+              <a:rPr sz="2000" b="0" i="0">
+                <a:solidFill>
+                  <a:srgbClr val="FFFFFF"/>
+                </a:solidFill>
+                <a:latin typeface="Calibri"/>
+              </a:rPr>
+              <a:t>What is one skill gap you have right now?</a:t>
+            </a:r>
+          </a:p>
+        </p:txBody>
+      </p:sp>
+      <p:sp>
+        <p:nvSpPr>
+          <p:cNvPr id="8" name="Oval 7"/>
+          <p:cNvSpPr/>
+          <p:nvPr/>
+        </p:nvSpPr>
+        <p:spPr>
+          <a:xfrm>
+            <a:off x="548640" y="3657600"/>
+            <a:ext cx="502920" cy="502920"/>
+          </a:xfrm>
+          <a:prstGeom prst="ellipse">
+            <a:avLst/>
+          </a:prstGeom>
+          <a:solidFill>
+            <a:srgbClr val="33C17A"/>
+          </a:solidFill>
+          <a:ln>
+            <a:noFill/>
+          </a:ln>
+          <a:effectLst/>
+        </p:spPr>
+        <p:style>
+          <a:lnRef idx="1">
+            <a:schemeClr val="accent1"/>
+          </a:lnRef>
+          <a:fillRef idx="3">
+            <a:schemeClr val="accent1"/>
+          </a:fillRef>
+          <a:effectRef idx="2">
+            <a:schemeClr val="accent1"/>
+          </a:effectRef>
+          <a:fontRef idx="minor">
+            <a:schemeClr val="lt1"/>
+          </a:fontRef>
+        </p:style>
+        <p:txBody>
+          <a:bodyPr rtlCol="0" anchor="ctr" lIns="0" rIns="0" tIns="0" bIns="0"/>
+          <a:lstStyle/>
+          <a:p>
+            <a:pPr algn="ctr"/>
+            <a:r>
+              <a:rPr sz="1700" b="1">
+                <a:solidFill>
+                  <a:srgbClr val="202122"/>
+                </a:solidFill>
+                <a:latin typeface="Calibri"/>
+              </a:rPr>
+              <a:t>3</a:t>
+            </a:r>
+          </a:p>
+        </p:txBody>
+      </p:sp>
+      <p:sp>
+        <p:nvSpPr>
+          <p:cNvPr id="9" name="TextBox 8"/>
+          <p:cNvSpPr txBox="1"/>
+          <p:nvPr/>
+        </p:nvSpPr>
+        <p:spPr>
+          <a:xfrm>
+            <a:off x="1325880" y="3566160"/>
+            <a:ext cx="6583680" cy="822960"/>
+          </a:xfrm>
+          <a:prstGeom prst="rect">
+            <a:avLst/>
+          </a:prstGeom>
+          <a:noFill/>
+        </p:spPr>
+        <p:txBody>
+          <a:bodyPr wrap="square" anchor="ctr" lIns="0" rIns="0" tIns="0" bIns="0"/>
+          <a:lstStyle/>
+          <a:p>
+            <a:pPr algn="l"/>
+            <a:r>
+              <a:rPr sz="2000" b="0" i="0">
+                <a:solidFill>
+                  <a:srgbClr val="FFFFFF"/>
+                </a:solidFill>
+                <a:latin typeface="Calibri"/>
+              </a:rPr>
+              <a:t>How would you find out if you are ready for a task?</a:t>
+            </a:r>
+          </a:p>
+        </p:txBody>
+      </p:sp>
+      <p:sp>
+        <p:nvSpPr>
+          <p:cNvPr id="10" name="Rounded Rectangle 9"/>
+          <p:cNvSpPr/>
+          <p:nvPr/>
+        </p:nvSpPr>
+        <p:spPr>
+          <a:xfrm>
+            <a:off x="8229600" y="1645920"/>
+            <a:ext cx="3410712" cy="2926080"/>
+          </a:xfrm>
+          <a:prstGeom prst="roundRect">
+            <a:avLst>
+              <a:gd name="adj" fmla="val 8000"/>
+            </a:avLst>
+          </a:prstGeom>
+          <a:solidFill>
+            <a:srgbClr val="0645AD"/>
+          </a:solidFill>
+          <a:ln>
+            <a:noFill/>
+          </a:ln>
+          <a:effectLst/>
+        </p:spPr>
+        <p:style>
+          <a:lnRef idx="1">
+            <a:schemeClr val="accent1"/>
+          </a:lnRef>
+          <a:fillRef idx="3">
+            <a:schemeClr val="accent1"/>
+          </a:fillRef>
+          <a:effectRef idx="2">
+            <a:schemeClr val="accent1"/>
+          </a:effectRef>
+          <a:fontRef idx="minor">
+            <a:schemeClr val="lt1"/>
+          </a:fontRef>
+        </p:style>
+        <p:txBody>
+          <a:bodyPr rtlCol="0" anchor="ctr"/>
+          <a:lstStyle/>
+          <a:p/>
+        </p:txBody>
+      </p:sp>
+      <p:sp>
+        <p:nvSpPr>
+          <p:cNvPr id="11" name="TextBox 10"/>
+          <p:cNvSpPr txBox="1"/>
+          <p:nvPr/>
+        </p:nvSpPr>
+        <p:spPr>
+          <a:xfrm>
+            <a:off x="8503920" y="1874519"/>
+            <a:ext cx="2926080" cy="365760"/>
+          </a:xfrm>
+          <a:prstGeom prst="rect">
+            <a:avLst/>
+          </a:prstGeom>
+          <a:noFill/>
+        </p:spPr>
+        <p:txBody>
+          <a:bodyPr wrap="square" anchor="t" lIns="0" rIns="0" tIns="0" bIns="0"/>
+          <a:lstStyle/>
+          <a:p>
+            <a:pPr algn="l"/>
+            <a:r>
+              <a:rPr sz="1300" b="1" i="0">
+                <a:solidFill>
+                  <a:srgbClr val="A9C8F0"/>
+                </a:solidFill>
+                <a:latin typeface="Calibri"/>
+              </a:rPr>
+              <a:t>REVISE THIS TOPIC</a:t>
+            </a:r>
+          </a:p>
+        </p:txBody>
+      </p:sp>
+      <p:sp>
+        <p:nvSpPr>
+          <p:cNvPr id="12" name="TextBox 11"/>
+          <p:cNvSpPr txBox="1"/>
+          <p:nvPr/>
+        </p:nvSpPr>
+        <p:spPr>
+          <a:xfrm>
+            <a:off x="8503920" y="2286000"/>
+            <a:ext cx="2926080" cy="548640"/>
+          </a:xfrm>
+          <a:prstGeom prst="rect">
+            <a:avLst/>
+          </a:prstGeom>
+          <a:noFill/>
+        </p:spPr>
+        <p:txBody>
+          <a:bodyPr wrap="square" anchor="t" lIns="0" rIns="0" tIns="0" bIns="0"/>
+          <a:lstStyle/>
+          <a:p>
+            <a:pPr algn="l"/>
+            <a:r>
+              <a:rPr sz="1400" b="0" i="0">
+                <a:solidFill>
+                  <a:srgbClr val="FFFFFF"/>
+                </a:solidFill>
+                <a:latin typeface="Calibri"/>
+              </a:rPr>
+              <a:t>Revision notes for this lesson are on the study wiki:</a:t>
+            </a:r>
+          </a:p>
+        </p:txBody>
+      </p:sp>
+      <p:sp>
+        <p:nvSpPr>
+          <p:cNvPr id="13" name="TextBox 12"/>
+          <p:cNvSpPr txBox="1"/>
+          <p:nvPr/>
+        </p:nvSpPr>
+        <p:spPr>
+          <a:xfrm>
+            <a:off x="8503920" y="2926080"/>
+            <a:ext cx="2926080" cy="1463040"/>
+          </a:xfrm>
+          <a:prstGeom prst="rect">
+            <a:avLst/>
+          </a:prstGeom>
+          <a:noFill/>
+        </p:spPr>
+        <p:txBody>
+          <a:bodyPr wrap="square" anchor="t" lIns="0" rIns="0" tIns="0" bIns="0"/>
+          <a:lstStyle/>
+          <a:p>
+            <a:pPr algn="l"/>
+            <a:r>
+              <a:rPr sz="2000" b="1" i="0">
+                <a:solidFill>
+                  <a:srgbClr val="FFFFFF"/>
+                </a:solidFill>
+                <a:latin typeface="Cambria"/>
+              </a:rPr>
+              <a:t>Analyse a Problem</a:t>
+            </a:r>
+          </a:p>
+        </p:txBody>
+      </p:sp>
+      <p:sp>
+        <p:nvSpPr>
+          <p:cNvPr id="14" name="TextBox 13"/>
+          <p:cNvSpPr txBox="1"/>
+          <p:nvPr/>
+        </p:nvSpPr>
+        <p:spPr>
+          <a:xfrm>
+            <a:off x="548640" y="5669280"/>
+            <a:ext cx="11094415" cy="548640"/>
+          </a:xfrm>
+          <a:prstGeom prst="rect">
+            <a:avLst/>
+          </a:prstGeom>
+          <a:noFill/>
+        </p:spPr>
+        <p:txBody>
+          <a:bodyPr wrap="square" anchor="t" lIns="0" rIns="0" tIns="0" bIns="0"/>
+          <a:lstStyle/>
+          <a:p>
+            <a:pPr algn="l"/>
+            <a:r>
+              <a:rPr sz="1200" b="0" i="0">
+                <a:solidFill>
+                  <a:srgbClr val="A9C8F0"/>
+                </a:solidFill>
+                <a:latin typeface="Calibri"/>
+              </a:rPr>
+              <a:t>https://lana6478.github.io/T-level-Digital-Software-Development/#/02-occupational-specialism/01-analyse-a-problem.md</a:t>
+            </a:r>
+          </a:p>
+        </p:txBody>
+      </p:sp>
+    </p:spTree>
+  </p:cSld>
+  <p:clrMapOvr>
+    <a:masterClrMapping/>
+  </p:clrMapOvr>
+</p:sld>
+</file>
+
 <file path=ppt/slides/slide2.xml><?xml version="1.0" encoding="utf-8"?>
 <p:sld xmlns:a="http://schemas.openxmlformats.org/drawingml/2006/main" xmlns:p="http://schemas.openxmlformats.org/presentationml/2006/main" xmlns:r="http://schemas.openxmlformats.org/officeDocument/2006/relationships">
   <p:cSld>
@@ -4685,22 +6609,77 @@
       </p:sp>
       <p:sp>
         <p:nvSpPr>
-          <p:cNvPr id="6" name="Rounded Rectangle 5"/>
+          <p:cNvPr id="6" name="TextBox 5"/>
+          <p:cNvSpPr txBox="1"/>
+          <p:nvPr/>
+        </p:nvSpPr>
+        <p:spPr>
+          <a:xfrm>
+            <a:off x="548640" y="1554480"/>
+            <a:ext cx="6720840" cy="4617720"/>
+          </a:xfrm>
+          <a:prstGeom prst="rect">
+            <a:avLst/>
+          </a:prstGeom>
+          <a:noFill/>
+        </p:spPr>
+        <p:txBody>
+          <a:bodyPr wrap="square" lIns="0" rIns="0" tIns="0" bIns="0">
+            <a:spAutoFit/>
+          </a:bodyPr>
+          <a:lstStyle/>
+          <a:p>
+            <a:pPr>
+              <a:spcAft>
+                <a:spcPts val="1320"/>
+              </a:spcAft>
+            </a:pPr>
+            <a:r>
+              <a:rPr sz="2200" b="0">
+                <a:solidFill>
+                  <a:srgbClr val="202122"/>
+                </a:solidFill>
+                <a:latin typeface="Calibri"/>
+              </a:rPr>
+              <a:t>Developers increasingly build for new technologies.</a:t>
+            </a:r>
+          </a:p>
+          <a:p>
+            <a:pPr>
+              <a:spcAft>
+                <a:spcPts val="1320"/>
+              </a:spcAft>
+            </a:pPr>
+            <a:r>
+              <a:rPr sz="2200" b="0">
+                <a:solidFill>
+                  <a:srgbClr val="202122"/>
+                </a:solidFill>
+                <a:latin typeface="Calibri"/>
+              </a:rPr>
+              <a:t>AI and virtual intelligence include conversational and generative AI, machine learning, object recognition and computer vision. Operational technology (OT) and the Internet of Things (IoT) connect physical equipment to software. Biometrics identify people by fingerprints or faces. Robotics and automation replace manual tasks. Cloud platforms, data lakes and data warehouses store and process data at scale. Drones and 3D printing are controlled by software, and 5G networks make fast mobile connections widespread.</a:t>
+            </a:r>
+          </a:p>
+        </p:txBody>
+      </p:sp>
+      <p:sp>
+        <p:nvSpPr>
+          <p:cNvPr id="7" name="Rounded Rectangle 6"/>
           <p:cNvSpPr/>
           <p:nvPr/>
         </p:nvSpPr>
         <p:spPr>
           <a:xfrm>
-            <a:off x="548640" y="1600200"/>
-            <a:ext cx="3515258" cy="2148840"/>
+            <a:off x="7772400" y="1554480"/>
+            <a:ext cx="3867912" cy="4526280"/>
           </a:xfrm>
           <a:prstGeom prst="roundRect">
             <a:avLst>
-              <a:gd name="adj" fmla="val 6000"/>
+              <a:gd name="adj" fmla="val 8000"/>
             </a:avLst>
           </a:prstGeom>
           <a:solidFill>
-            <a:srgbClr val="EAF3FF"/>
+            <a:srgbClr val="03306E"/>
           </a:solidFill>
           <a:ln>
             <a:noFill/>
@@ -4729,14 +6708,14 @@
       </p:sp>
       <p:sp>
         <p:nvSpPr>
-          <p:cNvPr id="7" name="Oval 6"/>
+          <p:cNvPr id="8" name="Oval 7"/>
           <p:cNvSpPr/>
           <p:nvPr/>
         </p:nvSpPr>
         <p:spPr>
           <a:xfrm>
-            <a:off x="777240" y="1828800"/>
-            <a:ext cx="457200" cy="457200"/>
+            <a:off x="8046720" y="1828800"/>
+            <a:ext cx="548640" cy="548640"/>
           </a:xfrm>
           <a:prstGeom prst="ellipse">
             <a:avLst/>
@@ -4769,46 +6748,13 @@
           <a:p>
             <a:pPr algn="ctr"/>
             <a:r>
-              <a:rPr sz="1500" b="1">
+              <a:rPr sz="1300" b="1">
                 <a:solidFill>
                   <a:srgbClr val="202122"/>
                 </a:solidFill>
                 <a:latin typeface="Calibri"/>
               </a:rPr>
-              <a:t>1</a:t>
-            </a:r>
-          </a:p>
-        </p:txBody>
-      </p:sp>
-      <p:sp>
-        <p:nvSpPr>
-          <p:cNvPr id="8" name="TextBox 7"/>
-          <p:cNvSpPr txBox="1"/>
-          <p:nvPr/>
-        </p:nvSpPr>
-        <p:spPr>
-          <a:xfrm>
-            <a:off x="1371600" y="1801368"/>
-            <a:ext cx="2509418" cy="512064"/>
-          </a:xfrm>
-          <a:prstGeom prst="rect">
-            <a:avLst/>
-          </a:prstGeom>
-          <a:noFill/>
-        </p:spPr>
-        <p:txBody>
-          <a:bodyPr wrap="square" anchor="ctr" lIns="0" rIns="0" tIns="0" bIns="0"/>
-          <a:lstStyle/>
-          <a:p>
-            <a:pPr algn="l"/>
-            <a:r>
-              <a:rPr sz="1900" b="1" i="0">
-                <a:solidFill>
-                  <a:srgbClr val="03306E"/>
-                </a:solidFill>
-                <a:latin typeface="Calibri"/>
-              </a:rPr>
-              <a:t>AI and VI</a:t>
+              <a:t>e.g.</a:t>
             </a:r>
           </a:p>
         </p:txBody>
@@ -4821,8 +6767,8 @@
         </p:nvSpPr>
         <p:spPr>
           <a:xfrm>
-            <a:off x="777240" y="2468880"/>
-            <a:ext cx="3058058" cy="1143000"/>
+            <a:off x="8046720" y="2560320"/>
+            <a:ext cx="3291840" cy="365760"/>
           </a:xfrm>
           <a:prstGeom prst="rect">
             <a:avLst/>
@@ -4835,124 +6781,27 @@
           <a:p>
             <a:pPr algn="l"/>
             <a:r>
-              <a:rPr sz="1800" b="0" i="0">
-                <a:solidFill>
-                  <a:srgbClr val="202122"/>
-                </a:solidFill>
-                <a:latin typeface="Calibri"/>
-              </a:rPr>
-              <a:t>Generative and conversational AI, machine learning, object recognition, computer vision.</a:t>
-            </a:r>
-          </a:p>
-        </p:txBody>
-      </p:sp>
-      <p:sp>
-        <p:nvSpPr>
-          <p:cNvPr id="10" name="Rounded Rectangle 9"/>
-          <p:cNvSpPr/>
-          <p:nvPr/>
-        </p:nvSpPr>
-        <p:spPr>
-          <a:xfrm>
-            <a:off x="4338218" y="1600200"/>
-            <a:ext cx="3515258" cy="2148840"/>
-          </a:xfrm>
-          <a:prstGeom prst="roundRect">
-            <a:avLst>
-              <a:gd name="adj" fmla="val 6000"/>
-            </a:avLst>
-          </a:prstGeom>
-          <a:solidFill>
-            <a:srgbClr val="EAF3FF"/>
-          </a:solidFill>
-          <a:ln>
-            <a:noFill/>
-          </a:ln>
-          <a:effectLst/>
-        </p:spPr>
-        <p:style>
-          <a:lnRef idx="1">
-            <a:schemeClr val="accent1"/>
-          </a:lnRef>
-          <a:fillRef idx="3">
-            <a:schemeClr val="accent1"/>
-          </a:fillRef>
-          <a:effectRef idx="2">
-            <a:schemeClr val="accent1"/>
-          </a:effectRef>
-          <a:fontRef idx="minor">
-            <a:schemeClr val="lt1"/>
-          </a:fontRef>
-        </p:style>
-        <p:txBody>
-          <a:bodyPr rtlCol="0" anchor="ctr"/>
-          <a:lstStyle/>
-          <a:p/>
-        </p:txBody>
-      </p:sp>
-      <p:sp>
-        <p:nvSpPr>
-          <p:cNvPr id="11" name="Oval 10"/>
-          <p:cNvSpPr/>
-          <p:nvPr/>
-        </p:nvSpPr>
-        <p:spPr>
-          <a:xfrm>
-            <a:off x="4566818" y="1828800"/>
-            <a:ext cx="457200" cy="457200"/>
-          </a:xfrm>
-          <a:prstGeom prst="ellipse">
-            <a:avLst/>
-          </a:prstGeom>
-          <a:solidFill>
-            <a:srgbClr val="33C17A"/>
-          </a:solidFill>
-          <a:ln>
-            <a:noFill/>
-          </a:ln>
-          <a:effectLst/>
-        </p:spPr>
-        <p:style>
-          <a:lnRef idx="1">
-            <a:schemeClr val="accent1"/>
-          </a:lnRef>
-          <a:fillRef idx="3">
-            <a:schemeClr val="accent1"/>
-          </a:fillRef>
-          <a:effectRef idx="2">
-            <a:schemeClr val="accent1"/>
-          </a:effectRef>
-          <a:fontRef idx="minor">
-            <a:schemeClr val="lt1"/>
-          </a:fontRef>
-        </p:style>
-        <p:txBody>
-          <a:bodyPr rtlCol="0" anchor="ctr" lIns="0" rIns="0" tIns="0" bIns="0"/>
-          <a:lstStyle/>
-          <a:p>
-            <a:pPr algn="ctr"/>
-            <a:r>
-              <a:rPr sz="1500" b="1">
-                <a:solidFill>
-                  <a:srgbClr val="202122"/>
-                </a:solidFill>
-                <a:latin typeface="Calibri"/>
-              </a:rPr>
-              <a:t>2</a:t>
-            </a:r>
-          </a:p>
-        </p:txBody>
-      </p:sp>
-      <p:sp>
-        <p:nvSpPr>
-          <p:cNvPr id="12" name="TextBox 11"/>
+              <a:rPr sz="1300" b="1" i="0">
+                <a:solidFill>
+                  <a:srgbClr val="A9C8F0"/>
+                </a:solidFill>
+                <a:latin typeface="Calibri"/>
+              </a:rPr>
+              <a:t>EXAMPLE</a:t>
+            </a:r>
+          </a:p>
+        </p:txBody>
+      </p:sp>
+      <p:sp>
+        <p:nvSpPr>
+          <p:cNvPr id="10" name="TextBox 9"/>
           <p:cNvSpPr txBox="1"/>
           <p:nvPr/>
         </p:nvSpPr>
         <p:spPr>
           <a:xfrm>
-            <a:off x="5161178" y="1801368"/>
-            <a:ext cx="2509418" cy="512064"/>
+            <a:off x="8046720" y="2971800"/>
+            <a:ext cx="3291840" cy="2971800"/>
           </a:xfrm>
           <a:prstGeom prst="rect">
             <a:avLst/>
@@ -4960,703 +6809,18 @@
           <a:noFill/>
         </p:spPr>
         <p:txBody>
-          <a:bodyPr wrap="square" anchor="ctr" lIns="0" rIns="0" tIns="0" bIns="0"/>
+          <a:bodyPr wrap="square" anchor="t" lIns="0" rIns="0" tIns="0" bIns="0"/>
           <a:lstStyle/>
           <a:p>
             <a:pPr algn="l"/>
             <a:r>
-              <a:rPr sz="1900" b="1" i="0">
-                <a:solidFill>
-                  <a:srgbClr val="03306E"/>
-                </a:solidFill>
-                <a:latin typeface="Calibri"/>
-              </a:rPr>
-              <a:t>OT and IoT</a:t>
-            </a:r>
-          </a:p>
-        </p:txBody>
-      </p:sp>
-      <p:sp>
-        <p:nvSpPr>
-          <p:cNvPr id="13" name="TextBox 12"/>
-          <p:cNvSpPr txBox="1"/>
-          <p:nvPr/>
-        </p:nvSpPr>
-        <p:spPr>
-          <a:xfrm>
-            <a:off x="4566818" y="2468880"/>
-            <a:ext cx="3058058" cy="1143000"/>
-          </a:xfrm>
-          <a:prstGeom prst="rect">
-            <a:avLst/>
-          </a:prstGeom>
-          <a:noFill/>
-        </p:spPr>
-        <p:txBody>
-          <a:bodyPr wrap="square" anchor="t" lIns="0" rIns="0" tIns="0" bIns="0"/>
-          <a:lstStyle/>
-          <a:p>
-            <a:pPr algn="l"/>
-            <a:r>
-              <a:rPr sz="2000" b="0" i="0">
-                <a:solidFill>
-                  <a:srgbClr val="202122"/>
-                </a:solidFill>
-                <a:latin typeface="Calibri"/>
-              </a:rPr>
-              <a:t>Operational technology and connected devices.</a:t>
-            </a:r>
-          </a:p>
-        </p:txBody>
-      </p:sp>
-      <p:sp>
-        <p:nvSpPr>
-          <p:cNvPr id="14" name="Rounded Rectangle 13"/>
-          <p:cNvSpPr/>
-          <p:nvPr/>
-        </p:nvSpPr>
-        <p:spPr>
-          <a:xfrm>
-            <a:off x="8127796" y="1600200"/>
-            <a:ext cx="3515258" cy="2148840"/>
-          </a:xfrm>
-          <a:prstGeom prst="roundRect">
-            <a:avLst>
-              <a:gd name="adj" fmla="val 6000"/>
-            </a:avLst>
-          </a:prstGeom>
-          <a:solidFill>
-            <a:srgbClr val="EAF3FF"/>
-          </a:solidFill>
-          <a:ln>
-            <a:noFill/>
-          </a:ln>
-          <a:effectLst/>
-        </p:spPr>
-        <p:style>
-          <a:lnRef idx="1">
-            <a:schemeClr val="accent1"/>
-          </a:lnRef>
-          <a:fillRef idx="3">
-            <a:schemeClr val="accent1"/>
-          </a:fillRef>
-          <a:effectRef idx="2">
-            <a:schemeClr val="accent1"/>
-          </a:effectRef>
-          <a:fontRef idx="minor">
-            <a:schemeClr val="lt1"/>
-          </a:fontRef>
-        </p:style>
-        <p:txBody>
-          <a:bodyPr rtlCol="0" anchor="ctr"/>
-          <a:lstStyle/>
-          <a:p/>
-        </p:txBody>
-      </p:sp>
-      <p:sp>
-        <p:nvSpPr>
-          <p:cNvPr id="15" name="Oval 14"/>
-          <p:cNvSpPr/>
-          <p:nvPr/>
-        </p:nvSpPr>
-        <p:spPr>
-          <a:xfrm>
-            <a:off x="8356396" y="1828800"/>
-            <a:ext cx="457200" cy="457200"/>
-          </a:xfrm>
-          <a:prstGeom prst="ellipse">
-            <a:avLst/>
-          </a:prstGeom>
-          <a:solidFill>
-            <a:srgbClr val="33C17A"/>
-          </a:solidFill>
-          <a:ln>
-            <a:noFill/>
-          </a:ln>
-          <a:effectLst/>
-        </p:spPr>
-        <p:style>
-          <a:lnRef idx="1">
-            <a:schemeClr val="accent1"/>
-          </a:lnRef>
-          <a:fillRef idx="3">
-            <a:schemeClr val="accent1"/>
-          </a:fillRef>
-          <a:effectRef idx="2">
-            <a:schemeClr val="accent1"/>
-          </a:effectRef>
-          <a:fontRef idx="minor">
-            <a:schemeClr val="lt1"/>
-          </a:fontRef>
-        </p:style>
-        <p:txBody>
-          <a:bodyPr rtlCol="0" anchor="ctr" lIns="0" rIns="0" tIns="0" bIns="0"/>
-          <a:lstStyle/>
-          <a:p>
-            <a:pPr algn="ctr"/>
-            <a:r>
-              <a:rPr sz="1500" b="1">
-                <a:solidFill>
-                  <a:srgbClr val="202122"/>
-                </a:solidFill>
-                <a:latin typeface="Calibri"/>
-              </a:rPr>
-              <a:t>3</a:t>
-            </a:r>
-          </a:p>
-        </p:txBody>
-      </p:sp>
-      <p:sp>
-        <p:nvSpPr>
-          <p:cNvPr id="16" name="TextBox 15"/>
-          <p:cNvSpPr txBox="1"/>
-          <p:nvPr/>
-        </p:nvSpPr>
-        <p:spPr>
-          <a:xfrm>
-            <a:off x="8950756" y="1801368"/>
-            <a:ext cx="2509418" cy="512064"/>
-          </a:xfrm>
-          <a:prstGeom prst="rect">
-            <a:avLst/>
-          </a:prstGeom>
-          <a:noFill/>
-        </p:spPr>
-        <p:txBody>
-          <a:bodyPr wrap="square" anchor="ctr" lIns="0" rIns="0" tIns="0" bIns="0"/>
-          <a:lstStyle/>
-          <a:p>
-            <a:pPr algn="l"/>
-            <a:r>
-              <a:rPr sz="1600" b="1" i="0">
-                <a:solidFill>
-                  <a:srgbClr val="03306E"/>
-                </a:solidFill>
-                <a:latin typeface="Calibri"/>
-              </a:rPr>
-              <a:t>Biometrics and robotics</a:t>
-            </a:r>
-          </a:p>
-        </p:txBody>
-      </p:sp>
-      <p:sp>
-        <p:nvSpPr>
-          <p:cNvPr id="17" name="TextBox 16"/>
-          <p:cNvSpPr txBox="1"/>
-          <p:nvPr/>
-        </p:nvSpPr>
-        <p:spPr>
-          <a:xfrm>
-            <a:off x="8356396" y="2468880"/>
-            <a:ext cx="3058058" cy="1143000"/>
-          </a:xfrm>
-          <a:prstGeom prst="rect">
-            <a:avLst/>
-          </a:prstGeom>
-          <a:noFill/>
-        </p:spPr>
-        <p:txBody>
-          <a:bodyPr wrap="square" anchor="t" lIns="0" rIns="0" tIns="0" bIns="0"/>
-          <a:lstStyle/>
-          <a:p>
-            <a:pPr algn="l"/>
-            <a:r>
-              <a:rPr sz="2000" b="0" i="0">
-                <a:solidFill>
-                  <a:srgbClr val="202122"/>
-                </a:solidFill>
-                <a:latin typeface="Calibri"/>
-              </a:rPr>
-              <a:t>Identity by body features; automation.</a:t>
-            </a:r>
-          </a:p>
-        </p:txBody>
-      </p:sp>
-      <p:sp>
-        <p:nvSpPr>
-          <p:cNvPr id="18" name="Rounded Rectangle 17"/>
-          <p:cNvSpPr/>
-          <p:nvPr/>
-        </p:nvSpPr>
-        <p:spPr>
-          <a:xfrm>
-            <a:off x="548640" y="4023360"/>
-            <a:ext cx="3515258" cy="2148840"/>
-          </a:xfrm>
-          <a:prstGeom prst="roundRect">
-            <a:avLst>
-              <a:gd name="adj" fmla="val 6000"/>
-            </a:avLst>
-          </a:prstGeom>
-          <a:solidFill>
-            <a:srgbClr val="EAF3FF"/>
-          </a:solidFill>
-          <a:ln>
-            <a:noFill/>
-          </a:ln>
-          <a:effectLst/>
-        </p:spPr>
-        <p:style>
-          <a:lnRef idx="1">
-            <a:schemeClr val="accent1"/>
-          </a:lnRef>
-          <a:fillRef idx="3">
-            <a:schemeClr val="accent1"/>
-          </a:fillRef>
-          <a:effectRef idx="2">
-            <a:schemeClr val="accent1"/>
-          </a:effectRef>
-          <a:fontRef idx="minor">
-            <a:schemeClr val="lt1"/>
-          </a:fontRef>
-        </p:style>
-        <p:txBody>
-          <a:bodyPr rtlCol="0" anchor="ctr"/>
-          <a:lstStyle/>
-          <a:p/>
-        </p:txBody>
-      </p:sp>
-      <p:sp>
-        <p:nvSpPr>
-          <p:cNvPr id="19" name="Oval 18"/>
-          <p:cNvSpPr/>
-          <p:nvPr/>
-        </p:nvSpPr>
-        <p:spPr>
-          <a:xfrm>
-            <a:off x="777240" y="4251960"/>
-            <a:ext cx="457200" cy="457200"/>
-          </a:xfrm>
-          <a:prstGeom prst="ellipse">
-            <a:avLst/>
-          </a:prstGeom>
-          <a:solidFill>
-            <a:srgbClr val="33C17A"/>
-          </a:solidFill>
-          <a:ln>
-            <a:noFill/>
-          </a:ln>
-          <a:effectLst/>
-        </p:spPr>
-        <p:style>
-          <a:lnRef idx="1">
-            <a:schemeClr val="accent1"/>
-          </a:lnRef>
-          <a:fillRef idx="3">
-            <a:schemeClr val="accent1"/>
-          </a:fillRef>
-          <a:effectRef idx="2">
-            <a:schemeClr val="accent1"/>
-          </a:effectRef>
-          <a:fontRef idx="minor">
-            <a:schemeClr val="lt1"/>
-          </a:fontRef>
-        </p:style>
-        <p:txBody>
-          <a:bodyPr rtlCol="0" anchor="ctr" lIns="0" rIns="0" tIns="0" bIns="0"/>
-          <a:lstStyle/>
-          <a:p>
-            <a:pPr algn="ctr"/>
-            <a:r>
-              <a:rPr sz="1500" b="1">
-                <a:solidFill>
-                  <a:srgbClr val="202122"/>
-                </a:solidFill>
-                <a:latin typeface="Calibri"/>
-              </a:rPr>
-              <a:t>4</a:t>
-            </a:r>
-          </a:p>
-        </p:txBody>
-      </p:sp>
-      <p:sp>
-        <p:nvSpPr>
-          <p:cNvPr id="20" name="TextBox 19"/>
-          <p:cNvSpPr txBox="1"/>
-          <p:nvPr/>
-        </p:nvSpPr>
-        <p:spPr>
-          <a:xfrm>
-            <a:off x="1371600" y="4224528"/>
-            <a:ext cx="2509418" cy="512064"/>
-          </a:xfrm>
-          <a:prstGeom prst="rect">
-            <a:avLst/>
-          </a:prstGeom>
-          <a:noFill/>
-        </p:spPr>
-        <p:txBody>
-          <a:bodyPr wrap="square" anchor="ctr" lIns="0" rIns="0" tIns="0" bIns="0"/>
-          <a:lstStyle/>
-          <a:p>
-            <a:pPr algn="l"/>
-            <a:r>
-              <a:rPr sz="1900" b="1" i="0">
-                <a:solidFill>
-                  <a:srgbClr val="03306E"/>
-                </a:solidFill>
-                <a:latin typeface="Calibri"/>
-              </a:rPr>
-              <a:t>Cloud and data</a:t>
-            </a:r>
-          </a:p>
-        </p:txBody>
-      </p:sp>
-      <p:sp>
-        <p:nvSpPr>
-          <p:cNvPr id="21" name="TextBox 20"/>
-          <p:cNvSpPr txBox="1"/>
-          <p:nvPr/>
-        </p:nvSpPr>
-        <p:spPr>
-          <a:xfrm>
-            <a:off x="777240" y="4892040"/>
-            <a:ext cx="3058058" cy="1143000"/>
-          </a:xfrm>
-          <a:prstGeom prst="rect">
-            <a:avLst/>
-          </a:prstGeom>
-          <a:noFill/>
-        </p:spPr>
-        <p:txBody>
-          <a:bodyPr wrap="square" anchor="t" lIns="0" rIns="0" tIns="0" bIns="0"/>
-          <a:lstStyle/>
-          <a:p>
-            <a:pPr algn="l"/>
-            <a:r>
-              <a:rPr sz="2000" b="0" i="0">
-                <a:solidFill>
-                  <a:srgbClr val="202122"/>
-                </a:solidFill>
-                <a:latin typeface="Calibri"/>
-              </a:rPr>
-              <a:t>Cloud platforms, data lakes and data warehouses.</a:t>
-            </a:r>
-          </a:p>
-        </p:txBody>
-      </p:sp>
-      <p:sp>
-        <p:nvSpPr>
-          <p:cNvPr id="22" name="Rounded Rectangle 21"/>
-          <p:cNvSpPr/>
-          <p:nvPr/>
-        </p:nvSpPr>
-        <p:spPr>
-          <a:xfrm>
-            <a:off x="4338218" y="4023360"/>
-            <a:ext cx="3515258" cy="2148840"/>
-          </a:xfrm>
-          <a:prstGeom prst="roundRect">
-            <a:avLst>
-              <a:gd name="adj" fmla="val 6000"/>
-            </a:avLst>
-          </a:prstGeom>
-          <a:solidFill>
-            <a:srgbClr val="EAF3FF"/>
-          </a:solidFill>
-          <a:ln>
-            <a:noFill/>
-          </a:ln>
-          <a:effectLst/>
-        </p:spPr>
-        <p:style>
-          <a:lnRef idx="1">
-            <a:schemeClr val="accent1"/>
-          </a:lnRef>
-          <a:fillRef idx="3">
-            <a:schemeClr val="accent1"/>
-          </a:fillRef>
-          <a:effectRef idx="2">
-            <a:schemeClr val="accent1"/>
-          </a:effectRef>
-          <a:fontRef idx="minor">
-            <a:schemeClr val="lt1"/>
-          </a:fontRef>
-        </p:style>
-        <p:txBody>
-          <a:bodyPr rtlCol="0" anchor="ctr"/>
-          <a:lstStyle/>
-          <a:p/>
-        </p:txBody>
-      </p:sp>
-      <p:sp>
-        <p:nvSpPr>
-          <p:cNvPr id="23" name="Oval 22"/>
-          <p:cNvSpPr/>
-          <p:nvPr/>
-        </p:nvSpPr>
-        <p:spPr>
-          <a:xfrm>
-            <a:off x="4566818" y="4251960"/>
-            <a:ext cx="457200" cy="457200"/>
-          </a:xfrm>
-          <a:prstGeom prst="ellipse">
-            <a:avLst/>
-          </a:prstGeom>
-          <a:solidFill>
-            <a:srgbClr val="33C17A"/>
-          </a:solidFill>
-          <a:ln>
-            <a:noFill/>
-          </a:ln>
-          <a:effectLst/>
-        </p:spPr>
-        <p:style>
-          <a:lnRef idx="1">
-            <a:schemeClr val="accent1"/>
-          </a:lnRef>
-          <a:fillRef idx="3">
-            <a:schemeClr val="accent1"/>
-          </a:fillRef>
-          <a:effectRef idx="2">
-            <a:schemeClr val="accent1"/>
-          </a:effectRef>
-          <a:fontRef idx="minor">
-            <a:schemeClr val="lt1"/>
-          </a:fontRef>
-        </p:style>
-        <p:txBody>
-          <a:bodyPr rtlCol="0" anchor="ctr" lIns="0" rIns="0" tIns="0" bIns="0"/>
-          <a:lstStyle/>
-          <a:p>
-            <a:pPr algn="ctr"/>
-            <a:r>
-              <a:rPr sz="1500" b="1">
-                <a:solidFill>
-                  <a:srgbClr val="202122"/>
-                </a:solidFill>
-                <a:latin typeface="Calibri"/>
-              </a:rPr>
-              <a:t>5</a:t>
-            </a:r>
-          </a:p>
-        </p:txBody>
-      </p:sp>
-      <p:sp>
-        <p:nvSpPr>
-          <p:cNvPr id="24" name="TextBox 23"/>
-          <p:cNvSpPr txBox="1"/>
-          <p:nvPr/>
-        </p:nvSpPr>
-        <p:spPr>
-          <a:xfrm>
-            <a:off x="5161178" y="4224528"/>
-            <a:ext cx="2509418" cy="512064"/>
-          </a:xfrm>
-          <a:prstGeom prst="rect">
-            <a:avLst/>
-          </a:prstGeom>
-          <a:noFill/>
-        </p:spPr>
-        <p:txBody>
-          <a:bodyPr wrap="square" anchor="ctr" lIns="0" rIns="0" tIns="0" bIns="0"/>
-          <a:lstStyle/>
-          <a:p>
-            <a:pPr algn="l"/>
-            <a:r>
-              <a:rPr sz="1600" b="1" i="0">
-                <a:solidFill>
-                  <a:srgbClr val="03306E"/>
-                </a:solidFill>
-                <a:latin typeface="Calibri"/>
-              </a:rPr>
-              <a:t>Drones and 3D printing</a:t>
-            </a:r>
-          </a:p>
-        </p:txBody>
-      </p:sp>
-      <p:sp>
-        <p:nvSpPr>
-          <p:cNvPr id="25" name="TextBox 24"/>
-          <p:cNvSpPr txBox="1"/>
-          <p:nvPr/>
-        </p:nvSpPr>
-        <p:spPr>
-          <a:xfrm>
-            <a:off x="4566818" y="4892040"/>
-            <a:ext cx="3058058" cy="1143000"/>
-          </a:xfrm>
-          <a:prstGeom prst="rect">
-            <a:avLst/>
-          </a:prstGeom>
-          <a:noFill/>
-        </p:spPr>
-        <p:txBody>
-          <a:bodyPr wrap="square" anchor="t" lIns="0" rIns="0" tIns="0" bIns="0"/>
-          <a:lstStyle/>
-          <a:p>
-            <a:pPr algn="l"/>
-            <a:r>
-              <a:rPr sz="2000" b="0" i="0">
-                <a:solidFill>
-                  <a:srgbClr val="202122"/>
-                </a:solidFill>
-                <a:latin typeface="Calibri"/>
-              </a:rPr>
-              <a:t>New physical products controlled by software.</a:t>
-            </a:r>
-          </a:p>
-        </p:txBody>
-      </p:sp>
-      <p:sp>
-        <p:nvSpPr>
-          <p:cNvPr id="26" name="Rounded Rectangle 25"/>
-          <p:cNvSpPr/>
-          <p:nvPr/>
-        </p:nvSpPr>
-        <p:spPr>
-          <a:xfrm>
-            <a:off x="8127796" y="4023360"/>
-            <a:ext cx="3515258" cy="2148840"/>
-          </a:xfrm>
-          <a:prstGeom prst="roundRect">
-            <a:avLst>
-              <a:gd name="adj" fmla="val 6000"/>
-            </a:avLst>
-          </a:prstGeom>
-          <a:solidFill>
-            <a:srgbClr val="EAF3FF"/>
-          </a:solidFill>
-          <a:ln>
-            <a:noFill/>
-          </a:ln>
-          <a:effectLst/>
-        </p:spPr>
-        <p:style>
-          <a:lnRef idx="1">
-            <a:schemeClr val="accent1"/>
-          </a:lnRef>
-          <a:fillRef idx="3">
-            <a:schemeClr val="accent1"/>
-          </a:fillRef>
-          <a:effectRef idx="2">
-            <a:schemeClr val="accent1"/>
-          </a:effectRef>
-          <a:fontRef idx="minor">
-            <a:schemeClr val="lt1"/>
-          </a:fontRef>
-        </p:style>
-        <p:txBody>
-          <a:bodyPr rtlCol="0" anchor="ctr"/>
-          <a:lstStyle/>
-          <a:p/>
-        </p:txBody>
-      </p:sp>
-      <p:sp>
-        <p:nvSpPr>
-          <p:cNvPr id="27" name="Oval 26"/>
-          <p:cNvSpPr/>
-          <p:nvPr/>
-        </p:nvSpPr>
-        <p:spPr>
-          <a:xfrm>
-            <a:off x="8356396" y="4251960"/>
-            <a:ext cx="457200" cy="457200"/>
-          </a:xfrm>
-          <a:prstGeom prst="ellipse">
-            <a:avLst/>
-          </a:prstGeom>
-          <a:solidFill>
-            <a:srgbClr val="33C17A"/>
-          </a:solidFill>
-          <a:ln>
-            <a:noFill/>
-          </a:ln>
-          <a:effectLst/>
-        </p:spPr>
-        <p:style>
-          <a:lnRef idx="1">
-            <a:schemeClr val="accent1"/>
-          </a:lnRef>
-          <a:fillRef idx="3">
-            <a:schemeClr val="accent1"/>
-          </a:fillRef>
-          <a:effectRef idx="2">
-            <a:schemeClr val="accent1"/>
-          </a:effectRef>
-          <a:fontRef idx="minor">
-            <a:schemeClr val="lt1"/>
-          </a:fontRef>
-        </p:style>
-        <p:txBody>
-          <a:bodyPr rtlCol="0" anchor="ctr" lIns="0" rIns="0" tIns="0" bIns="0"/>
-          <a:lstStyle/>
-          <a:p>
-            <a:pPr algn="ctr"/>
-            <a:r>
-              <a:rPr sz="1500" b="1">
-                <a:solidFill>
-                  <a:srgbClr val="202122"/>
-                </a:solidFill>
-                <a:latin typeface="Calibri"/>
-              </a:rPr>
-              <a:t>6</a:t>
-            </a:r>
-          </a:p>
-        </p:txBody>
-      </p:sp>
-      <p:sp>
-        <p:nvSpPr>
-          <p:cNvPr id="28" name="TextBox 27"/>
-          <p:cNvSpPr txBox="1"/>
-          <p:nvPr/>
-        </p:nvSpPr>
-        <p:spPr>
-          <a:xfrm>
-            <a:off x="8950756" y="4224528"/>
-            <a:ext cx="2509418" cy="512064"/>
-          </a:xfrm>
-          <a:prstGeom prst="rect">
-            <a:avLst/>
-          </a:prstGeom>
-          <a:noFill/>
-        </p:spPr>
-        <p:txBody>
-          <a:bodyPr wrap="square" anchor="ctr" lIns="0" rIns="0" tIns="0" bIns="0"/>
-          <a:lstStyle/>
-          <a:p>
-            <a:pPr algn="l"/>
-            <a:r>
-              <a:rPr sz="1900" b="1" i="0">
-                <a:solidFill>
-                  <a:srgbClr val="03306E"/>
-                </a:solidFill>
-                <a:latin typeface="Calibri"/>
-              </a:rPr>
-              <a:t>Networks</a:t>
-            </a:r>
-          </a:p>
-        </p:txBody>
-      </p:sp>
-      <p:sp>
-        <p:nvSpPr>
-          <p:cNvPr id="29" name="TextBox 28"/>
-          <p:cNvSpPr txBox="1"/>
-          <p:nvPr/>
-        </p:nvSpPr>
-        <p:spPr>
-          <a:xfrm>
-            <a:off x="8356396" y="4892040"/>
-            <a:ext cx="3058058" cy="1143000"/>
-          </a:xfrm>
-          <a:prstGeom prst="rect">
-            <a:avLst/>
-          </a:prstGeom>
-          <a:noFill/>
-        </p:spPr>
-        <p:txBody>
-          <a:bodyPr wrap="square" anchor="t" lIns="0" rIns="0" tIns="0" bIns="0"/>
-          <a:lstStyle/>
-          <a:p>
-            <a:pPr algn="l"/>
-            <a:r>
-              <a:rPr sz="2000" b="0" i="0">
-                <a:solidFill>
-                  <a:srgbClr val="202122"/>
-                </a:solidFill>
-                <a:latin typeface="Calibri"/>
-              </a:rPr>
-              <a:t>5G and wider broadband.</a:t>
+              <a:rPr sz="1900" b="0" i="0">
+                <a:solidFill>
+                  <a:srgbClr val="FFFFFF"/>
+                </a:solidFill>
+                <a:latin typeface="Cambria"/>
+              </a:rPr>
+              <a:t>A warehouse app uses computer vision to read labels, IoT sensors to track stock, and cloud services to store the data.</a:t>
             </a:r>
           </a:p>
         </p:txBody>
@@ -5748,7 +6912,7 @@
                 </a:solidFill>
                 <a:latin typeface="Cambria"/>
               </a:rPr>
-              <a:t>Identifying and addressing training needs</a:t>
+              <a:t>Emerging technologies</a:t>
             </a:r>
           </a:p>
         </p:txBody>
@@ -5821,20 +6985,22 @@
       </p:sp>
       <p:sp>
         <p:nvSpPr>
-          <p:cNvPr id="6" name="Rectangle 5"/>
+          <p:cNvPr id="6" name="Rounded Rectangle 5"/>
           <p:cNvSpPr/>
           <p:nvPr/>
         </p:nvSpPr>
         <p:spPr>
           <a:xfrm>
-            <a:off x="1884006" y="2656332"/>
-            <a:ext cx="8423681" cy="36576"/>
-          </a:xfrm>
-          <a:prstGeom prst="rect">
-            <a:avLst/>
+            <a:off x="548640" y="1600200"/>
+            <a:ext cx="3515258" cy="2148840"/>
+          </a:xfrm>
+          <a:prstGeom prst="roundRect">
+            <a:avLst>
+              <a:gd name="adj" fmla="val 6000"/>
+            </a:avLst>
           </a:prstGeom>
           <a:solidFill>
-            <a:srgbClr val="A9C8F0"/>
+            <a:srgbClr val="EAF3FF"/>
           </a:solidFill>
           <a:ln>
             <a:noFill/>
@@ -5869,8 +7035,8 @@
         </p:nvSpPr>
         <p:spPr>
           <a:xfrm>
-            <a:off x="1563966" y="2354580"/>
-            <a:ext cx="640080" cy="640080"/>
+            <a:off x="777240" y="1828800"/>
+            <a:ext cx="457200" cy="457200"/>
           </a:xfrm>
           <a:prstGeom prst="ellipse">
             <a:avLst/>
@@ -5903,7 +7069,7 @@
           <a:p>
             <a:pPr algn="ctr"/>
             <a:r>
-              <a:rPr sz="2000" b="1">
+              <a:rPr sz="1500" b="1">
                 <a:solidFill>
                   <a:srgbClr val="202122"/>
                 </a:solidFill>
@@ -5922,8 +7088,8 @@
         </p:nvSpPr>
         <p:spPr>
           <a:xfrm>
-            <a:off x="548640" y="3131820"/>
-            <a:ext cx="2670733" cy="731520"/>
+            <a:off x="1371600" y="1801368"/>
+            <a:ext cx="2509418" cy="512064"/>
           </a:xfrm>
           <a:prstGeom prst="rect">
             <a:avLst/>
@@ -5931,32 +7097,65 @@
           <a:noFill/>
         </p:spPr>
         <p:txBody>
+          <a:bodyPr wrap="square" anchor="ctr" lIns="0" rIns="0" tIns="0" bIns="0"/>
+          <a:lstStyle/>
+          <a:p>
+            <a:pPr algn="l"/>
+            <a:r>
+              <a:rPr sz="1900" b="1" i="0">
+                <a:solidFill>
+                  <a:srgbClr val="03306E"/>
+                </a:solidFill>
+                <a:latin typeface="Calibri"/>
+              </a:rPr>
+              <a:t>AI and VI</a:t>
+            </a:r>
+          </a:p>
+        </p:txBody>
+      </p:sp>
+      <p:sp>
+        <p:nvSpPr>
+          <p:cNvPr id="9" name="TextBox 8"/>
+          <p:cNvSpPr txBox="1"/>
+          <p:nvPr/>
+        </p:nvSpPr>
+        <p:spPr>
+          <a:xfrm>
+            <a:off x="777240" y="2468880"/>
+            <a:ext cx="3058058" cy="1143000"/>
+          </a:xfrm>
+          <a:prstGeom prst="rect">
+            <a:avLst/>
+          </a:prstGeom>
+          <a:noFill/>
+        </p:spPr>
+        <p:txBody>
           <a:bodyPr wrap="square" anchor="t" lIns="0" rIns="0" tIns="0" bIns="0"/>
           <a:lstStyle/>
           <a:p>
-            <a:pPr algn="ctr"/>
-            <a:r>
-              <a:rPr sz="1700" b="1" i="0">
-                <a:solidFill>
-                  <a:srgbClr val="03306E"/>
-                </a:solidFill>
-                <a:latin typeface="Calibri"/>
-              </a:rPr>
-              <a:t>Identify</a:t>
-            </a:r>
-          </a:p>
-        </p:txBody>
-      </p:sp>
-      <p:sp>
-        <p:nvSpPr>
-          <p:cNvPr id="9" name="Rounded Rectangle 8"/>
+            <a:pPr algn="l"/>
+            <a:r>
+              <a:rPr sz="1800" b="0" i="0">
+                <a:solidFill>
+                  <a:srgbClr val="202122"/>
+                </a:solidFill>
+                <a:latin typeface="Calibri"/>
+              </a:rPr>
+              <a:t>Generative and conversational AI, machine learning, object recognition, computer vision.</a:t>
+            </a:r>
+          </a:p>
+        </p:txBody>
+      </p:sp>
+      <p:sp>
+        <p:nvSpPr>
+          <p:cNvPr id="10" name="Rounded Rectangle 9"/>
           <p:cNvSpPr/>
           <p:nvPr/>
         </p:nvSpPr>
         <p:spPr>
           <a:xfrm>
-            <a:off x="548640" y="3909060"/>
-            <a:ext cx="2670733" cy="1508760"/>
+            <a:off x="4338218" y="1600200"/>
+            <a:ext cx="3515258" cy="2148840"/>
           </a:xfrm>
           <a:prstGeom prst="roundRect">
             <a:avLst>
@@ -5993,47 +7192,14 @@
       </p:sp>
       <p:sp>
         <p:nvSpPr>
-          <p:cNvPr id="10" name="TextBox 9"/>
-          <p:cNvSpPr txBox="1"/>
-          <p:nvPr/>
-        </p:nvSpPr>
-        <p:spPr>
-          <a:xfrm>
-            <a:off x="685800" y="4046220"/>
-            <a:ext cx="2396413" cy="1234439"/>
-          </a:xfrm>
-          <a:prstGeom prst="rect">
-            <a:avLst/>
-          </a:prstGeom>
-          <a:noFill/>
-        </p:spPr>
-        <p:txBody>
-          <a:bodyPr wrap="square" anchor="t" lIns="0" rIns="0" tIns="0" bIns="0"/>
-          <a:lstStyle/>
-          <a:p>
-            <a:pPr algn="l"/>
-            <a:r>
-              <a:rPr sz="1800" b="0" i="0">
-                <a:solidFill>
-                  <a:srgbClr val="202122"/>
-                </a:solidFill>
-                <a:latin typeface="Calibri"/>
-              </a:rPr>
-              <a:t>What knowledge and skills does the project need?</a:t>
-            </a:r>
-          </a:p>
-        </p:txBody>
-      </p:sp>
-      <p:sp>
-        <p:nvSpPr>
           <p:cNvPr id="11" name="Oval 10"/>
           <p:cNvSpPr/>
           <p:nvPr/>
         </p:nvSpPr>
         <p:spPr>
           <a:xfrm>
-            <a:off x="4371860" y="2354580"/>
-            <a:ext cx="640080" cy="640080"/>
+            <a:off x="4566818" y="1828800"/>
+            <a:ext cx="457200" cy="457200"/>
           </a:xfrm>
           <a:prstGeom prst="ellipse">
             <a:avLst/>
@@ -6066,7 +7232,7 @@
           <a:p>
             <a:pPr algn="ctr"/>
             <a:r>
-              <a:rPr sz="2000" b="1">
+              <a:rPr sz="1500" b="1">
                 <a:solidFill>
                   <a:srgbClr val="202122"/>
                 </a:solidFill>
@@ -6085,8 +7251,8 @@
         </p:nvSpPr>
         <p:spPr>
           <a:xfrm>
-            <a:off x="3356533" y="3131820"/>
-            <a:ext cx="2670733" cy="731520"/>
+            <a:off x="5161178" y="1801368"/>
+            <a:ext cx="2509418" cy="512064"/>
           </a:xfrm>
           <a:prstGeom prst="rect">
             <a:avLst/>
@@ -6094,32 +7260,65 @@
           <a:noFill/>
         </p:spPr>
         <p:txBody>
+          <a:bodyPr wrap="square" anchor="ctr" lIns="0" rIns="0" tIns="0" bIns="0"/>
+          <a:lstStyle/>
+          <a:p>
+            <a:pPr algn="l"/>
+            <a:r>
+              <a:rPr sz="1900" b="1" i="0">
+                <a:solidFill>
+                  <a:srgbClr val="03306E"/>
+                </a:solidFill>
+                <a:latin typeface="Calibri"/>
+              </a:rPr>
+              <a:t>OT and IoT</a:t>
+            </a:r>
+          </a:p>
+        </p:txBody>
+      </p:sp>
+      <p:sp>
+        <p:nvSpPr>
+          <p:cNvPr id="13" name="TextBox 12"/>
+          <p:cNvSpPr txBox="1"/>
+          <p:nvPr/>
+        </p:nvSpPr>
+        <p:spPr>
+          <a:xfrm>
+            <a:off x="4566818" y="2468880"/>
+            <a:ext cx="3058058" cy="1143000"/>
+          </a:xfrm>
+          <a:prstGeom prst="rect">
+            <a:avLst/>
+          </a:prstGeom>
+          <a:noFill/>
+        </p:spPr>
+        <p:txBody>
           <a:bodyPr wrap="square" anchor="t" lIns="0" rIns="0" tIns="0" bIns="0"/>
           <a:lstStyle/>
           <a:p>
-            <a:pPr algn="ctr"/>
-            <a:r>
-              <a:rPr sz="1700" b="1" i="0">
-                <a:solidFill>
-                  <a:srgbClr val="03306E"/>
-                </a:solidFill>
-                <a:latin typeface="Calibri"/>
-              </a:rPr>
-              <a:t>Assess</a:t>
-            </a:r>
-          </a:p>
-        </p:txBody>
-      </p:sp>
-      <p:sp>
-        <p:nvSpPr>
-          <p:cNvPr id="13" name="Rounded Rectangle 12"/>
+            <a:pPr algn="l"/>
+            <a:r>
+              <a:rPr sz="2000" b="0" i="0">
+                <a:solidFill>
+                  <a:srgbClr val="202122"/>
+                </a:solidFill>
+                <a:latin typeface="Calibri"/>
+              </a:rPr>
+              <a:t>Operational technology and connected devices.</a:t>
+            </a:r>
+          </a:p>
+        </p:txBody>
+      </p:sp>
+      <p:sp>
+        <p:nvSpPr>
+          <p:cNvPr id="14" name="Rounded Rectangle 13"/>
           <p:cNvSpPr/>
           <p:nvPr/>
         </p:nvSpPr>
         <p:spPr>
           <a:xfrm>
-            <a:off x="3356533" y="3909060"/>
-            <a:ext cx="2670733" cy="1508760"/>
+            <a:off x="8127796" y="1600200"/>
+            <a:ext cx="3515258" cy="2148840"/>
           </a:xfrm>
           <a:prstGeom prst="roundRect">
             <a:avLst>
@@ -6156,47 +7355,14 @@
       </p:sp>
       <p:sp>
         <p:nvSpPr>
-          <p:cNvPr id="14" name="TextBox 13"/>
-          <p:cNvSpPr txBox="1"/>
-          <p:nvPr/>
-        </p:nvSpPr>
-        <p:spPr>
-          <a:xfrm>
-            <a:off x="3493693" y="4046220"/>
-            <a:ext cx="2396413" cy="1234439"/>
-          </a:xfrm>
-          <a:prstGeom prst="rect">
-            <a:avLst/>
-          </a:prstGeom>
-          <a:noFill/>
-        </p:spPr>
-        <p:txBody>
-          <a:bodyPr wrap="square" anchor="t" lIns="0" rIns="0" tIns="0" bIns="0"/>
-          <a:lstStyle/>
-          <a:p>
-            <a:pPr algn="l"/>
-            <a:r>
-              <a:rPr sz="1800" b="0" i="0">
-                <a:solidFill>
-                  <a:srgbClr val="202122"/>
-                </a:solidFill>
-                <a:latin typeface="Calibri"/>
-              </a:rPr>
-              <a:t>Can you currently do the work?</a:t>
-            </a:r>
-          </a:p>
-        </p:txBody>
-      </p:sp>
-      <p:sp>
-        <p:nvSpPr>
           <p:cNvPr id="15" name="Oval 14"/>
           <p:cNvSpPr/>
           <p:nvPr/>
         </p:nvSpPr>
         <p:spPr>
           <a:xfrm>
-            <a:off x="7179754" y="2354580"/>
-            <a:ext cx="640080" cy="640080"/>
+            <a:off x="8356396" y="1828800"/>
+            <a:ext cx="457200" cy="457200"/>
           </a:xfrm>
           <a:prstGeom prst="ellipse">
             <a:avLst/>
@@ -6229,7 +7395,7 @@
           <a:p>
             <a:pPr algn="ctr"/>
             <a:r>
-              <a:rPr sz="2000" b="1">
+              <a:rPr sz="1500" b="1">
                 <a:solidFill>
                   <a:srgbClr val="202122"/>
                 </a:solidFill>
@@ -6248,8 +7414,8 @@
         </p:nvSpPr>
         <p:spPr>
           <a:xfrm>
-            <a:off x="6164427" y="3131820"/>
-            <a:ext cx="2670733" cy="731520"/>
+            <a:off x="8950756" y="1801368"/>
+            <a:ext cx="2509418" cy="512064"/>
           </a:xfrm>
           <a:prstGeom prst="rect">
             <a:avLst/>
@@ -6257,32 +7423,65 @@
           <a:noFill/>
         </p:spPr>
         <p:txBody>
+          <a:bodyPr wrap="square" anchor="ctr" lIns="0" rIns="0" tIns="0" bIns="0"/>
+          <a:lstStyle/>
+          <a:p>
+            <a:pPr algn="l"/>
+            <a:r>
+              <a:rPr sz="1600" b="1" i="0">
+                <a:solidFill>
+                  <a:srgbClr val="03306E"/>
+                </a:solidFill>
+                <a:latin typeface="Calibri"/>
+              </a:rPr>
+              <a:t>Biometrics and robotics</a:t>
+            </a:r>
+          </a:p>
+        </p:txBody>
+      </p:sp>
+      <p:sp>
+        <p:nvSpPr>
+          <p:cNvPr id="17" name="TextBox 16"/>
+          <p:cNvSpPr txBox="1"/>
+          <p:nvPr/>
+        </p:nvSpPr>
+        <p:spPr>
+          <a:xfrm>
+            <a:off x="8356396" y="2468880"/>
+            <a:ext cx="3058058" cy="1143000"/>
+          </a:xfrm>
+          <a:prstGeom prst="rect">
+            <a:avLst/>
+          </a:prstGeom>
+          <a:noFill/>
+        </p:spPr>
+        <p:txBody>
           <a:bodyPr wrap="square" anchor="t" lIns="0" rIns="0" tIns="0" bIns="0"/>
           <a:lstStyle/>
           <a:p>
-            <a:pPr algn="ctr"/>
-            <a:r>
-              <a:rPr sz="1700" b="1" i="0">
-                <a:solidFill>
-                  <a:srgbClr val="03306E"/>
-                </a:solidFill>
-                <a:latin typeface="Calibri"/>
-              </a:rPr>
-              <a:t>Choose</a:t>
-            </a:r>
-          </a:p>
-        </p:txBody>
-      </p:sp>
-      <p:sp>
-        <p:nvSpPr>
-          <p:cNvPr id="17" name="Rounded Rectangle 16"/>
+            <a:pPr algn="l"/>
+            <a:r>
+              <a:rPr sz="2000" b="0" i="0">
+                <a:solidFill>
+                  <a:srgbClr val="202122"/>
+                </a:solidFill>
+                <a:latin typeface="Calibri"/>
+              </a:rPr>
+              <a:t>Identity by body features; automation.</a:t>
+            </a:r>
+          </a:p>
+        </p:txBody>
+      </p:sp>
+      <p:sp>
+        <p:nvSpPr>
+          <p:cNvPr id="18" name="Rounded Rectangle 17"/>
           <p:cNvSpPr/>
           <p:nvPr/>
         </p:nvSpPr>
         <p:spPr>
           <a:xfrm>
-            <a:off x="6164427" y="3909060"/>
-            <a:ext cx="2670733" cy="1508760"/>
+            <a:off x="548640" y="4023360"/>
+            <a:ext cx="3515258" cy="2148840"/>
           </a:xfrm>
           <a:prstGeom prst="roundRect">
             <a:avLst>
@@ -6319,47 +7518,14 @@
       </p:sp>
       <p:sp>
         <p:nvSpPr>
-          <p:cNvPr id="18" name="TextBox 17"/>
-          <p:cNvSpPr txBox="1"/>
-          <p:nvPr/>
-        </p:nvSpPr>
-        <p:spPr>
-          <a:xfrm>
-            <a:off x="6301587" y="4046220"/>
-            <a:ext cx="2396413" cy="1234439"/>
-          </a:xfrm>
-          <a:prstGeom prst="rect">
-            <a:avLst/>
-          </a:prstGeom>
-          <a:noFill/>
-        </p:spPr>
-        <p:txBody>
-          <a:bodyPr wrap="square" anchor="t" lIns="0" rIns="0" tIns="0" bIns="0"/>
-          <a:lstStyle/>
-          <a:p>
-            <a:pPr algn="l"/>
-            <a:r>
-              <a:rPr sz="1800" b="0" i="0">
-                <a:solidFill>
-                  <a:srgbClr val="202122"/>
-                </a:solidFill>
-                <a:latin typeface="Calibri"/>
-              </a:rPr>
-              <a:t>Coaching, on-the-job learning, self-study, forums, workshops.</a:t>
-            </a:r>
-          </a:p>
-        </p:txBody>
-      </p:sp>
-      <p:sp>
-        <p:nvSpPr>
           <p:cNvPr id="19" name="Oval 18"/>
           <p:cNvSpPr/>
           <p:nvPr/>
         </p:nvSpPr>
         <p:spPr>
           <a:xfrm>
-            <a:off x="9987648" y="2354580"/>
-            <a:ext cx="640080" cy="640080"/>
+            <a:off x="777240" y="4251960"/>
+            <a:ext cx="457200" cy="457200"/>
           </a:xfrm>
           <a:prstGeom prst="ellipse">
             <a:avLst/>
@@ -6392,7 +7558,7 @@
           <a:p>
             <a:pPr algn="ctr"/>
             <a:r>
-              <a:rPr sz="2000" b="1">
+              <a:rPr sz="1500" b="1">
                 <a:solidFill>
                   <a:srgbClr val="202122"/>
                 </a:solidFill>
@@ -6411,8 +7577,8 @@
         </p:nvSpPr>
         <p:spPr>
           <a:xfrm>
-            <a:off x="8972321" y="3131820"/>
-            <a:ext cx="2670733" cy="731520"/>
+            <a:off x="1371600" y="4224528"/>
+            <a:ext cx="2509418" cy="512064"/>
           </a:xfrm>
           <a:prstGeom prst="rect">
             <a:avLst/>
@@ -6420,32 +7586,65 @@
           <a:noFill/>
         </p:spPr>
         <p:txBody>
+          <a:bodyPr wrap="square" anchor="ctr" lIns="0" rIns="0" tIns="0" bIns="0"/>
+          <a:lstStyle/>
+          <a:p>
+            <a:pPr algn="l"/>
+            <a:r>
+              <a:rPr sz="1900" b="1" i="0">
+                <a:solidFill>
+                  <a:srgbClr val="03306E"/>
+                </a:solidFill>
+                <a:latin typeface="Calibri"/>
+              </a:rPr>
+              <a:t>Cloud and data</a:t>
+            </a:r>
+          </a:p>
+        </p:txBody>
+      </p:sp>
+      <p:sp>
+        <p:nvSpPr>
+          <p:cNvPr id="21" name="TextBox 20"/>
+          <p:cNvSpPr txBox="1"/>
+          <p:nvPr/>
+        </p:nvSpPr>
+        <p:spPr>
+          <a:xfrm>
+            <a:off x="777240" y="4892040"/>
+            <a:ext cx="3058058" cy="1143000"/>
+          </a:xfrm>
+          <a:prstGeom prst="rect">
+            <a:avLst/>
+          </a:prstGeom>
+          <a:noFill/>
+        </p:spPr>
+        <p:txBody>
           <a:bodyPr wrap="square" anchor="t" lIns="0" rIns="0" tIns="0" bIns="0"/>
           <a:lstStyle/>
           <a:p>
-            <a:pPr algn="ctr"/>
-            <a:r>
-              <a:rPr sz="1700" b="1" i="0">
-                <a:solidFill>
-                  <a:srgbClr val="03306E"/>
-                </a:solidFill>
-                <a:latin typeface="Calibri"/>
-              </a:rPr>
-              <a:t>Learn and apply</a:t>
-            </a:r>
-          </a:p>
-        </p:txBody>
-      </p:sp>
-      <p:sp>
-        <p:nvSpPr>
-          <p:cNvPr id="21" name="Rounded Rectangle 20"/>
+            <a:pPr algn="l"/>
+            <a:r>
+              <a:rPr sz="2000" b="0" i="0">
+                <a:solidFill>
+                  <a:srgbClr val="202122"/>
+                </a:solidFill>
+                <a:latin typeface="Calibri"/>
+              </a:rPr>
+              <a:t>Cloud platforms, data lakes and data warehouses.</a:t>
+            </a:r>
+          </a:p>
+        </p:txBody>
+      </p:sp>
+      <p:sp>
+        <p:nvSpPr>
+          <p:cNvPr id="22" name="Rounded Rectangle 21"/>
           <p:cNvSpPr/>
           <p:nvPr/>
         </p:nvSpPr>
         <p:spPr>
           <a:xfrm>
-            <a:off x="8972321" y="3909060"/>
-            <a:ext cx="2670733" cy="1508760"/>
+            <a:off x="4338218" y="4023360"/>
+            <a:ext cx="3515258" cy="2148840"/>
           </a:xfrm>
           <a:prstGeom prst="roundRect">
             <a:avLst>
@@ -6482,14 +7681,67 @@
       </p:sp>
       <p:sp>
         <p:nvSpPr>
-          <p:cNvPr id="22" name="TextBox 21"/>
+          <p:cNvPr id="23" name="Oval 22"/>
+          <p:cNvSpPr/>
+          <p:nvPr/>
+        </p:nvSpPr>
+        <p:spPr>
+          <a:xfrm>
+            <a:off x="4566818" y="4251960"/>
+            <a:ext cx="457200" cy="457200"/>
+          </a:xfrm>
+          <a:prstGeom prst="ellipse">
+            <a:avLst/>
+          </a:prstGeom>
+          <a:solidFill>
+            <a:srgbClr val="33C17A"/>
+          </a:solidFill>
+          <a:ln>
+            <a:noFill/>
+          </a:ln>
+          <a:effectLst/>
+        </p:spPr>
+        <p:style>
+          <a:lnRef idx="1">
+            <a:schemeClr val="accent1"/>
+          </a:lnRef>
+          <a:fillRef idx="3">
+            <a:schemeClr val="accent1"/>
+          </a:fillRef>
+          <a:effectRef idx="2">
+            <a:schemeClr val="accent1"/>
+          </a:effectRef>
+          <a:fontRef idx="minor">
+            <a:schemeClr val="lt1"/>
+          </a:fontRef>
+        </p:style>
+        <p:txBody>
+          <a:bodyPr rtlCol="0" anchor="ctr" lIns="0" rIns="0" tIns="0" bIns="0"/>
+          <a:lstStyle/>
+          <a:p>
+            <a:pPr algn="ctr"/>
+            <a:r>
+              <a:rPr sz="1500" b="1">
+                <a:solidFill>
+                  <a:srgbClr val="202122"/>
+                </a:solidFill>
+                <a:latin typeface="Calibri"/>
+              </a:rPr>
+              <a:t>5</a:t>
+            </a:r>
+          </a:p>
+        </p:txBody>
+      </p:sp>
+      <p:sp>
+        <p:nvSpPr>
+          <p:cNvPr id="24" name="TextBox 23"/>
           <p:cNvSpPr txBox="1"/>
           <p:nvPr/>
         </p:nvSpPr>
         <p:spPr>
           <a:xfrm>
-            <a:off x="9109481" y="4046220"/>
-            <a:ext cx="2396413" cy="1234439"/>
+            <a:off x="5161178" y="4224528"/>
+            <a:ext cx="2509418" cy="512064"/>
           </a:xfrm>
           <a:prstGeom prst="rect">
             <a:avLst/>
@@ -6497,18 +7749,214 @@
           <a:noFill/>
         </p:spPr>
         <p:txBody>
+          <a:bodyPr wrap="square" anchor="ctr" lIns="0" rIns="0" tIns="0" bIns="0"/>
+          <a:lstStyle/>
+          <a:p>
+            <a:pPr algn="l"/>
+            <a:r>
+              <a:rPr sz="1600" b="1" i="0">
+                <a:solidFill>
+                  <a:srgbClr val="03306E"/>
+                </a:solidFill>
+                <a:latin typeface="Calibri"/>
+              </a:rPr>
+              <a:t>Drones and 3D printing</a:t>
+            </a:r>
+          </a:p>
+        </p:txBody>
+      </p:sp>
+      <p:sp>
+        <p:nvSpPr>
+          <p:cNvPr id="25" name="TextBox 24"/>
+          <p:cNvSpPr txBox="1"/>
+          <p:nvPr/>
+        </p:nvSpPr>
+        <p:spPr>
+          <a:xfrm>
+            <a:off x="4566818" y="4892040"/>
+            <a:ext cx="3058058" cy="1143000"/>
+          </a:xfrm>
+          <a:prstGeom prst="rect">
+            <a:avLst/>
+          </a:prstGeom>
+          <a:noFill/>
+        </p:spPr>
+        <p:txBody>
           <a:bodyPr wrap="square" anchor="t" lIns="0" rIns="0" tIns="0" bIns="0"/>
           <a:lstStyle/>
           <a:p>
             <a:pPr algn="l"/>
             <a:r>
-              <a:rPr sz="1800" b="0" i="0">
+              <a:rPr sz="2000" b="0" i="0">
                 <a:solidFill>
                   <a:srgbClr val="202122"/>
                 </a:solidFill>
                 <a:latin typeface="Calibri"/>
               </a:rPr>
-              <a:t>Close the gap and use it in the project.</a:t>
+              <a:t>New physical products controlled by software.</a:t>
+            </a:r>
+          </a:p>
+        </p:txBody>
+      </p:sp>
+      <p:sp>
+        <p:nvSpPr>
+          <p:cNvPr id="26" name="Rounded Rectangle 25"/>
+          <p:cNvSpPr/>
+          <p:nvPr/>
+        </p:nvSpPr>
+        <p:spPr>
+          <a:xfrm>
+            <a:off x="8127796" y="4023360"/>
+            <a:ext cx="3515258" cy="2148840"/>
+          </a:xfrm>
+          <a:prstGeom prst="roundRect">
+            <a:avLst>
+              <a:gd name="adj" fmla="val 6000"/>
+            </a:avLst>
+          </a:prstGeom>
+          <a:solidFill>
+            <a:srgbClr val="EAF3FF"/>
+          </a:solidFill>
+          <a:ln>
+            <a:noFill/>
+          </a:ln>
+          <a:effectLst/>
+        </p:spPr>
+        <p:style>
+          <a:lnRef idx="1">
+            <a:schemeClr val="accent1"/>
+          </a:lnRef>
+          <a:fillRef idx="3">
+            <a:schemeClr val="accent1"/>
+          </a:fillRef>
+          <a:effectRef idx="2">
+            <a:schemeClr val="accent1"/>
+          </a:effectRef>
+          <a:fontRef idx="minor">
+            <a:schemeClr val="lt1"/>
+          </a:fontRef>
+        </p:style>
+        <p:txBody>
+          <a:bodyPr rtlCol="0" anchor="ctr"/>
+          <a:lstStyle/>
+          <a:p/>
+        </p:txBody>
+      </p:sp>
+      <p:sp>
+        <p:nvSpPr>
+          <p:cNvPr id="27" name="Oval 26"/>
+          <p:cNvSpPr/>
+          <p:nvPr/>
+        </p:nvSpPr>
+        <p:spPr>
+          <a:xfrm>
+            <a:off x="8356396" y="4251960"/>
+            <a:ext cx="457200" cy="457200"/>
+          </a:xfrm>
+          <a:prstGeom prst="ellipse">
+            <a:avLst/>
+          </a:prstGeom>
+          <a:solidFill>
+            <a:srgbClr val="33C17A"/>
+          </a:solidFill>
+          <a:ln>
+            <a:noFill/>
+          </a:ln>
+          <a:effectLst/>
+        </p:spPr>
+        <p:style>
+          <a:lnRef idx="1">
+            <a:schemeClr val="accent1"/>
+          </a:lnRef>
+          <a:fillRef idx="3">
+            <a:schemeClr val="accent1"/>
+          </a:fillRef>
+          <a:effectRef idx="2">
+            <a:schemeClr val="accent1"/>
+          </a:effectRef>
+          <a:fontRef idx="minor">
+            <a:schemeClr val="lt1"/>
+          </a:fontRef>
+        </p:style>
+        <p:txBody>
+          <a:bodyPr rtlCol="0" anchor="ctr" lIns="0" rIns="0" tIns="0" bIns="0"/>
+          <a:lstStyle/>
+          <a:p>
+            <a:pPr algn="ctr"/>
+            <a:r>
+              <a:rPr sz="1500" b="1">
+                <a:solidFill>
+                  <a:srgbClr val="202122"/>
+                </a:solidFill>
+                <a:latin typeface="Calibri"/>
+              </a:rPr>
+              <a:t>6</a:t>
+            </a:r>
+          </a:p>
+        </p:txBody>
+      </p:sp>
+      <p:sp>
+        <p:nvSpPr>
+          <p:cNvPr id="28" name="TextBox 27"/>
+          <p:cNvSpPr txBox="1"/>
+          <p:nvPr/>
+        </p:nvSpPr>
+        <p:spPr>
+          <a:xfrm>
+            <a:off x="8950756" y="4224528"/>
+            <a:ext cx="2509418" cy="512064"/>
+          </a:xfrm>
+          <a:prstGeom prst="rect">
+            <a:avLst/>
+          </a:prstGeom>
+          <a:noFill/>
+        </p:spPr>
+        <p:txBody>
+          <a:bodyPr wrap="square" anchor="ctr" lIns="0" rIns="0" tIns="0" bIns="0"/>
+          <a:lstStyle/>
+          <a:p>
+            <a:pPr algn="l"/>
+            <a:r>
+              <a:rPr sz="1900" b="1" i="0">
+                <a:solidFill>
+                  <a:srgbClr val="03306E"/>
+                </a:solidFill>
+                <a:latin typeface="Calibri"/>
+              </a:rPr>
+              <a:t>Networks</a:t>
+            </a:r>
+          </a:p>
+        </p:txBody>
+      </p:sp>
+      <p:sp>
+        <p:nvSpPr>
+          <p:cNvPr id="29" name="TextBox 28"/>
+          <p:cNvSpPr txBox="1"/>
+          <p:nvPr/>
+        </p:nvSpPr>
+        <p:spPr>
+          <a:xfrm>
+            <a:off x="8356396" y="4892040"/>
+            <a:ext cx="3058058" cy="1143000"/>
+          </a:xfrm>
+          <a:prstGeom prst="rect">
+            <a:avLst/>
+          </a:prstGeom>
+          <a:noFill/>
+        </p:spPr>
+        <p:txBody>
+          <a:bodyPr wrap="square" anchor="t" lIns="0" rIns="0" tIns="0" bIns="0"/>
+          <a:lstStyle/>
+          <a:p>
+            <a:pPr algn="l"/>
+            <a:r>
+              <a:rPr sz="2000" b="0" i="0">
+                <a:solidFill>
+                  <a:srgbClr val="202122"/>
+                </a:solidFill>
+                <a:latin typeface="Calibri"/>
+              </a:rPr>
+              <a:t>5G and wider broadband.</a:t>
             </a:r>
           </a:p>
         </p:txBody>
@@ -6600,7 +8048,7 @@
                 </a:solidFill>
                 <a:latin typeface="Cambria"/>
               </a:rPr>
-              <a:t>Check your understanding</a:t>
+              <a:t>Quick check: Emerging technologies</a:t>
             </a:r>
           </a:p>
         </p:txBody>
@@ -6679,8 +8127,8 @@
         </p:nvSpPr>
         <p:spPr>
           <a:xfrm>
-            <a:off x="548640" y="1618488"/>
-            <a:ext cx="411480" cy="411480"/>
+            <a:off x="548640" y="1691640"/>
+            <a:ext cx="502920" cy="502920"/>
           </a:xfrm>
           <a:prstGeom prst="ellipse">
             <a:avLst/>
@@ -6713,7 +8161,7 @@
           <a:p>
             <a:pPr algn="ctr"/>
             <a:r>
-              <a:rPr sz="1400" b="1">
+              <a:rPr sz="1600" b="1">
                 <a:solidFill>
                   <a:srgbClr val="202122"/>
                 </a:solidFill>
@@ -6732,8 +8180,8 @@
         </p:nvSpPr>
         <p:spPr>
           <a:xfrm>
-            <a:off x="1234440" y="1600200"/>
-            <a:ext cx="10408615" cy="1429512"/>
+            <a:off x="1371600" y="1645920"/>
+            <a:ext cx="10271455" cy="1188720"/>
           </a:xfrm>
           <a:prstGeom prst="rect">
             <a:avLst/>
@@ -6746,7 +8194,7 @@
           <a:p>
             <a:pPr algn="l"/>
             <a:r>
-              <a:rPr sz="2200" b="0" i="0">
+              <a:rPr sz="2400" b="0" i="0">
                 <a:solidFill>
                   <a:srgbClr val="202122"/>
                 </a:solidFill>
@@ -6765,8 +8213,8 @@
         </p:nvSpPr>
         <p:spPr>
           <a:xfrm>
-            <a:off x="548640" y="3212592"/>
-            <a:ext cx="411480" cy="411480"/>
+            <a:off x="548640" y="3108960"/>
+            <a:ext cx="502920" cy="502920"/>
           </a:xfrm>
           <a:prstGeom prst="ellipse">
             <a:avLst/>
@@ -6799,7 +8247,7 @@
           <a:p>
             <a:pPr algn="ctr"/>
             <a:r>
-              <a:rPr sz="1400" b="1">
+              <a:rPr sz="1600" b="1">
                 <a:solidFill>
                   <a:srgbClr val="202122"/>
                 </a:solidFill>
@@ -6818,8 +8266,8 @@
         </p:nvSpPr>
         <p:spPr>
           <a:xfrm>
-            <a:off x="1234440" y="3194304"/>
-            <a:ext cx="10408615" cy="1429512"/>
+            <a:off x="1371600" y="3063240"/>
+            <a:ext cx="10271455" cy="1188720"/>
           </a:xfrm>
           <a:prstGeom prst="rect">
             <a:avLst/>
@@ -6832,13 +8280,13 @@
           <a:p>
             <a:pPr algn="l"/>
             <a:r>
-              <a:rPr sz="2200" b="0" i="0">
+              <a:rPr sz="2400" b="0" i="0">
                 <a:solidFill>
                   <a:srgbClr val="202122"/>
                 </a:solidFill>
                 <a:latin typeface="Calibri"/>
               </a:rPr>
-              <a:t>Give two ways to close a skills gap.</a:t>
+              <a:t>What is operational technology?</a:t>
             </a:r>
           </a:p>
         </p:txBody>
@@ -6851,8 +8299,8 @@
         </p:nvSpPr>
         <p:spPr>
           <a:xfrm>
-            <a:off x="548640" y="4806695"/>
-            <a:ext cx="411480" cy="411480"/>
+            <a:off x="548640" y="4526280"/>
+            <a:ext cx="502920" cy="502920"/>
           </a:xfrm>
           <a:prstGeom prst="ellipse">
             <a:avLst/>
@@ -6885,7 +8333,7 @@
           <a:p>
             <a:pPr algn="ctr"/>
             <a:r>
-              <a:rPr sz="1400" b="1">
+              <a:rPr sz="1600" b="1">
                 <a:solidFill>
                   <a:srgbClr val="202122"/>
                 </a:solidFill>
@@ -6904,8 +8352,8 @@
         </p:nvSpPr>
         <p:spPr>
           <a:xfrm>
-            <a:off x="1234440" y="4788408"/>
-            <a:ext cx="10408615" cy="1429512"/>
+            <a:off x="1371600" y="4480560"/>
+            <a:ext cx="10271455" cy="1188720"/>
           </a:xfrm>
           <a:prstGeom prst="rect">
             <a:avLst/>
@@ -6918,13 +8366,46 @@
           <a:p>
             <a:pPr algn="l"/>
             <a:r>
-              <a:rPr sz="2200" b="0" i="0">
+              <a:rPr sz="2400" b="0" i="0">
                 <a:solidFill>
                   <a:srgbClr val="202122"/>
                 </a:solidFill>
                 <a:latin typeface="Calibri"/>
               </a:rPr>
-              <a:t>What is operational technology?</a:t>
+              <a:t>How does 5G affect app design?</a:t>
+            </a:r>
+          </a:p>
+        </p:txBody>
+      </p:sp>
+      <p:sp>
+        <p:nvSpPr>
+          <p:cNvPr id="12" name="TextBox 11"/>
+          <p:cNvSpPr txBox="1"/>
+          <p:nvPr/>
+        </p:nvSpPr>
+        <p:spPr>
+          <a:xfrm>
+            <a:off x="548640" y="5852160"/>
+            <a:ext cx="11094415" cy="365760"/>
+          </a:xfrm>
+          <a:prstGeom prst="rect">
+            <a:avLst/>
+          </a:prstGeom>
+          <a:noFill/>
+        </p:spPr>
+        <p:txBody>
+          <a:bodyPr wrap="square" anchor="t" lIns="0" rIns="0" tIns="0" bIns="0"/>
+          <a:lstStyle/>
+          <a:p>
+            <a:pPr algn="l"/>
+            <a:r>
+              <a:rPr sz="1300" b="0" i="1">
+                <a:solidFill>
+                  <a:srgbClr val="54595D"/>
+                </a:solidFill>
+                <a:latin typeface="Calibri"/>
+              </a:rPr>
+              <a:t>Answer on mini whiteboards or in your book. Answers are in the speaker notes.</a:t>
             </a:r>
           </a:p>
         </p:txBody>
@@ -7016,7 +8497,7 @@
                 </a:solidFill>
                 <a:latin typeface="Cambria"/>
               </a:rPr>
-              <a:t>Answers</a:t>
+              <a:t>Identifying and addressing training needs</a:t>
             </a:r>
           </a:p>
         </p:txBody>
@@ -7089,14 +8570,129 @@
       </p:sp>
       <p:sp>
         <p:nvSpPr>
-          <p:cNvPr id="6" name="Oval 5"/>
+          <p:cNvPr id="6" name="TextBox 5"/>
+          <p:cNvSpPr txBox="1"/>
+          <p:nvPr/>
+        </p:nvSpPr>
+        <p:spPr>
+          <a:xfrm>
+            <a:off x="548640" y="1554480"/>
+            <a:ext cx="6720840" cy="4617720"/>
+          </a:xfrm>
+          <a:prstGeom prst="rect">
+            <a:avLst/>
+          </a:prstGeom>
+          <a:noFill/>
+        </p:spPr>
+        <p:txBody>
+          <a:bodyPr wrap="square" lIns="0" rIns="0" tIns="0" bIns="0">
+            <a:spAutoFit/>
+          </a:bodyPr>
+          <a:lstStyle/>
+          <a:p>
+            <a:pPr>
+              <a:spcAft>
+                <a:spcPts val="1320"/>
+              </a:spcAft>
+            </a:pPr>
+            <a:r>
+              <a:rPr sz="2200" b="0">
+                <a:solidFill>
+                  <a:srgbClr val="202122"/>
+                </a:solidFill>
+                <a:latin typeface="Calibri"/>
+              </a:rPr>
+              <a:t>No developer knows everything, so a key skill is spotting what you don't know.</a:t>
+            </a:r>
+          </a:p>
+          <a:p>
+            <a:pPr>
+              <a:spcAft>
+                <a:spcPts val="1320"/>
+              </a:spcAft>
+            </a:pPr>
+            <a:r>
+              <a:rPr sz="2200" b="0">
+                <a:solidFill>
+                  <a:srgbClr val="202122"/>
+                </a:solidFill>
+                <a:latin typeface="Calibri"/>
+              </a:rPr>
+              <a:t>First identify what knowledge and skills a project needs. Then judge honestly whether you can currently do the work. If there's a gap, close it through coaching from a professional or peer, learning on the job, self-study, professional online forums, or online workshops.</a:t>
+            </a:r>
+          </a:p>
+          <a:p>
+            <a:pPr>
+              <a:spcAft>
+                <a:spcPts val="1320"/>
+              </a:spcAft>
+            </a:pPr>
+            <a:r>
+              <a:rPr sz="2200" b="0">
+                <a:solidFill>
+                  <a:srgbClr val="202122"/>
+                </a:solidFill>
+                <a:latin typeface="Calibri"/>
+              </a:rPr>
+              <a:t>Keeping your skills current is essential because languages, frameworks and tools change constantly.</a:t>
+            </a:r>
+          </a:p>
+        </p:txBody>
+      </p:sp>
+      <p:sp>
+        <p:nvSpPr>
+          <p:cNvPr id="7" name="Rounded Rectangle 6"/>
           <p:cNvSpPr/>
           <p:nvPr/>
         </p:nvSpPr>
         <p:spPr>
           <a:xfrm>
-            <a:off x="548640" y="1618488"/>
-            <a:ext cx="411480" cy="411480"/>
+            <a:off x="7772400" y="1554480"/>
+            <a:ext cx="3867912" cy="4526280"/>
+          </a:xfrm>
+          <a:prstGeom prst="roundRect">
+            <a:avLst>
+              <a:gd name="adj" fmla="val 8000"/>
+            </a:avLst>
+          </a:prstGeom>
+          <a:solidFill>
+            <a:srgbClr val="03306E"/>
+          </a:solidFill>
+          <a:ln>
+            <a:noFill/>
+          </a:ln>
+          <a:effectLst/>
+        </p:spPr>
+        <p:style>
+          <a:lnRef idx="1">
+            <a:schemeClr val="accent1"/>
+          </a:lnRef>
+          <a:fillRef idx="3">
+            <a:schemeClr val="accent1"/>
+          </a:fillRef>
+          <a:effectRef idx="2">
+            <a:schemeClr val="accent1"/>
+          </a:effectRef>
+          <a:fontRef idx="minor">
+            <a:schemeClr val="lt1"/>
+          </a:fontRef>
+        </p:style>
+        <p:txBody>
+          <a:bodyPr rtlCol="0" anchor="ctr"/>
+          <a:lstStyle/>
+          <a:p/>
+        </p:txBody>
+      </p:sp>
+      <p:sp>
+        <p:nvSpPr>
+          <p:cNvPr id="8" name="Oval 7"/>
+          <p:cNvSpPr/>
+          <p:nvPr/>
+        </p:nvSpPr>
+        <p:spPr>
+          <a:xfrm>
+            <a:off x="8046720" y="1828800"/>
+            <a:ext cx="548640" cy="548640"/>
           </a:xfrm>
           <a:prstGeom prst="ellipse">
             <a:avLst/>
@@ -7129,110 +8725,13 @@
           <a:p>
             <a:pPr algn="ctr"/>
             <a:r>
-              <a:rPr sz="1400" b="1">
+              <a:rPr sz="1300" b="1">
                 <a:solidFill>
                   <a:srgbClr val="202122"/>
                 </a:solidFill>
                 <a:latin typeface="Calibri"/>
               </a:rPr>
-              <a:t>1</a:t>
-            </a:r>
-          </a:p>
-        </p:txBody>
-      </p:sp>
-      <p:sp>
-        <p:nvSpPr>
-          <p:cNvPr id="7" name="TextBox 6"/>
-          <p:cNvSpPr txBox="1"/>
-          <p:nvPr/>
-        </p:nvSpPr>
-        <p:spPr>
-          <a:xfrm>
-            <a:off x="1234440" y="1600200"/>
-            <a:ext cx="10408615" cy="1429512"/>
-          </a:xfrm>
-          <a:prstGeom prst="rect">
-            <a:avLst/>
-          </a:prstGeom>
-          <a:noFill/>
-        </p:spPr>
-        <p:txBody>
-          <a:bodyPr wrap="square" anchor="t" lIns="0" rIns="0" tIns="0" bIns="0"/>
-          <a:lstStyle/>
-          <a:p>
-            <a:pPr algn="l"/>
-            <a:r>
-              <a:rPr sz="1800" b="0" i="0">
-                <a:solidFill>
-                  <a:srgbClr val="54595D"/>
-                </a:solidFill>
-                <a:latin typeface="Calibri"/>
-              </a:rPr>
-              <a:t>What is computer vision?</a:t>
-            </a:r>
-          </a:p>
-          <a:p>
-            <a:r>
-              <a:rPr sz="1800" b="1">
-                <a:solidFill>
-                  <a:srgbClr val="03306E"/>
-                </a:solidFill>
-                <a:latin typeface="Calibri"/>
-              </a:rPr>
-              <a:t>AI that interprets images or video.</a:t>
-            </a:r>
-          </a:p>
-        </p:txBody>
-      </p:sp>
-      <p:sp>
-        <p:nvSpPr>
-          <p:cNvPr id="8" name="Oval 7"/>
-          <p:cNvSpPr/>
-          <p:nvPr/>
-        </p:nvSpPr>
-        <p:spPr>
-          <a:xfrm>
-            <a:off x="548640" y="3212592"/>
-            <a:ext cx="411480" cy="411480"/>
-          </a:xfrm>
-          <a:prstGeom prst="ellipse">
-            <a:avLst/>
-          </a:prstGeom>
-          <a:solidFill>
-            <a:srgbClr val="33C17A"/>
-          </a:solidFill>
-          <a:ln>
-            <a:noFill/>
-          </a:ln>
-          <a:effectLst/>
-        </p:spPr>
-        <p:style>
-          <a:lnRef idx="1">
-            <a:schemeClr val="accent1"/>
-          </a:lnRef>
-          <a:fillRef idx="3">
-            <a:schemeClr val="accent1"/>
-          </a:fillRef>
-          <a:effectRef idx="2">
-            <a:schemeClr val="accent1"/>
-          </a:effectRef>
-          <a:fontRef idx="minor">
-            <a:schemeClr val="lt1"/>
-          </a:fontRef>
-        </p:style>
-        <p:txBody>
-          <a:bodyPr rtlCol="0" anchor="ctr" lIns="0" rIns="0" tIns="0" bIns="0"/>
-          <a:lstStyle/>
-          <a:p>
-            <a:pPr algn="ctr"/>
-            <a:r>
-              <a:rPr sz="1400" b="1">
-                <a:solidFill>
-                  <a:srgbClr val="202122"/>
-                </a:solidFill>
-                <a:latin typeface="Calibri"/>
-              </a:rPr>
-              <a:t>2</a:t>
+              <a:t>e.g.</a:t>
             </a:r>
           </a:p>
         </p:txBody>
@@ -7245,8 +8744,8 @@
         </p:nvSpPr>
         <p:spPr>
           <a:xfrm>
-            <a:off x="1234440" y="3194304"/>
-            <a:ext cx="10408615" cy="1429512"/>
+            <a:off x="8046720" y="2560320"/>
+            <a:ext cx="3291840" cy="365760"/>
           </a:xfrm>
           <a:prstGeom prst="rect">
             <a:avLst/>
@@ -7259,91 +8758,27 @@
           <a:p>
             <a:pPr algn="l"/>
             <a:r>
-              <a:rPr sz="1800" b="0" i="0">
-                <a:solidFill>
-                  <a:srgbClr val="54595D"/>
-                </a:solidFill>
-                <a:latin typeface="Calibri"/>
-              </a:rPr>
-              <a:t>Give two ways to close a skills gap.</a:t>
-            </a:r>
-          </a:p>
-          <a:p>
-            <a:r>
-              <a:rPr sz="1800" b="1">
-                <a:solidFill>
-                  <a:srgbClr val="03306E"/>
-                </a:solidFill>
-                <a:latin typeface="Calibri"/>
-              </a:rPr>
-              <a:t>Any two of: coaching, on-the-job learning, self-study, online forums, online workshops.</a:t>
-            </a:r>
-          </a:p>
-        </p:txBody>
-      </p:sp>
-      <p:sp>
-        <p:nvSpPr>
-          <p:cNvPr id="10" name="Oval 9"/>
-          <p:cNvSpPr/>
-          <p:nvPr/>
-        </p:nvSpPr>
-        <p:spPr>
-          <a:xfrm>
-            <a:off x="548640" y="4806695"/>
-            <a:ext cx="411480" cy="411480"/>
-          </a:xfrm>
-          <a:prstGeom prst="ellipse">
-            <a:avLst/>
-          </a:prstGeom>
-          <a:solidFill>
-            <a:srgbClr val="33C17A"/>
-          </a:solidFill>
-          <a:ln>
-            <a:noFill/>
-          </a:ln>
-          <a:effectLst/>
-        </p:spPr>
-        <p:style>
-          <a:lnRef idx="1">
-            <a:schemeClr val="accent1"/>
-          </a:lnRef>
-          <a:fillRef idx="3">
-            <a:schemeClr val="accent1"/>
-          </a:fillRef>
-          <a:effectRef idx="2">
-            <a:schemeClr val="accent1"/>
-          </a:effectRef>
-          <a:fontRef idx="minor">
-            <a:schemeClr val="lt1"/>
-          </a:fontRef>
-        </p:style>
-        <p:txBody>
-          <a:bodyPr rtlCol="0" anchor="ctr" lIns="0" rIns="0" tIns="0" bIns="0"/>
-          <a:lstStyle/>
-          <a:p>
-            <a:pPr algn="ctr"/>
-            <a:r>
-              <a:rPr sz="1400" b="1">
-                <a:solidFill>
-                  <a:srgbClr val="202122"/>
-                </a:solidFill>
-                <a:latin typeface="Calibri"/>
-              </a:rPr>
-              <a:t>3</a:t>
-            </a:r>
-          </a:p>
-        </p:txBody>
-      </p:sp>
-      <p:sp>
-        <p:nvSpPr>
-          <p:cNvPr id="11" name="TextBox 10"/>
+              <a:rPr sz="1300" b="1" i="0">
+                <a:solidFill>
+                  <a:srgbClr val="A9C8F0"/>
+                </a:solidFill>
+                <a:latin typeface="Calibri"/>
+              </a:rPr>
+              <a:t>EXAMPLE</a:t>
+            </a:r>
+          </a:p>
+        </p:txBody>
+      </p:sp>
+      <p:sp>
+        <p:nvSpPr>
+          <p:cNvPr id="10" name="TextBox 9"/>
           <p:cNvSpPr txBox="1"/>
           <p:nvPr/>
         </p:nvSpPr>
         <p:spPr>
           <a:xfrm>
-            <a:off x="1234440" y="4788408"/>
-            <a:ext cx="10408615" cy="1429512"/>
+            <a:off x="8046720" y="2971800"/>
+            <a:ext cx="3291840" cy="2971800"/>
           </a:xfrm>
           <a:prstGeom prst="rect">
             <a:avLst/>
@@ -7356,24 +8791,13 @@
           <a:p>
             <a:pPr algn="l"/>
             <a:r>
-              <a:rPr sz="1800" b="0" i="0">
-                <a:solidFill>
-                  <a:srgbClr val="54595D"/>
-                </a:solidFill>
-                <a:latin typeface="Calibri"/>
-              </a:rPr>
-              <a:t>What is operational technology?</a:t>
-            </a:r>
-          </a:p>
-          <a:p>
-            <a:r>
-              <a:rPr sz="1800" b="1">
-                <a:solidFill>
-                  <a:srgbClr val="03306E"/>
-                </a:solidFill>
-                <a:latin typeface="Calibri"/>
-              </a:rPr>
-              <a:t>Hardware and software that monitors and controls physical equipment.</a:t>
+              <a:rPr sz="1900" b="0" i="0">
+                <a:solidFill>
+                  <a:srgbClr val="FFFFFF"/>
+                </a:solidFill>
+                <a:latin typeface="Cambria"/>
+              </a:rPr>
+              <a:t>A developer asked to add payments to an app has never used a payment API. They work through the provider's tutorial, ask a colleague to review their code, then build it.</a:t>
             </a:r>
           </a:p>
         </p:txBody>
@@ -7465,7 +8889,7 @@
                 </a:solidFill>
                 <a:latin typeface="Cambria"/>
               </a:rPr>
-              <a:t>Activity: Skills audit</a:t>
+              <a:t>Identifying and addressing training needs</a:t>
             </a:r>
           </a:p>
         </p:txBody>
@@ -7538,19 +8962,59 @@
       </p:sp>
       <p:sp>
         <p:nvSpPr>
-          <p:cNvPr id="6" name="Rounded Rectangle 5"/>
+          <p:cNvPr id="6" name="Rectangle 5"/>
           <p:cNvSpPr/>
           <p:nvPr/>
         </p:nvSpPr>
         <p:spPr>
           <a:xfrm>
-            <a:off x="548640" y="1508760"/>
-            <a:ext cx="2011680" cy="457200"/>
-          </a:xfrm>
-          <a:prstGeom prst="roundRect">
-            <a:avLst>
-              <a:gd name="adj" fmla="val 50000"/>
-            </a:avLst>
+            <a:off x="1884006" y="2656332"/>
+            <a:ext cx="8423681" cy="36576"/>
+          </a:xfrm>
+          <a:prstGeom prst="rect">
+            <a:avLst/>
+          </a:prstGeom>
+          <a:solidFill>
+            <a:srgbClr val="A9C8F0"/>
+          </a:solidFill>
+          <a:ln>
+            <a:noFill/>
+          </a:ln>
+          <a:effectLst/>
+        </p:spPr>
+        <p:style>
+          <a:lnRef idx="1">
+            <a:schemeClr val="accent1"/>
+          </a:lnRef>
+          <a:fillRef idx="3">
+            <a:schemeClr val="accent1"/>
+          </a:fillRef>
+          <a:effectRef idx="2">
+            <a:schemeClr val="accent1"/>
+          </a:effectRef>
+          <a:fontRef idx="minor">
+            <a:schemeClr val="lt1"/>
+          </a:fontRef>
+        </p:style>
+        <p:txBody>
+          <a:bodyPr rtlCol="0" anchor="ctr"/>
+          <a:lstStyle/>
+          <a:p/>
+        </p:txBody>
+      </p:sp>
+      <p:sp>
+        <p:nvSpPr>
+          <p:cNvPr id="7" name="Oval 6"/>
+          <p:cNvSpPr/>
+          <p:nvPr/>
+        </p:nvSpPr>
+        <p:spPr>
+          <a:xfrm>
+            <a:off x="1563966" y="2354580"/>
+            <a:ext cx="640080" cy="640080"/>
+          </a:xfrm>
+          <a:prstGeom prst="ellipse">
+            <a:avLst/>
           </a:prstGeom>
           <a:solidFill>
             <a:srgbClr val="33C17A"/>
@@ -7575,40 +9039,18 @@
           </a:fontRef>
         </p:style>
         <p:txBody>
-          <a:bodyPr rtlCol="0" anchor="ctr"/>
-          <a:lstStyle/>
-          <a:p/>
-        </p:txBody>
-      </p:sp>
-      <p:sp>
-        <p:nvSpPr>
-          <p:cNvPr id="7" name="TextBox 6"/>
-          <p:cNvSpPr txBox="1"/>
-          <p:nvPr/>
-        </p:nvSpPr>
-        <p:spPr>
-          <a:xfrm>
-            <a:off x="548640" y="1508760"/>
-            <a:ext cx="2011680" cy="457200"/>
-          </a:xfrm>
-          <a:prstGeom prst="rect">
-            <a:avLst/>
-          </a:prstGeom>
-          <a:noFill/>
-        </p:spPr>
-        <p:txBody>
-          <a:bodyPr wrap="square" anchor="ctr" lIns="0" rIns="0" tIns="0" bIns="0"/>
+          <a:bodyPr rtlCol="0" anchor="ctr" lIns="0" rIns="0" tIns="0" bIns="0"/>
           <a:lstStyle/>
           <a:p>
             <a:pPr algn="ctr"/>
             <a:r>
-              <a:rPr sz="1400" b="1" i="0">
+              <a:rPr sz="2000" b="1">
                 <a:solidFill>
                   <a:srgbClr val="202122"/>
                 </a:solidFill>
                 <a:latin typeface="Calibri"/>
               </a:rPr>
-              <a:t>20 minutes</a:t>
+              <a:t>1</a:t>
             </a:r>
           </a:p>
         </p:txBody>
@@ -7621,8 +9063,8 @@
         </p:nvSpPr>
         <p:spPr>
           <a:xfrm>
-            <a:off x="2743200" y="1508760"/>
-            <a:ext cx="4754880" cy="457200"/>
+            <a:off x="548640" y="3131820"/>
+            <a:ext cx="2670733" cy="731520"/>
           </a:xfrm>
           <a:prstGeom prst="rect">
             <a:avLst/>
@@ -7630,380 +9072,36 @@
           <a:noFill/>
         </p:spPr>
         <p:txBody>
-          <a:bodyPr wrap="square" anchor="ctr" lIns="0" rIns="0" tIns="0" bIns="0"/>
-          <a:lstStyle/>
-          <a:p>
-            <a:pPr algn="l"/>
-            <a:r>
-              <a:rPr sz="1400" b="0" i="1">
-                <a:solidFill>
-                  <a:srgbClr val="54595D"/>
-                </a:solidFill>
-                <a:latin typeface="Calibri"/>
-              </a:rPr>
-              <a:t>Individual</a:t>
-            </a:r>
-          </a:p>
-        </p:txBody>
-      </p:sp>
-      <p:sp>
-        <p:nvSpPr>
-          <p:cNvPr id="9" name="Oval 8"/>
+          <a:bodyPr wrap="square" anchor="t" lIns="0" rIns="0" tIns="0" bIns="0"/>
+          <a:lstStyle/>
+          <a:p>
+            <a:pPr algn="ctr"/>
+            <a:r>
+              <a:rPr sz="1700" b="1" i="0">
+                <a:solidFill>
+                  <a:srgbClr val="03306E"/>
+                </a:solidFill>
+                <a:latin typeface="Calibri"/>
+              </a:rPr>
+              <a:t>Identify</a:t>
+            </a:r>
+          </a:p>
+        </p:txBody>
+      </p:sp>
+      <p:sp>
+        <p:nvSpPr>
+          <p:cNvPr id="9" name="Rounded Rectangle 8"/>
           <p:cNvSpPr/>
           <p:nvPr/>
         </p:nvSpPr>
         <p:spPr>
           <a:xfrm>
-            <a:off x="548640" y="2482596"/>
-            <a:ext cx="384048" cy="384048"/>
-          </a:xfrm>
-          <a:prstGeom prst="ellipse">
-            <a:avLst/>
-          </a:prstGeom>
-          <a:solidFill>
-            <a:srgbClr val="0645AD"/>
-          </a:solidFill>
-          <a:ln>
-            <a:noFill/>
-          </a:ln>
-          <a:effectLst/>
-        </p:spPr>
-        <p:style>
-          <a:lnRef idx="1">
-            <a:schemeClr val="accent1"/>
-          </a:lnRef>
-          <a:fillRef idx="3">
-            <a:schemeClr val="accent1"/>
-          </a:fillRef>
-          <a:effectRef idx="2">
-            <a:schemeClr val="accent1"/>
-          </a:effectRef>
-          <a:fontRef idx="minor">
-            <a:schemeClr val="lt1"/>
-          </a:fontRef>
-        </p:style>
-        <p:txBody>
-          <a:bodyPr rtlCol="0" anchor="ctr" lIns="0" rIns="0" tIns="0" bIns="0"/>
-          <a:lstStyle/>
-          <a:p>
-            <a:pPr algn="ctr"/>
-            <a:r>
-              <a:rPr sz="1300" b="1">
-                <a:solidFill>
-                  <a:srgbClr val="FFFFFF"/>
-                </a:solidFill>
-                <a:latin typeface="Calibri"/>
-              </a:rPr>
-              <a:t>1</a:t>
-            </a:r>
-          </a:p>
-        </p:txBody>
-      </p:sp>
-      <p:sp>
-        <p:nvSpPr>
-          <p:cNvPr id="10" name="TextBox 9"/>
-          <p:cNvSpPr txBox="1"/>
-          <p:nvPr/>
-        </p:nvSpPr>
-        <p:spPr>
-          <a:xfrm>
-            <a:off x="1143000" y="2240280"/>
-            <a:ext cx="5943600" cy="868680"/>
-          </a:xfrm>
-          <a:prstGeom prst="rect">
-            <a:avLst/>
-          </a:prstGeom>
-          <a:noFill/>
-        </p:spPr>
-        <p:txBody>
-          <a:bodyPr wrap="square" anchor="ctr" lIns="0" rIns="0" tIns="0" bIns="0"/>
-          <a:lstStyle/>
-          <a:p>
-            <a:pPr algn="l"/>
-            <a:r>
-              <a:rPr sz="1700" b="0" i="0">
-                <a:solidFill>
-                  <a:srgbClr val="202122"/>
-                </a:solidFill>
-                <a:latin typeface="Calibri"/>
-              </a:rPr>
-              <a:t>Pick a project: an IoT plant-watering app.</a:t>
-            </a:r>
-          </a:p>
-        </p:txBody>
-      </p:sp>
-      <p:sp>
-        <p:nvSpPr>
-          <p:cNvPr id="11" name="Oval 10"/>
-          <p:cNvSpPr/>
-          <p:nvPr/>
-        </p:nvSpPr>
-        <p:spPr>
-          <a:xfrm>
-            <a:off x="548640" y="3461004"/>
-            <a:ext cx="384048" cy="384048"/>
-          </a:xfrm>
-          <a:prstGeom prst="ellipse">
-            <a:avLst/>
-          </a:prstGeom>
-          <a:solidFill>
-            <a:srgbClr val="0645AD"/>
-          </a:solidFill>
-          <a:ln>
-            <a:noFill/>
-          </a:ln>
-          <a:effectLst/>
-        </p:spPr>
-        <p:style>
-          <a:lnRef idx="1">
-            <a:schemeClr val="accent1"/>
-          </a:lnRef>
-          <a:fillRef idx="3">
-            <a:schemeClr val="accent1"/>
-          </a:fillRef>
-          <a:effectRef idx="2">
-            <a:schemeClr val="accent1"/>
-          </a:effectRef>
-          <a:fontRef idx="minor">
-            <a:schemeClr val="lt1"/>
-          </a:fontRef>
-        </p:style>
-        <p:txBody>
-          <a:bodyPr rtlCol="0" anchor="ctr" lIns="0" rIns="0" tIns="0" bIns="0"/>
-          <a:lstStyle/>
-          <a:p>
-            <a:pPr algn="ctr"/>
-            <a:r>
-              <a:rPr sz="1300" b="1">
-                <a:solidFill>
-                  <a:srgbClr val="FFFFFF"/>
-                </a:solidFill>
-                <a:latin typeface="Calibri"/>
-              </a:rPr>
-              <a:t>2</a:t>
-            </a:r>
-          </a:p>
-        </p:txBody>
-      </p:sp>
-      <p:sp>
-        <p:nvSpPr>
-          <p:cNvPr id="12" name="TextBox 11"/>
-          <p:cNvSpPr txBox="1"/>
-          <p:nvPr/>
-        </p:nvSpPr>
-        <p:spPr>
-          <a:xfrm>
-            <a:off x="1143000" y="3218688"/>
-            <a:ext cx="5943600" cy="868680"/>
-          </a:xfrm>
-          <a:prstGeom prst="rect">
-            <a:avLst/>
-          </a:prstGeom>
-          <a:noFill/>
-        </p:spPr>
-        <p:txBody>
-          <a:bodyPr wrap="square" anchor="ctr" lIns="0" rIns="0" tIns="0" bIns="0"/>
-          <a:lstStyle/>
-          <a:p>
-            <a:pPr algn="l"/>
-            <a:r>
-              <a:rPr sz="1700" b="0" i="0">
-                <a:solidFill>
-                  <a:srgbClr val="202122"/>
-                </a:solidFill>
-                <a:latin typeface="Calibri"/>
-              </a:rPr>
-              <a:t>List the skills it needs.</a:t>
-            </a:r>
-          </a:p>
-        </p:txBody>
-      </p:sp>
-      <p:sp>
-        <p:nvSpPr>
-          <p:cNvPr id="13" name="Oval 12"/>
-          <p:cNvSpPr/>
-          <p:nvPr/>
-        </p:nvSpPr>
-        <p:spPr>
-          <a:xfrm>
-            <a:off x="548640" y="4439412"/>
-            <a:ext cx="384048" cy="384048"/>
-          </a:xfrm>
-          <a:prstGeom prst="ellipse">
-            <a:avLst/>
-          </a:prstGeom>
-          <a:solidFill>
-            <a:srgbClr val="0645AD"/>
-          </a:solidFill>
-          <a:ln>
-            <a:noFill/>
-          </a:ln>
-          <a:effectLst/>
-        </p:spPr>
-        <p:style>
-          <a:lnRef idx="1">
-            <a:schemeClr val="accent1"/>
-          </a:lnRef>
-          <a:fillRef idx="3">
-            <a:schemeClr val="accent1"/>
-          </a:fillRef>
-          <a:effectRef idx="2">
-            <a:schemeClr val="accent1"/>
-          </a:effectRef>
-          <a:fontRef idx="minor">
-            <a:schemeClr val="lt1"/>
-          </a:fontRef>
-        </p:style>
-        <p:txBody>
-          <a:bodyPr rtlCol="0" anchor="ctr" lIns="0" rIns="0" tIns="0" bIns="0"/>
-          <a:lstStyle/>
-          <a:p>
-            <a:pPr algn="ctr"/>
-            <a:r>
-              <a:rPr sz="1300" b="1">
-                <a:solidFill>
-                  <a:srgbClr val="FFFFFF"/>
-                </a:solidFill>
-                <a:latin typeface="Calibri"/>
-              </a:rPr>
-              <a:t>3</a:t>
-            </a:r>
-          </a:p>
-        </p:txBody>
-      </p:sp>
-      <p:sp>
-        <p:nvSpPr>
-          <p:cNvPr id="14" name="TextBox 13"/>
-          <p:cNvSpPr txBox="1"/>
-          <p:nvPr/>
-        </p:nvSpPr>
-        <p:spPr>
-          <a:xfrm>
-            <a:off x="1143000" y="4197096"/>
-            <a:ext cx="5943600" cy="868680"/>
-          </a:xfrm>
-          <a:prstGeom prst="rect">
-            <a:avLst/>
-          </a:prstGeom>
-          <a:noFill/>
-        </p:spPr>
-        <p:txBody>
-          <a:bodyPr wrap="square" anchor="ctr" lIns="0" rIns="0" tIns="0" bIns="0"/>
-          <a:lstStyle/>
-          <a:p>
-            <a:pPr algn="l"/>
-            <a:r>
-              <a:rPr sz="1700" b="0" i="0">
-                <a:solidFill>
-                  <a:srgbClr val="202122"/>
-                </a:solidFill>
-                <a:latin typeface="Calibri"/>
-              </a:rPr>
-              <a:t>Rate yourself on each from 1 to 5.</a:t>
-            </a:r>
-          </a:p>
-        </p:txBody>
-      </p:sp>
-      <p:sp>
-        <p:nvSpPr>
-          <p:cNvPr id="15" name="Oval 14"/>
-          <p:cNvSpPr/>
-          <p:nvPr/>
-        </p:nvSpPr>
-        <p:spPr>
-          <a:xfrm>
-            <a:off x="548640" y="5417820"/>
-            <a:ext cx="384048" cy="384048"/>
-          </a:xfrm>
-          <a:prstGeom prst="ellipse">
-            <a:avLst/>
-          </a:prstGeom>
-          <a:solidFill>
-            <a:srgbClr val="0645AD"/>
-          </a:solidFill>
-          <a:ln>
-            <a:noFill/>
-          </a:ln>
-          <a:effectLst/>
-        </p:spPr>
-        <p:style>
-          <a:lnRef idx="1">
-            <a:schemeClr val="accent1"/>
-          </a:lnRef>
-          <a:fillRef idx="3">
-            <a:schemeClr val="accent1"/>
-          </a:fillRef>
-          <a:effectRef idx="2">
-            <a:schemeClr val="accent1"/>
-          </a:effectRef>
-          <a:fontRef idx="minor">
-            <a:schemeClr val="lt1"/>
-          </a:fontRef>
-        </p:style>
-        <p:txBody>
-          <a:bodyPr rtlCol="0" anchor="ctr" lIns="0" rIns="0" tIns="0" bIns="0"/>
-          <a:lstStyle/>
-          <a:p>
-            <a:pPr algn="ctr"/>
-            <a:r>
-              <a:rPr sz="1300" b="1">
-                <a:solidFill>
-                  <a:srgbClr val="FFFFFF"/>
-                </a:solidFill>
-                <a:latin typeface="Calibri"/>
-              </a:rPr>
-              <a:t>4</a:t>
-            </a:r>
-          </a:p>
-        </p:txBody>
-      </p:sp>
-      <p:sp>
-        <p:nvSpPr>
-          <p:cNvPr id="16" name="TextBox 15"/>
-          <p:cNvSpPr txBox="1"/>
-          <p:nvPr/>
-        </p:nvSpPr>
-        <p:spPr>
-          <a:xfrm>
-            <a:off x="1143000" y="5175504"/>
-            <a:ext cx="5943600" cy="868680"/>
-          </a:xfrm>
-          <a:prstGeom prst="rect">
-            <a:avLst/>
-          </a:prstGeom>
-          <a:noFill/>
-        </p:spPr>
-        <p:txBody>
-          <a:bodyPr wrap="square" anchor="ctr" lIns="0" rIns="0" tIns="0" bIns="0"/>
-          <a:lstStyle/>
-          <a:p>
-            <a:pPr algn="l"/>
-            <a:r>
-              <a:rPr sz="1700" b="0" i="0">
-                <a:solidFill>
-                  <a:srgbClr val="202122"/>
-                </a:solidFill>
-                <a:latin typeface="Calibri"/>
-              </a:rPr>
-              <a:t>Write a learning plan for your two weakest skills.</a:t>
-            </a:r>
-          </a:p>
-        </p:txBody>
-      </p:sp>
-      <p:sp>
-        <p:nvSpPr>
-          <p:cNvPr id="17" name="Rounded Rectangle 16"/>
-          <p:cNvSpPr/>
-          <p:nvPr/>
-        </p:nvSpPr>
-        <p:spPr>
-          <a:xfrm>
-            <a:off x="7772400" y="1508760"/>
-            <a:ext cx="3867912" cy="4572000"/>
+            <a:off x="548640" y="3909060"/>
+            <a:ext cx="2670733" cy="1508760"/>
           </a:xfrm>
           <a:prstGeom prst="roundRect">
             <a:avLst>
-              <a:gd name="adj" fmla="val 8000"/>
+              <a:gd name="adj" fmla="val 6000"/>
             </a:avLst>
           </a:prstGeom>
           <a:solidFill>
@@ -8036,14 +9134,340 @@
       </p:sp>
       <p:sp>
         <p:nvSpPr>
+          <p:cNvPr id="10" name="TextBox 9"/>
+          <p:cNvSpPr txBox="1"/>
+          <p:nvPr/>
+        </p:nvSpPr>
+        <p:spPr>
+          <a:xfrm>
+            <a:off x="685800" y="4046220"/>
+            <a:ext cx="2396413" cy="1234439"/>
+          </a:xfrm>
+          <a:prstGeom prst="rect">
+            <a:avLst/>
+          </a:prstGeom>
+          <a:noFill/>
+        </p:spPr>
+        <p:txBody>
+          <a:bodyPr wrap="square" anchor="t" lIns="0" rIns="0" tIns="0" bIns="0"/>
+          <a:lstStyle/>
+          <a:p>
+            <a:pPr algn="l"/>
+            <a:r>
+              <a:rPr sz="1800" b="0" i="0">
+                <a:solidFill>
+                  <a:srgbClr val="202122"/>
+                </a:solidFill>
+                <a:latin typeface="Calibri"/>
+              </a:rPr>
+              <a:t>What knowledge and skills does the project need?</a:t>
+            </a:r>
+          </a:p>
+        </p:txBody>
+      </p:sp>
+      <p:sp>
+        <p:nvSpPr>
+          <p:cNvPr id="11" name="Oval 10"/>
+          <p:cNvSpPr/>
+          <p:nvPr/>
+        </p:nvSpPr>
+        <p:spPr>
+          <a:xfrm>
+            <a:off x="4371860" y="2354580"/>
+            <a:ext cx="640080" cy="640080"/>
+          </a:xfrm>
+          <a:prstGeom prst="ellipse">
+            <a:avLst/>
+          </a:prstGeom>
+          <a:solidFill>
+            <a:srgbClr val="33C17A"/>
+          </a:solidFill>
+          <a:ln>
+            <a:noFill/>
+          </a:ln>
+          <a:effectLst/>
+        </p:spPr>
+        <p:style>
+          <a:lnRef idx="1">
+            <a:schemeClr val="accent1"/>
+          </a:lnRef>
+          <a:fillRef idx="3">
+            <a:schemeClr val="accent1"/>
+          </a:fillRef>
+          <a:effectRef idx="2">
+            <a:schemeClr val="accent1"/>
+          </a:effectRef>
+          <a:fontRef idx="minor">
+            <a:schemeClr val="lt1"/>
+          </a:fontRef>
+        </p:style>
+        <p:txBody>
+          <a:bodyPr rtlCol="0" anchor="ctr" lIns="0" rIns="0" tIns="0" bIns="0"/>
+          <a:lstStyle/>
+          <a:p>
+            <a:pPr algn="ctr"/>
+            <a:r>
+              <a:rPr sz="2000" b="1">
+                <a:solidFill>
+                  <a:srgbClr val="202122"/>
+                </a:solidFill>
+                <a:latin typeface="Calibri"/>
+              </a:rPr>
+              <a:t>2</a:t>
+            </a:r>
+          </a:p>
+        </p:txBody>
+      </p:sp>
+      <p:sp>
+        <p:nvSpPr>
+          <p:cNvPr id="12" name="TextBox 11"/>
+          <p:cNvSpPr txBox="1"/>
+          <p:nvPr/>
+        </p:nvSpPr>
+        <p:spPr>
+          <a:xfrm>
+            <a:off x="3356533" y="3131820"/>
+            <a:ext cx="2670733" cy="731520"/>
+          </a:xfrm>
+          <a:prstGeom prst="rect">
+            <a:avLst/>
+          </a:prstGeom>
+          <a:noFill/>
+        </p:spPr>
+        <p:txBody>
+          <a:bodyPr wrap="square" anchor="t" lIns="0" rIns="0" tIns="0" bIns="0"/>
+          <a:lstStyle/>
+          <a:p>
+            <a:pPr algn="ctr"/>
+            <a:r>
+              <a:rPr sz="1700" b="1" i="0">
+                <a:solidFill>
+                  <a:srgbClr val="03306E"/>
+                </a:solidFill>
+                <a:latin typeface="Calibri"/>
+              </a:rPr>
+              <a:t>Assess</a:t>
+            </a:r>
+          </a:p>
+        </p:txBody>
+      </p:sp>
+      <p:sp>
+        <p:nvSpPr>
+          <p:cNvPr id="13" name="Rounded Rectangle 12"/>
+          <p:cNvSpPr/>
+          <p:nvPr/>
+        </p:nvSpPr>
+        <p:spPr>
+          <a:xfrm>
+            <a:off x="3356533" y="3909060"/>
+            <a:ext cx="2670733" cy="1508760"/>
+          </a:xfrm>
+          <a:prstGeom prst="roundRect">
+            <a:avLst>
+              <a:gd name="adj" fmla="val 6000"/>
+            </a:avLst>
+          </a:prstGeom>
+          <a:solidFill>
+            <a:srgbClr val="EAF3FF"/>
+          </a:solidFill>
+          <a:ln>
+            <a:noFill/>
+          </a:ln>
+          <a:effectLst/>
+        </p:spPr>
+        <p:style>
+          <a:lnRef idx="1">
+            <a:schemeClr val="accent1"/>
+          </a:lnRef>
+          <a:fillRef idx="3">
+            <a:schemeClr val="accent1"/>
+          </a:fillRef>
+          <a:effectRef idx="2">
+            <a:schemeClr val="accent1"/>
+          </a:effectRef>
+          <a:fontRef idx="minor">
+            <a:schemeClr val="lt1"/>
+          </a:fontRef>
+        </p:style>
+        <p:txBody>
+          <a:bodyPr rtlCol="0" anchor="ctr"/>
+          <a:lstStyle/>
+          <a:p/>
+        </p:txBody>
+      </p:sp>
+      <p:sp>
+        <p:nvSpPr>
+          <p:cNvPr id="14" name="TextBox 13"/>
+          <p:cNvSpPr txBox="1"/>
+          <p:nvPr/>
+        </p:nvSpPr>
+        <p:spPr>
+          <a:xfrm>
+            <a:off x="3493693" y="4046220"/>
+            <a:ext cx="2396413" cy="1234439"/>
+          </a:xfrm>
+          <a:prstGeom prst="rect">
+            <a:avLst/>
+          </a:prstGeom>
+          <a:noFill/>
+        </p:spPr>
+        <p:txBody>
+          <a:bodyPr wrap="square" anchor="t" lIns="0" rIns="0" tIns="0" bIns="0"/>
+          <a:lstStyle/>
+          <a:p>
+            <a:pPr algn="l"/>
+            <a:r>
+              <a:rPr sz="1800" b="0" i="0">
+                <a:solidFill>
+                  <a:srgbClr val="202122"/>
+                </a:solidFill>
+                <a:latin typeface="Calibri"/>
+              </a:rPr>
+              <a:t>Can you currently do the work?</a:t>
+            </a:r>
+          </a:p>
+        </p:txBody>
+      </p:sp>
+      <p:sp>
+        <p:nvSpPr>
+          <p:cNvPr id="15" name="Oval 14"/>
+          <p:cNvSpPr/>
+          <p:nvPr/>
+        </p:nvSpPr>
+        <p:spPr>
+          <a:xfrm>
+            <a:off x="7179754" y="2354580"/>
+            <a:ext cx="640080" cy="640080"/>
+          </a:xfrm>
+          <a:prstGeom prst="ellipse">
+            <a:avLst/>
+          </a:prstGeom>
+          <a:solidFill>
+            <a:srgbClr val="33C17A"/>
+          </a:solidFill>
+          <a:ln>
+            <a:noFill/>
+          </a:ln>
+          <a:effectLst/>
+        </p:spPr>
+        <p:style>
+          <a:lnRef idx="1">
+            <a:schemeClr val="accent1"/>
+          </a:lnRef>
+          <a:fillRef idx="3">
+            <a:schemeClr val="accent1"/>
+          </a:fillRef>
+          <a:effectRef idx="2">
+            <a:schemeClr val="accent1"/>
+          </a:effectRef>
+          <a:fontRef idx="minor">
+            <a:schemeClr val="lt1"/>
+          </a:fontRef>
+        </p:style>
+        <p:txBody>
+          <a:bodyPr rtlCol="0" anchor="ctr" lIns="0" rIns="0" tIns="0" bIns="0"/>
+          <a:lstStyle/>
+          <a:p>
+            <a:pPr algn="ctr"/>
+            <a:r>
+              <a:rPr sz="2000" b="1">
+                <a:solidFill>
+                  <a:srgbClr val="202122"/>
+                </a:solidFill>
+                <a:latin typeface="Calibri"/>
+              </a:rPr>
+              <a:t>3</a:t>
+            </a:r>
+          </a:p>
+        </p:txBody>
+      </p:sp>
+      <p:sp>
+        <p:nvSpPr>
+          <p:cNvPr id="16" name="TextBox 15"/>
+          <p:cNvSpPr txBox="1"/>
+          <p:nvPr/>
+        </p:nvSpPr>
+        <p:spPr>
+          <a:xfrm>
+            <a:off x="6164427" y="3131820"/>
+            <a:ext cx="2670733" cy="731520"/>
+          </a:xfrm>
+          <a:prstGeom prst="rect">
+            <a:avLst/>
+          </a:prstGeom>
+          <a:noFill/>
+        </p:spPr>
+        <p:txBody>
+          <a:bodyPr wrap="square" anchor="t" lIns="0" rIns="0" tIns="0" bIns="0"/>
+          <a:lstStyle/>
+          <a:p>
+            <a:pPr algn="ctr"/>
+            <a:r>
+              <a:rPr sz="1700" b="1" i="0">
+                <a:solidFill>
+                  <a:srgbClr val="03306E"/>
+                </a:solidFill>
+                <a:latin typeface="Calibri"/>
+              </a:rPr>
+              <a:t>Choose</a:t>
+            </a:r>
+          </a:p>
+        </p:txBody>
+      </p:sp>
+      <p:sp>
+        <p:nvSpPr>
+          <p:cNvPr id="17" name="Rounded Rectangle 16"/>
+          <p:cNvSpPr/>
+          <p:nvPr/>
+        </p:nvSpPr>
+        <p:spPr>
+          <a:xfrm>
+            <a:off x="6164427" y="3909060"/>
+            <a:ext cx="2670733" cy="1508760"/>
+          </a:xfrm>
+          <a:prstGeom prst="roundRect">
+            <a:avLst>
+              <a:gd name="adj" fmla="val 6000"/>
+            </a:avLst>
+          </a:prstGeom>
+          <a:solidFill>
+            <a:srgbClr val="EAF3FF"/>
+          </a:solidFill>
+          <a:ln>
+            <a:noFill/>
+          </a:ln>
+          <a:effectLst/>
+        </p:spPr>
+        <p:style>
+          <a:lnRef idx="1">
+            <a:schemeClr val="accent1"/>
+          </a:lnRef>
+          <a:fillRef idx="3">
+            <a:schemeClr val="accent1"/>
+          </a:fillRef>
+          <a:effectRef idx="2">
+            <a:schemeClr val="accent1"/>
+          </a:effectRef>
+          <a:fontRef idx="minor">
+            <a:schemeClr val="lt1"/>
+          </a:fontRef>
+        </p:style>
+        <p:txBody>
+          <a:bodyPr rtlCol="0" anchor="ctr"/>
+          <a:lstStyle/>
+          <a:p/>
+        </p:txBody>
+      </p:sp>
+      <p:sp>
+        <p:nvSpPr>
           <p:cNvPr id="18" name="TextBox 17"/>
           <p:cNvSpPr txBox="1"/>
           <p:nvPr/>
         </p:nvSpPr>
         <p:spPr>
           <a:xfrm>
-            <a:off x="8046720" y="1737360"/>
-            <a:ext cx="3291840" cy="365760"/>
+            <a:off x="6301587" y="4046220"/>
+            <a:ext cx="2396413" cy="1234439"/>
           </a:xfrm>
           <a:prstGeom prst="rect">
             <a:avLst/>
@@ -8056,27 +9480,80 @@
           <a:p>
             <a:pPr algn="l"/>
             <a:r>
-              <a:rPr sz="1300" b="1" i="0">
-                <a:solidFill>
-                  <a:srgbClr val="0645AD"/>
-                </a:solidFill>
-                <a:latin typeface="Calibri"/>
-              </a:rPr>
-              <a:t>SUCCESS CRITERIA</a:t>
-            </a:r>
-          </a:p>
-        </p:txBody>
-      </p:sp>
-      <p:sp>
-        <p:nvSpPr>
-          <p:cNvPr id="19" name="TextBox 18"/>
+              <a:rPr sz="1800" b="0" i="0">
+                <a:solidFill>
+                  <a:srgbClr val="202122"/>
+                </a:solidFill>
+                <a:latin typeface="Calibri"/>
+              </a:rPr>
+              <a:t>Coaching, on-the-job learning, self-study, forums, workshops.</a:t>
+            </a:r>
+          </a:p>
+        </p:txBody>
+      </p:sp>
+      <p:sp>
+        <p:nvSpPr>
+          <p:cNvPr id="19" name="Oval 18"/>
+          <p:cNvSpPr/>
+          <p:nvPr/>
+        </p:nvSpPr>
+        <p:spPr>
+          <a:xfrm>
+            <a:off x="9987648" y="2354580"/>
+            <a:ext cx="640080" cy="640080"/>
+          </a:xfrm>
+          <a:prstGeom prst="ellipse">
+            <a:avLst/>
+          </a:prstGeom>
+          <a:solidFill>
+            <a:srgbClr val="33C17A"/>
+          </a:solidFill>
+          <a:ln>
+            <a:noFill/>
+          </a:ln>
+          <a:effectLst/>
+        </p:spPr>
+        <p:style>
+          <a:lnRef idx="1">
+            <a:schemeClr val="accent1"/>
+          </a:lnRef>
+          <a:fillRef idx="3">
+            <a:schemeClr val="accent1"/>
+          </a:fillRef>
+          <a:effectRef idx="2">
+            <a:schemeClr val="accent1"/>
+          </a:effectRef>
+          <a:fontRef idx="minor">
+            <a:schemeClr val="lt1"/>
+          </a:fontRef>
+        </p:style>
+        <p:txBody>
+          <a:bodyPr rtlCol="0" anchor="ctr" lIns="0" rIns="0" tIns="0" bIns="0"/>
+          <a:lstStyle/>
+          <a:p>
+            <a:pPr algn="ctr"/>
+            <a:r>
+              <a:rPr sz="2000" b="1">
+                <a:solidFill>
+                  <a:srgbClr val="202122"/>
+                </a:solidFill>
+                <a:latin typeface="Calibri"/>
+              </a:rPr>
+              <a:t>4</a:t>
+            </a:r>
+          </a:p>
+        </p:txBody>
+      </p:sp>
+      <p:sp>
+        <p:nvSpPr>
+          <p:cNvPr id="20" name="TextBox 19"/>
           <p:cNvSpPr txBox="1"/>
           <p:nvPr/>
         </p:nvSpPr>
         <p:spPr>
           <a:xfrm>
-            <a:off x="8046720" y="2240280"/>
-            <a:ext cx="3337560" cy="3657600"/>
+            <a:off x="8972321" y="3131820"/>
+            <a:ext cx="2670733" cy="731520"/>
           </a:xfrm>
           <a:prstGeom prst="rect">
             <a:avLst/>
@@ -8084,71 +9561,95 @@
           <a:noFill/>
         </p:spPr>
         <p:txBody>
-          <a:bodyPr wrap="square" lIns="0" rIns="0" tIns="0" bIns="0">
-            <a:spAutoFit/>
-          </a:bodyPr>
-          <a:lstStyle/>
-          <a:p>
-            <a:pPr marL="274320" indent="-274320">
-              <a:spcAft>
-                <a:spcPts val="810"/>
-              </a:spcAft>
-              <a:buClr>
-                <a:srgbClr val="0645AD"/>
-              </a:buClr>
-              <a:buFont typeface="Arial"/>
-              <a:buChar char="•"/>
-            </a:pPr>
-            <a:r>
-              <a:rPr sz="1800" b="0">
+          <a:bodyPr wrap="square" anchor="t" lIns="0" rIns="0" tIns="0" bIns="0"/>
+          <a:lstStyle/>
+          <a:p>
+            <a:pPr algn="ctr"/>
+            <a:r>
+              <a:rPr sz="1700" b="1" i="0">
+                <a:solidFill>
+                  <a:srgbClr val="03306E"/>
+                </a:solidFill>
+                <a:latin typeface="Calibri"/>
+              </a:rPr>
+              <a:t>Learn and apply</a:t>
+            </a:r>
+          </a:p>
+        </p:txBody>
+      </p:sp>
+      <p:sp>
+        <p:nvSpPr>
+          <p:cNvPr id="21" name="Rounded Rectangle 20"/>
+          <p:cNvSpPr/>
+          <p:nvPr/>
+        </p:nvSpPr>
+        <p:spPr>
+          <a:xfrm>
+            <a:off x="8972321" y="3909060"/>
+            <a:ext cx="2670733" cy="1508760"/>
+          </a:xfrm>
+          <a:prstGeom prst="roundRect">
+            <a:avLst>
+              <a:gd name="adj" fmla="val 6000"/>
+            </a:avLst>
+          </a:prstGeom>
+          <a:solidFill>
+            <a:srgbClr val="EAF3FF"/>
+          </a:solidFill>
+          <a:ln>
+            <a:noFill/>
+          </a:ln>
+          <a:effectLst/>
+        </p:spPr>
+        <p:style>
+          <a:lnRef idx="1">
+            <a:schemeClr val="accent1"/>
+          </a:lnRef>
+          <a:fillRef idx="3">
+            <a:schemeClr val="accent1"/>
+          </a:fillRef>
+          <a:effectRef idx="2">
+            <a:schemeClr val="accent1"/>
+          </a:effectRef>
+          <a:fontRef idx="minor">
+            <a:schemeClr val="lt1"/>
+          </a:fontRef>
+        </p:style>
+        <p:txBody>
+          <a:bodyPr rtlCol="0" anchor="ctr"/>
+          <a:lstStyle/>
+          <a:p/>
+        </p:txBody>
+      </p:sp>
+      <p:sp>
+        <p:nvSpPr>
+          <p:cNvPr id="22" name="TextBox 21"/>
+          <p:cNvSpPr txBox="1"/>
+          <p:nvPr/>
+        </p:nvSpPr>
+        <p:spPr>
+          <a:xfrm>
+            <a:off x="9109481" y="4046220"/>
+            <a:ext cx="2396413" cy="1234439"/>
+          </a:xfrm>
+          <a:prstGeom prst="rect">
+            <a:avLst/>
+          </a:prstGeom>
+          <a:noFill/>
+        </p:spPr>
+        <p:txBody>
+          <a:bodyPr wrap="square" anchor="t" lIns="0" rIns="0" tIns="0" bIns="0"/>
+          <a:lstStyle/>
+          <a:p>
+            <a:pPr algn="l"/>
+            <a:r>
+              <a:rPr sz="1800" b="0" i="0">
                 <a:solidFill>
                   <a:srgbClr val="202122"/>
                 </a:solidFill>
                 <a:latin typeface="Calibri"/>
               </a:rPr>
-              <a:t>Skills are specific</a:t>
-            </a:r>
-          </a:p>
-          <a:p>
-            <a:pPr marL="274320" indent="-274320">
-              <a:spcAft>
-                <a:spcPts val="810"/>
-              </a:spcAft>
-              <a:buClr>
-                <a:srgbClr val="0645AD"/>
-              </a:buClr>
-              <a:buFont typeface="Arial"/>
-              <a:buChar char="•"/>
-            </a:pPr>
-            <a:r>
-              <a:rPr sz="1800" b="0">
-                <a:solidFill>
-                  <a:srgbClr val="202122"/>
-                </a:solidFill>
-                <a:latin typeface="Calibri"/>
-              </a:rPr>
-              <a:t>Honest self-assessment</a:t>
-            </a:r>
-          </a:p>
-          <a:p>
-            <a:pPr marL="274320" indent="-274320">
-              <a:spcAft>
-                <a:spcPts val="810"/>
-              </a:spcAft>
-              <a:buClr>
-                <a:srgbClr val="0645AD"/>
-              </a:buClr>
-              <a:buFont typeface="Arial"/>
-              <a:buChar char="•"/>
-            </a:pPr>
-            <a:r>
-              <a:rPr sz="1800" b="0">
-                <a:solidFill>
-                  <a:srgbClr val="202122"/>
-                </a:solidFill>
-                <a:latin typeface="Calibri"/>
-              </a:rPr>
-              <a:t>Learning methods are realistic</a:t>
+              <a:t>Close the gap and use it in the project.</a:t>
             </a:r>
           </a:p>
         </p:txBody>
@@ -8167,7 +9668,7 @@
     <p:bg>
       <p:bgPr>
         <a:solidFill>
-          <a:srgbClr val="03306E"/>
+          <a:srgbClr val="FFFFFF"/>
         </a:solidFill>
         <a:effectLst/>
       </p:bgPr>
@@ -8203,7 +9704,7 @@
             <a:r>
               <a:rPr sz="1100" b="1" i="0">
                 <a:solidFill>
-                  <a:srgbClr val="A9C8F0"/>
+                  <a:srgbClr val="54595D"/>
                 </a:solidFill>
                 <a:latin typeface="Calibri"/>
               </a:rPr>
@@ -8234,26 +9735,92 @@
           <a:p>
             <a:pPr algn="l"/>
             <a:r>
-              <a:rPr sz="3200" b="1" i="0">
-                <a:solidFill>
-                  <a:srgbClr val="FFFFFF"/>
+              <a:rPr sz="3100" b="1" i="0">
+                <a:solidFill>
+                  <a:srgbClr val="03306E"/>
                 </a:solidFill>
                 <a:latin typeface="Cambria"/>
               </a:rPr>
-              <a:t>Exit ticket</a:t>
-            </a:r>
-          </a:p>
-        </p:txBody>
-      </p:sp>
-      <p:sp>
-        <p:nvSpPr>
-          <p:cNvPr id="4" name="Oval 3"/>
+              <a:t>Quick check: Identifying and addressing training needs</a:t>
+            </a:r>
+          </a:p>
+        </p:txBody>
+      </p:sp>
+      <p:sp>
+        <p:nvSpPr>
+          <p:cNvPr id="4" name="TextBox 3"/>
+          <p:cNvSpPr txBox="1"/>
+          <p:nvPr/>
+        </p:nvSpPr>
+        <p:spPr>
+          <a:xfrm>
+            <a:off x="548640" y="6446520"/>
+            <a:ext cx="8229600" cy="274320"/>
+          </a:xfrm>
+          <a:prstGeom prst="rect">
+            <a:avLst/>
+          </a:prstGeom>
+          <a:noFill/>
+        </p:spPr>
+        <p:txBody>
+          <a:bodyPr wrap="square" anchor="t" lIns="0" rIns="0" tIns="0" bIns="0"/>
+          <a:lstStyle/>
+          <a:p>
+            <a:pPr algn="l"/>
+            <a:r>
+              <a:rPr sz="1000" b="0" i="0">
+                <a:solidFill>
+                  <a:srgbClr val="54595D"/>
+                </a:solidFill>
+                <a:latin typeface="Calibri"/>
+              </a:rPr>
+              <a:t>Digital Software Development T Level  ·  Emerging Technologies and Developing Your Skills</a:t>
+            </a:r>
+          </a:p>
+        </p:txBody>
+      </p:sp>
+      <p:sp>
+        <p:nvSpPr>
+          <p:cNvPr id="5" name="TextBox 4"/>
+          <p:cNvSpPr txBox="1"/>
+          <p:nvPr/>
+        </p:nvSpPr>
+        <p:spPr>
+          <a:xfrm>
+            <a:off x="10728655" y="6446520"/>
+            <a:ext cx="914400" cy="274320"/>
+          </a:xfrm>
+          <a:prstGeom prst="rect">
+            <a:avLst/>
+          </a:prstGeom>
+          <a:noFill/>
+        </p:spPr>
+        <p:txBody>
+          <a:bodyPr wrap="square" anchor="t" lIns="0" rIns="0" tIns="0" bIns="0"/>
+          <a:lstStyle/>
+          <a:p>
+            <a:pPr algn="r"/>
+            <a:r>
+              <a:rPr sz="1000" b="0" i="0">
+                <a:solidFill>
+                  <a:srgbClr val="54595D"/>
+                </a:solidFill>
+                <a:latin typeface="Calibri"/>
+              </a:rPr>
+              <a:t>8</a:t>
+            </a:r>
+          </a:p>
+        </p:txBody>
+      </p:sp>
+      <p:sp>
+        <p:nvSpPr>
+          <p:cNvPr id="6" name="Oval 5"/>
           <p:cNvSpPr/>
           <p:nvPr/>
         </p:nvSpPr>
         <p:spPr>
           <a:xfrm>
-            <a:off x="548640" y="1737360"/>
+            <a:off x="548640" y="1691640"/>
             <a:ext cx="502920" cy="502920"/>
           </a:xfrm>
           <a:prstGeom prst="ellipse">
@@ -8287,7 +9854,7 @@
           <a:p>
             <a:pPr algn="ctr"/>
             <a:r>
-              <a:rPr sz="1700" b="1">
+              <a:rPr sz="1600" b="1">
                 <a:solidFill>
                   <a:srgbClr val="202122"/>
                 </a:solidFill>
@@ -8300,14 +9867,14 @@
       </p:sp>
       <p:sp>
         <p:nvSpPr>
-          <p:cNvPr id="5" name="TextBox 4"/>
+          <p:cNvPr id="7" name="TextBox 6"/>
           <p:cNvSpPr txBox="1"/>
           <p:nvPr/>
         </p:nvSpPr>
         <p:spPr>
           <a:xfrm>
-            <a:off x="1325880" y="1645920"/>
-            <a:ext cx="6583680" cy="822960"/>
+            <a:off x="1371600" y="1645920"/>
+            <a:ext cx="10271455" cy="1188720"/>
           </a:xfrm>
           <a:prstGeom prst="rect">
             <a:avLst/>
@@ -8315,31 +9882,31 @@
           <a:noFill/>
         </p:spPr>
         <p:txBody>
-          <a:bodyPr wrap="square" anchor="ctr" lIns="0" rIns="0" tIns="0" bIns="0"/>
+          <a:bodyPr wrap="square" anchor="t" lIns="0" rIns="0" tIns="0" bIns="0"/>
           <a:lstStyle/>
           <a:p>
             <a:pPr algn="l"/>
             <a:r>
-              <a:rPr sz="2000" b="0" i="0">
-                <a:solidFill>
-                  <a:srgbClr val="FFFFFF"/>
-                </a:solidFill>
-                <a:latin typeface="Calibri"/>
-              </a:rPr>
-              <a:t>Which emerging technology excites you most?</a:t>
-            </a:r>
-          </a:p>
-        </p:txBody>
-      </p:sp>
-      <p:sp>
-        <p:nvSpPr>
-          <p:cNvPr id="6" name="Oval 5"/>
+              <a:rPr sz="2400" b="0" i="0">
+                <a:solidFill>
+                  <a:srgbClr val="202122"/>
+                </a:solidFill>
+                <a:latin typeface="Calibri"/>
+              </a:rPr>
+              <a:t>What should you do before starting a project?</a:t>
+            </a:r>
+          </a:p>
+        </p:txBody>
+      </p:sp>
+      <p:sp>
+        <p:nvSpPr>
+          <p:cNvPr id="8" name="Oval 7"/>
           <p:cNvSpPr/>
           <p:nvPr/>
         </p:nvSpPr>
         <p:spPr>
           <a:xfrm>
-            <a:off x="548640" y="2697480"/>
+            <a:off x="548640" y="3108960"/>
             <a:ext cx="502920" cy="502920"/>
           </a:xfrm>
           <a:prstGeom prst="ellipse">
@@ -8373,7 +9940,7 @@
           <a:p>
             <a:pPr algn="ctr"/>
             <a:r>
-              <a:rPr sz="1700" b="1">
+              <a:rPr sz="1600" b="1">
                 <a:solidFill>
                   <a:srgbClr val="202122"/>
                 </a:solidFill>
@@ -8386,14 +9953,14 @@
       </p:sp>
       <p:sp>
         <p:nvSpPr>
-          <p:cNvPr id="7" name="TextBox 6"/>
+          <p:cNvPr id="9" name="TextBox 8"/>
           <p:cNvSpPr txBox="1"/>
           <p:nvPr/>
         </p:nvSpPr>
         <p:spPr>
           <a:xfrm>
-            <a:off x="1325880" y="2606040"/>
-            <a:ext cx="6583680" cy="822960"/>
+            <a:off x="1371600" y="3063240"/>
+            <a:ext cx="10271455" cy="1188720"/>
           </a:xfrm>
           <a:prstGeom prst="rect">
             <a:avLst/>
@@ -8401,31 +9968,31 @@
           <a:noFill/>
         </p:spPr>
         <p:txBody>
-          <a:bodyPr wrap="square" anchor="ctr" lIns="0" rIns="0" tIns="0" bIns="0"/>
+          <a:bodyPr wrap="square" anchor="t" lIns="0" rIns="0" tIns="0" bIns="0"/>
           <a:lstStyle/>
           <a:p>
             <a:pPr algn="l"/>
             <a:r>
-              <a:rPr sz="2000" b="0" i="0">
-                <a:solidFill>
-                  <a:srgbClr val="FFFFFF"/>
-                </a:solidFill>
-                <a:latin typeface="Calibri"/>
-              </a:rPr>
-              <a:t>What is one skill gap you have right now?</a:t>
-            </a:r>
-          </a:p>
-        </p:txBody>
-      </p:sp>
-      <p:sp>
-        <p:nvSpPr>
-          <p:cNvPr id="8" name="Oval 7"/>
+              <a:rPr sz="2400" b="0" i="0">
+                <a:solidFill>
+                  <a:srgbClr val="202122"/>
+                </a:solidFill>
+                <a:latin typeface="Calibri"/>
+              </a:rPr>
+              <a:t>Give three ways to close a skills gap.</a:t>
+            </a:r>
+          </a:p>
+        </p:txBody>
+      </p:sp>
+      <p:sp>
+        <p:nvSpPr>
+          <p:cNvPr id="10" name="Oval 9"/>
           <p:cNvSpPr/>
           <p:nvPr/>
         </p:nvSpPr>
         <p:spPr>
           <a:xfrm>
-            <a:off x="548640" y="3657600"/>
+            <a:off x="548640" y="4526280"/>
             <a:ext cx="502920" cy="502920"/>
           </a:xfrm>
           <a:prstGeom prst="ellipse">
@@ -8459,7 +10026,7 @@
           <a:p>
             <a:pPr algn="ctr"/>
             <a:r>
-              <a:rPr sz="1700" b="1">
+              <a:rPr sz="1600" b="1">
                 <a:solidFill>
                   <a:srgbClr val="202122"/>
                 </a:solidFill>
@@ -8472,14 +10039,14 @@
       </p:sp>
       <p:sp>
         <p:nvSpPr>
-          <p:cNvPr id="9" name="TextBox 8"/>
+          <p:cNvPr id="11" name="TextBox 10"/>
           <p:cNvSpPr txBox="1"/>
           <p:nvPr/>
         </p:nvSpPr>
         <p:spPr>
           <a:xfrm>
-            <a:off x="1325880" y="3566160"/>
-            <a:ext cx="6583680" cy="822960"/>
+            <a:off x="1371600" y="4480560"/>
+            <a:ext cx="10271455" cy="1188720"/>
           </a:xfrm>
           <a:prstGeom prst="rect">
             <a:avLst/>
@@ -8487,40 +10054,229 @@
           <a:noFill/>
         </p:spPr>
         <p:txBody>
+          <a:bodyPr wrap="square" anchor="t" lIns="0" rIns="0" tIns="0" bIns="0"/>
+          <a:lstStyle/>
+          <a:p>
+            <a:pPr algn="l"/>
+            <a:r>
+              <a:rPr sz="2400" b="0" i="0">
+                <a:solidFill>
+                  <a:srgbClr val="202122"/>
+                </a:solidFill>
+                <a:latin typeface="Calibri"/>
+              </a:rPr>
+              <a:t>Why must developers keep learning?</a:t>
+            </a:r>
+          </a:p>
+        </p:txBody>
+      </p:sp>
+      <p:sp>
+        <p:nvSpPr>
+          <p:cNvPr id="12" name="TextBox 11"/>
+          <p:cNvSpPr txBox="1"/>
+          <p:nvPr/>
+        </p:nvSpPr>
+        <p:spPr>
+          <a:xfrm>
+            <a:off x="548640" y="5852160"/>
+            <a:ext cx="11094415" cy="365760"/>
+          </a:xfrm>
+          <a:prstGeom prst="rect">
+            <a:avLst/>
+          </a:prstGeom>
+          <a:noFill/>
+        </p:spPr>
+        <p:txBody>
+          <a:bodyPr wrap="square" anchor="t" lIns="0" rIns="0" tIns="0" bIns="0"/>
+          <a:lstStyle/>
+          <a:p>
+            <a:pPr algn="l"/>
+            <a:r>
+              <a:rPr sz="1300" b="0" i="1">
+                <a:solidFill>
+                  <a:srgbClr val="54595D"/>
+                </a:solidFill>
+                <a:latin typeface="Calibri"/>
+              </a:rPr>
+              <a:t>Answer on mini whiteboards or in your book. Answers are in the speaker notes.</a:t>
+            </a:r>
+          </a:p>
+        </p:txBody>
+      </p:sp>
+    </p:spTree>
+  </p:cSld>
+  <p:clrMapOvr>
+    <a:masterClrMapping/>
+  </p:clrMapOvr>
+</p:sld>
+</file>
+
+<file path=ppt/slides/slide9.xml><?xml version="1.0" encoding="utf-8"?>
+<p:sld xmlns:a="http://schemas.openxmlformats.org/drawingml/2006/main" xmlns:p="http://schemas.openxmlformats.org/presentationml/2006/main" xmlns:r="http://schemas.openxmlformats.org/officeDocument/2006/relationships">
+  <p:cSld>
+    <p:bg>
+      <p:bgPr>
+        <a:solidFill>
+          <a:srgbClr val="FFFFFF"/>
+        </a:solidFill>
+        <a:effectLst/>
+      </p:bgPr>
+    </p:bg>
+    <p:spTree>
+      <p:nvGrpSpPr>
+        <p:cNvPr id="1" name=""/>
+        <p:cNvGrpSpPr/>
+        <p:nvPr/>
+      </p:nvGrpSpPr>
+      <p:grpSpPr/>
+      <p:sp>
+        <p:nvSpPr>
+          <p:cNvPr id="2" name="TextBox 1"/>
+          <p:cNvSpPr txBox="1"/>
+          <p:nvPr/>
+        </p:nvSpPr>
+        <p:spPr>
+          <a:xfrm>
+            <a:off x="548640" y="320040"/>
+            <a:ext cx="11094415" cy="274320"/>
+          </a:xfrm>
+          <a:prstGeom prst="rect">
+            <a:avLst/>
+          </a:prstGeom>
+          <a:noFill/>
+        </p:spPr>
+        <p:txBody>
+          <a:bodyPr wrap="square" anchor="t" lIns="0" rIns="0" tIns="0" bIns="0"/>
+          <a:lstStyle/>
+          <a:p>
+            <a:pPr algn="l"/>
+            <a:r>
+              <a:rPr sz="1100" b="1" i="0">
+                <a:solidFill>
+                  <a:srgbClr val="54595D"/>
+                </a:solidFill>
+                <a:latin typeface="Calibri"/>
+              </a:rPr>
+              <a:t>OCCUPATIONAL SPECIALISM  ·  Specialism Content Area 1</a:t>
+            </a:r>
+          </a:p>
+        </p:txBody>
+      </p:sp>
+      <p:sp>
+        <p:nvSpPr>
+          <p:cNvPr id="3" name="TextBox 2"/>
+          <p:cNvSpPr txBox="1"/>
+          <p:nvPr/>
+        </p:nvSpPr>
+        <p:spPr>
+          <a:xfrm>
+            <a:off x="548640" y="566928"/>
+            <a:ext cx="11094415" cy="822960"/>
+          </a:xfrm>
+          <a:prstGeom prst="rect">
+            <a:avLst/>
+          </a:prstGeom>
+          <a:noFill/>
+        </p:spPr>
+        <p:txBody>
           <a:bodyPr wrap="square" anchor="ctr" lIns="0" rIns="0" tIns="0" bIns="0"/>
           <a:lstStyle/>
           <a:p>
             <a:pPr algn="l"/>
             <a:r>
-              <a:rPr sz="2000" b="0" i="0">
-                <a:solidFill>
-                  <a:srgbClr val="FFFFFF"/>
-                </a:solidFill>
-                <a:latin typeface="Calibri"/>
-              </a:rPr>
-              <a:t>How would you find out if you are ready for a task?</a:t>
-            </a:r>
-          </a:p>
-        </p:txBody>
-      </p:sp>
-      <p:sp>
-        <p:nvSpPr>
-          <p:cNvPr id="10" name="Rounded Rectangle 9"/>
+              <a:rPr sz="3200" b="1" i="0">
+                <a:solidFill>
+                  <a:srgbClr val="03306E"/>
+                </a:solidFill>
+                <a:latin typeface="Cambria"/>
+              </a:rPr>
+              <a:t>Check your understanding</a:t>
+            </a:r>
+          </a:p>
+        </p:txBody>
+      </p:sp>
+      <p:sp>
+        <p:nvSpPr>
+          <p:cNvPr id="4" name="TextBox 3"/>
+          <p:cNvSpPr txBox="1"/>
+          <p:nvPr/>
+        </p:nvSpPr>
+        <p:spPr>
+          <a:xfrm>
+            <a:off x="548640" y="6446520"/>
+            <a:ext cx="8229600" cy="274320"/>
+          </a:xfrm>
+          <a:prstGeom prst="rect">
+            <a:avLst/>
+          </a:prstGeom>
+          <a:noFill/>
+        </p:spPr>
+        <p:txBody>
+          <a:bodyPr wrap="square" anchor="t" lIns="0" rIns="0" tIns="0" bIns="0"/>
+          <a:lstStyle/>
+          <a:p>
+            <a:pPr algn="l"/>
+            <a:r>
+              <a:rPr sz="1000" b="0" i="0">
+                <a:solidFill>
+                  <a:srgbClr val="54595D"/>
+                </a:solidFill>
+                <a:latin typeface="Calibri"/>
+              </a:rPr>
+              <a:t>Digital Software Development T Level  ·  Emerging Technologies and Developing Your Skills</a:t>
+            </a:r>
+          </a:p>
+        </p:txBody>
+      </p:sp>
+      <p:sp>
+        <p:nvSpPr>
+          <p:cNvPr id="5" name="TextBox 4"/>
+          <p:cNvSpPr txBox="1"/>
+          <p:nvPr/>
+        </p:nvSpPr>
+        <p:spPr>
+          <a:xfrm>
+            <a:off x="10728655" y="6446520"/>
+            <a:ext cx="914400" cy="274320"/>
+          </a:xfrm>
+          <a:prstGeom prst="rect">
+            <a:avLst/>
+          </a:prstGeom>
+          <a:noFill/>
+        </p:spPr>
+        <p:txBody>
+          <a:bodyPr wrap="square" anchor="t" lIns="0" rIns="0" tIns="0" bIns="0"/>
+          <a:lstStyle/>
+          <a:p>
+            <a:pPr algn="r"/>
+            <a:r>
+              <a:rPr sz="1000" b="0" i="0">
+                <a:solidFill>
+                  <a:srgbClr val="54595D"/>
+                </a:solidFill>
+                <a:latin typeface="Calibri"/>
+              </a:rPr>
+              <a:t>9</a:t>
+            </a:r>
+          </a:p>
+        </p:txBody>
+      </p:sp>
+      <p:sp>
+        <p:nvSpPr>
+          <p:cNvPr id="6" name="Oval 5"/>
           <p:cNvSpPr/>
           <p:nvPr/>
         </p:nvSpPr>
         <p:spPr>
           <a:xfrm>
-            <a:off x="8229600" y="1645920"/>
-            <a:ext cx="3410712" cy="2926080"/>
-          </a:xfrm>
-          <a:prstGeom prst="roundRect">
-            <a:avLst>
-              <a:gd name="adj" fmla="val 8000"/>
-            </a:avLst>
+            <a:off x="548640" y="1618488"/>
+            <a:ext cx="411480" cy="411480"/>
+          </a:xfrm>
+          <a:prstGeom prst="ellipse">
+            <a:avLst/>
           </a:prstGeom>
           <a:solidFill>
-            <a:srgbClr val="0645AD"/>
+            <a:srgbClr val="33C17A"/>
           </a:solidFill>
           <a:ln>
             <a:noFill/>
@@ -8542,9 +10298,192 @@
           </a:fontRef>
         </p:style>
         <p:txBody>
-          <a:bodyPr rtlCol="0" anchor="ctr"/>
-          <a:lstStyle/>
-          <a:p/>
+          <a:bodyPr rtlCol="0" anchor="ctr" lIns="0" rIns="0" tIns="0" bIns="0"/>
+          <a:lstStyle/>
+          <a:p>
+            <a:pPr algn="ctr"/>
+            <a:r>
+              <a:rPr sz="1400" b="1">
+                <a:solidFill>
+                  <a:srgbClr val="202122"/>
+                </a:solidFill>
+                <a:latin typeface="Calibri"/>
+              </a:rPr>
+              <a:t>1</a:t>
+            </a:r>
+          </a:p>
+        </p:txBody>
+      </p:sp>
+      <p:sp>
+        <p:nvSpPr>
+          <p:cNvPr id="7" name="TextBox 6"/>
+          <p:cNvSpPr txBox="1"/>
+          <p:nvPr/>
+        </p:nvSpPr>
+        <p:spPr>
+          <a:xfrm>
+            <a:off x="1234440" y="1600200"/>
+            <a:ext cx="10408615" cy="1429512"/>
+          </a:xfrm>
+          <a:prstGeom prst="rect">
+            <a:avLst/>
+          </a:prstGeom>
+          <a:noFill/>
+        </p:spPr>
+        <p:txBody>
+          <a:bodyPr wrap="square" anchor="t" lIns="0" rIns="0" tIns="0" bIns="0"/>
+          <a:lstStyle/>
+          <a:p>
+            <a:pPr algn="l"/>
+            <a:r>
+              <a:rPr sz="2200" b="0" i="0">
+                <a:solidFill>
+                  <a:srgbClr val="202122"/>
+                </a:solidFill>
+                <a:latin typeface="Calibri"/>
+              </a:rPr>
+              <a:t>What is computer vision?</a:t>
+            </a:r>
+          </a:p>
+        </p:txBody>
+      </p:sp>
+      <p:sp>
+        <p:nvSpPr>
+          <p:cNvPr id="8" name="Oval 7"/>
+          <p:cNvSpPr/>
+          <p:nvPr/>
+        </p:nvSpPr>
+        <p:spPr>
+          <a:xfrm>
+            <a:off x="548640" y="3212592"/>
+            <a:ext cx="411480" cy="411480"/>
+          </a:xfrm>
+          <a:prstGeom prst="ellipse">
+            <a:avLst/>
+          </a:prstGeom>
+          <a:solidFill>
+            <a:srgbClr val="33C17A"/>
+          </a:solidFill>
+          <a:ln>
+            <a:noFill/>
+          </a:ln>
+          <a:effectLst/>
+        </p:spPr>
+        <p:style>
+          <a:lnRef idx="1">
+            <a:schemeClr val="accent1"/>
+          </a:lnRef>
+          <a:fillRef idx="3">
+            <a:schemeClr val="accent1"/>
+          </a:fillRef>
+          <a:effectRef idx="2">
+            <a:schemeClr val="accent1"/>
+          </a:effectRef>
+          <a:fontRef idx="minor">
+            <a:schemeClr val="lt1"/>
+          </a:fontRef>
+        </p:style>
+        <p:txBody>
+          <a:bodyPr rtlCol="0" anchor="ctr" lIns="0" rIns="0" tIns="0" bIns="0"/>
+          <a:lstStyle/>
+          <a:p>
+            <a:pPr algn="ctr"/>
+            <a:r>
+              <a:rPr sz="1400" b="1">
+                <a:solidFill>
+                  <a:srgbClr val="202122"/>
+                </a:solidFill>
+                <a:latin typeface="Calibri"/>
+              </a:rPr>
+              <a:t>2</a:t>
+            </a:r>
+          </a:p>
+        </p:txBody>
+      </p:sp>
+      <p:sp>
+        <p:nvSpPr>
+          <p:cNvPr id="9" name="TextBox 8"/>
+          <p:cNvSpPr txBox="1"/>
+          <p:nvPr/>
+        </p:nvSpPr>
+        <p:spPr>
+          <a:xfrm>
+            <a:off x="1234440" y="3194304"/>
+            <a:ext cx="10408615" cy="1429512"/>
+          </a:xfrm>
+          <a:prstGeom prst="rect">
+            <a:avLst/>
+          </a:prstGeom>
+          <a:noFill/>
+        </p:spPr>
+        <p:txBody>
+          <a:bodyPr wrap="square" anchor="t" lIns="0" rIns="0" tIns="0" bIns="0"/>
+          <a:lstStyle/>
+          <a:p>
+            <a:pPr algn="l"/>
+            <a:r>
+              <a:rPr sz="2200" b="0" i="0">
+                <a:solidFill>
+                  <a:srgbClr val="202122"/>
+                </a:solidFill>
+                <a:latin typeface="Calibri"/>
+              </a:rPr>
+              <a:t>Give two ways to close a skills gap.</a:t>
+            </a:r>
+          </a:p>
+        </p:txBody>
+      </p:sp>
+      <p:sp>
+        <p:nvSpPr>
+          <p:cNvPr id="10" name="Oval 9"/>
+          <p:cNvSpPr/>
+          <p:nvPr/>
+        </p:nvSpPr>
+        <p:spPr>
+          <a:xfrm>
+            <a:off x="548640" y="4806695"/>
+            <a:ext cx="411480" cy="411480"/>
+          </a:xfrm>
+          <a:prstGeom prst="ellipse">
+            <a:avLst/>
+          </a:prstGeom>
+          <a:solidFill>
+            <a:srgbClr val="33C17A"/>
+          </a:solidFill>
+          <a:ln>
+            <a:noFill/>
+          </a:ln>
+          <a:effectLst/>
+        </p:spPr>
+        <p:style>
+          <a:lnRef idx="1">
+            <a:schemeClr val="accent1"/>
+          </a:lnRef>
+          <a:fillRef idx="3">
+            <a:schemeClr val="accent1"/>
+          </a:fillRef>
+          <a:effectRef idx="2">
+            <a:schemeClr val="accent1"/>
+          </a:effectRef>
+          <a:fontRef idx="minor">
+            <a:schemeClr val="lt1"/>
+          </a:fontRef>
+        </p:style>
+        <p:txBody>
+          <a:bodyPr rtlCol="0" anchor="ctr" lIns="0" rIns="0" tIns="0" bIns="0"/>
+          <a:lstStyle/>
+          <a:p>
+            <a:pPr algn="ctr"/>
+            <a:r>
+              <a:rPr sz="1400" b="1">
+                <a:solidFill>
+                  <a:srgbClr val="202122"/>
+                </a:solidFill>
+                <a:latin typeface="Calibri"/>
+              </a:rPr>
+              <a:t>3</a:t>
+            </a:r>
+          </a:p>
         </p:txBody>
       </p:sp>
       <p:sp>
@@ -8555,8 +10494,8 @@
         </p:nvSpPr>
         <p:spPr>
           <a:xfrm>
-            <a:off x="8503920" y="1874519"/>
-            <a:ext cx="2926080" cy="365760"/>
+            <a:off x="1234440" y="4788408"/>
+            <a:ext cx="10408615" cy="1429512"/>
           </a:xfrm>
           <a:prstGeom prst="rect">
             <a:avLst/>
@@ -8569,112 +10508,13 @@
           <a:p>
             <a:pPr algn="l"/>
             <a:r>
-              <a:rPr sz="1300" b="1" i="0">
-                <a:solidFill>
-                  <a:srgbClr val="A9C8F0"/>
-                </a:solidFill>
-                <a:latin typeface="Calibri"/>
-              </a:rPr>
-              <a:t>REVISE THIS TOPIC</a:t>
-            </a:r>
-          </a:p>
-        </p:txBody>
-      </p:sp>
-      <p:sp>
-        <p:nvSpPr>
-          <p:cNvPr id="12" name="TextBox 11"/>
-          <p:cNvSpPr txBox="1"/>
-          <p:nvPr/>
-        </p:nvSpPr>
-        <p:spPr>
-          <a:xfrm>
-            <a:off x="8503920" y="2286000"/>
-            <a:ext cx="2926080" cy="548640"/>
-          </a:xfrm>
-          <a:prstGeom prst="rect">
-            <a:avLst/>
-          </a:prstGeom>
-          <a:noFill/>
-        </p:spPr>
-        <p:txBody>
-          <a:bodyPr wrap="square" anchor="t" lIns="0" rIns="0" tIns="0" bIns="0"/>
-          <a:lstStyle/>
-          <a:p>
-            <a:pPr algn="l"/>
-            <a:r>
-              <a:rPr sz="1400" b="0" i="0">
-                <a:solidFill>
-                  <a:srgbClr val="FFFFFF"/>
-                </a:solidFill>
-                <a:latin typeface="Calibri"/>
-              </a:rPr>
-              <a:t>Revision notes for this lesson are on the study wiki:</a:t>
-            </a:r>
-          </a:p>
-        </p:txBody>
-      </p:sp>
-      <p:sp>
-        <p:nvSpPr>
-          <p:cNvPr id="13" name="TextBox 12"/>
-          <p:cNvSpPr txBox="1"/>
-          <p:nvPr/>
-        </p:nvSpPr>
-        <p:spPr>
-          <a:xfrm>
-            <a:off x="8503920" y="2926080"/>
-            <a:ext cx="2926080" cy="1463040"/>
-          </a:xfrm>
-          <a:prstGeom prst="rect">
-            <a:avLst/>
-          </a:prstGeom>
-          <a:noFill/>
-        </p:spPr>
-        <p:txBody>
-          <a:bodyPr wrap="square" anchor="t" lIns="0" rIns="0" tIns="0" bIns="0"/>
-          <a:lstStyle/>
-          <a:p>
-            <a:pPr algn="l"/>
-            <a:r>
-              <a:rPr sz="2000" b="1" i="0">
-                <a:solidFill>
-                  <a:srgbClr val="FFFFFF"/>
-                </a:solidFill>
-                <a:latin typeface="Cambria"/>
-              </a:rPr>
-              <a:t>Analyse a Problem</a:t>
-            </a:r>
-          </a:p>
-        </p:txBody>
-      </p:sp>
-      <p:sp>
-        <p:nvSpPr>
-          <p:cNvPr id="14" name="TextBox 13"/>
-          <p:cNvSpPr txBox="1"/>
-          <p:nvPr/>
-        </p:nvSpPr>
-        <p:spPr>
-          <a:xfrm>
-            <a:off x="548640" y="5669280"/>
-            <a:ext cx="11094415" cy="548640"/>
-          </a:xfrm>
-          <a:prstGeom prst="rect">
-            <a:avLst/>
-          </a:prstGeom>
-          <a:noFill/>
-        </p:spPr>
-        <p:txBody>
-          <a:bodyPr wrap="square" anchor="t" lIns="0" rIns="0" tIns="0" bIns="0"/>
-          <a:lstStyle/>
-          <a:p>
-            <a:pPr algn="l"/>
-            <a:r>
-              <a:rPr sz="1200" b="0" i="0">
-                <a:solidFill>
-                  <a:srgbClr val="A9C8F0"/>
-                </a:solidFill>
-                <a:latin typeface="Calibri"/>
-              </a:rPr>
-              <a:t>https://lana6478.github.io/T-level-Digital-Software-Development/#/02-occupational-specialism/01-analyse-a-problem.md</a:t>
+              <a:rPr sz="2200" b="0" i="0">
+                <a:solidFill>
+                  <a:srgbClr val="202122"/>
+                </a:solidFill>
+                <a:latin typeface="Calibri"/>
+              </a:rPr>
+              <a:t>What is operational technology?</a:t>
             </a:r>
           </a:p>
         </p:txBody>
